--- a/Styled_Slides.pptx
+++ b/Styled_Slides.pptx
@@ -14,7 +14,6 @@
     <p:sldId id="262" r:id="rId13"/>
     <p:sldId id="263" r:id="rId14"/>
     <p:sldId id="264" r:id="rId15"/>
-    <p:sldId id="265" r:id="rId16"/>
   </p:sldIdLst>
   <p:sldSz cx="12191695" cy="6858000" type="screen4x3"/>
   <p:notesSz cx="6858000" cy="9144000"/>
@@ -3162,7 +3161,7 @@
               </a:defRPr>
             </a:pPr>
             <a:r>
-              <a:t>This lecture explores the concept of nondeterminism through relatable analogies.  Nondeterminism, in its simplest form, describes systems where the next state isn't solely determined by the current state; multiple possibilities exist.  Unlike a deterministic system (like a clock, where each tick follows predictably from the last), a nondeterministic system incorporates chance, choice, or unknown factors. We'll examine how this plays out in navigating a maze, internet routing, and chess strategy, to illustrate the practical implications of this seemingly abstract concept.  This understanding is crucial in various fields, including computer science and artificial intelligence.</a:t>
+              <a:t>This lecture explores the concept of nondeterminism – a crucial concept in computer science, mathematics, and even philosophy.  Unlike determinism, where a single outcome follows a given input, nondeterminism allows for multiple possible outcomes.  We will approach this seemingly abstract idea using concrete, relatable examples – navigating a maze, internet packet routing, and planning chess moves – to illuminate the core principles and applications of nondeterminism.  Understanding nondeterminism is vital for grasping the limitations and potential of computational systems and modeling real-world uncertainties.</a:t>
             </a:r>
           </a:p>
         </p:txBody>
@@ -3253,7 +3252,7 @@
 </p:sld>
 </file>
 
-<file path=ppt/slides/slide10.xml><?xml version="1.0" encoding="utf-8"?>
+<file path=ppt/slides/slide2.xml><?xml version="1.0" encoding="utf-8"?>
 <p:sld xmlns:a="http://schemas.openxmlformats.org/drawingml/2006/main" xmlns:p="http://schemas.openxmlformats.org/presentationml/2006/main" xmlns:r="http://schemas.openxmlformats.org/officeDocument/2006/relationships">
   <p:cSld>
     <p:bg>
@@ -3294,7 +3293,7 @@
               </a:defRPr>
             </a:pPr>
             <a:r>
-              <a:t>Thank You!</a:t>
+              <a:t>Lecture Outline: Understanding Nondeterminism</a:t>
             </a:r>
           </a:p>
         </p:txBody>
@@ -3328,55 +3327,7 @@
               </a:defRPr>
             </a:pPr>
             <a:r>
-              <a:t>This slide serves as a closing statement, thanking the audience for their participation.</a:t>
-            </a:r>
-          </a:p>
-          <a:p>
-            <a:pPr algn="l">
-              <a:spcBef>
-                <a:spcPts val="1200"/>
-              </a:spcBef>
-              <a:spcAft>
-                <a:spcPts val="1200"/>
-              </a:spcAft>
-              <a:defRPr sz="2000">
-                <a:solidFill>
-                  <a:srgbClr val="3C3C3C"/>
-                </a:solidFill>
-              </a:defRPr>
-            </a:pPr>
-          </a:p>
-          <a:p>
-            <a:pPr algn="l">
-              <a:spcBef>
-                <a:spcPts val="1200"/>
-              </a:spcBef>
-              <a:spcAft>
-                <a:spcPts val="1200"/>
-              </a:spcAft>
-              <a:defRPr sz="2000">
-                <a:solidFill>
-                  <a:srgbClr val="3C3C3C"/>
-                </a:solidFill>
-              </a:defRPr>
-            </a:pPr>
-          </a:p>
-          <a:p>
-            <a:pPr algn="l">
-              <a:spcBef>
-                <a:spcPts val="1200"/>
-              </a:spcBef>
-              <a:spcAft>
-                <a:spcPts val="1200"/>
-              </a:spcAft>
-              <a:defRPr sz="2000">
-                <a:solidFill>
-                  <a:srgbClr val="3C3C3C"/>
-                </a:solidFill>
-              </a:defRPr>
-            </a:pPr>
-            <a:r>
-              <a:t>This expanded version provides a more thorough explanation of nondeterminism, linking the abstract concept to practical examples.  Each slide builds upon the previous one, creating a cohesive and informative lecture.</a:t>
+              <a:t>Today's lecture systematically introduces the concept of nondeterminism through three carefully chosen analogies. We will first examine deterministic and nondeterministic strategies for navigating a maze, illustrating the core difference between predicting a single outcome and considering all possibilities. Second, we’ll analyze internet packet routing, showcasing how nondeterminism helps model the unpredictable nature of network paths. Finally, we'll delve into strategic game planning in chess, where considering an opponent's nondeterministic moves is essential for effective play. The lecture concludes with a brief discussion of nondeterminism's relevance in the real world and its profound influence on theoretical computer science.</a:t>
             </a:r>
           </a:p>
         </p:txBody>
@@ -3454,7 +3405,7 @@
               </a:defRPr>
             </a:pPr>
             <a:r>
-              <a:t>10</a:t>
+              <a:t>2</a:t>
             </a:r>
           </a:p>
         </p:txBody>
@@ -3467,13 +3418,13 @@
 </p:sld>
 </file>
 
-<file path=ppt/slides/slide2.xml><?xml version="1.0" encoding="utf-8"?>
+<file path=ppt/slides/slide3.xml><?xml version="1.0" encoding="utf-8"?>
 <p:sld xmlns:a="http://schemas.openxmlformats.org/drawingml/2006/main" xmlns:p="http://schemas.openxmlformats.org/presentationml/2006/main" xmlns:r="http://schemas.openxmlformats.org/officeDocument/2006/relationships">
   <p:cSld>
     <p:bg>
       <p:bgPr>
         <a:solidFill>
-          <a:srgbClr val="F5F0FF"/>
+          <a:srgbClr val="F0FFFA"/>
         </a:solidFill>
         <a:effectLst/>
       </p:bgPr>
@@ -3508,7 +3459,7 @@
               </a:defRPr>
             </a:pPr>
             <a:r>
-              <a:t>Lecture Outline: Understanding Nondeterminism</a:t>
+              <a:t>Maze Navigation: A Deterministic Approach</a:t>
             </a:r>
           </a:p>
         </p:txBody>
@@ -3542,7 +3493,7 @@
               </a:defRPr>
             </a:pPr>
             <a:r>
-              <a:t>Today's lecture aims to demystify the concept of nondeterminism using three easily understood analogies:  First, we'll explore navigating a maze, contrasting deterministic (always left) and nondeterministic (exploring all paths) approaches.  Second, we'll analyze how internet packet routing operates, highlighting the inherent nondeterministic nature of the process. Finally, we'll dissect the complexities of chess strategy, demonstrating how nondeterministic models help us anticipate and plan for our opponent's unpredictable moves. We'll conclude by briefly discussing the real-world implications and the significance of nondeterminism in theoretical computer science.</a:t>
+              <a:t>Let's consider a deterministic strategy for maze navigation.  A deterministic algorithm guarantees a specific outcome given a set of inputs. In this case,  we'll use the "always take the leftmost path" strategy.  Observe how this strategy succeeds with Maze 2, reliably leading to the exit. However, as Maze 1 demonstrates, this deterministic approach fails; the choice of the leftmost path doesn't always guarantee a solution.  This highlights the limitation of deterministic approaches: they might not solve every problem instance.</a:t>
             </a:r>
           </a:p>
         </p:txBody>
@@ -3620,7 +3571,7 @@
               </a:defRPr>
             </a:pPr>
             <a:r>
-              <a:t>2</a:t>
+              <a:t>3</a:t>
             </a:r>
           </a:p>
         </p:txBody>
@@ -3633,13 +3584,13 @@
 </p:sld>
 </file>
 
-<file path=ppt/slides/slide3.xml><?xml version="1.0" encoding="utf-8"?>
+<file path=ppt/slides/slide4.xml><?xml version="1.0" encoding="utf-8"?>
 <p:sld xmlns:a="http://schemas.openxmlformats.org/drawingml/2006/main" xmlns:p="http://schemas.openxmlformats.org/presentationml/2006/main" xmlns:r="http://schemas.openxmlformats.org/officeDocument/2006/relationships">
   <p:cSld>
     <p:bg>
       <p:bgPr>
         <a:solidFill>
-          <a:srgbClr val="F0FFFA"/>
+          <a:srgbClr val="FAF8F5"/>
         </a:solidFill>
         <a:effectLst/>
       </p:bgPr>
@@ -3674,7 +3625,7 @@
               </a:defRPr>
             </a:pPr>
             <a:r>
-              <a:t>Deterministic Maze Navigation</a:t>
+              <a:t>Maze Navigation: A Nondeterministic Approach</a:t>
             </a:r>
           </a:p>
         </p:txBody>
@@ -3708,7 +3659,7 @@
               </a:defRPr>
             </a:pPr>
             <a:r>
-              <a:t>Let's consider a deterministic strategy for navigating a maze:  "always choose the leftmost path." This is a defined rule with a guaranteed outcome for any given maze.  However, this strategy's success is entirely dependent on the maze's structure.  One maze might be unsolvable using this rule (Maze 1), while another (Maze 2) might be solved with ease.  Determinism focuses on guaranteed outcomes based on specific rules, leaving no room for alternative paths or unexpected events. This approach works best in scenarios with perfectly known conditions.</a:t>
+              <a:t>Now, let's explore nondeterministic maze solving.  A nondeterministic algorithm explores all possible paths simultaneously, or conceptually speaking, it makes the "right" choice at each junction.  In a nondeterministic approach, the question isn't about the strategy, but about the solvability of the maze.  Analyzing Maze 1 nondeterministically reveals that it’s unsolvable, regardless of strategy. For Maze 2, a solution exists, even though a specific path isn't predetermined.  This shift in perspective from strategy to inherent problem properties is a key characteristic of nondeterminism.</a:t>
             </a:r>
           </a:p>
         </p:txBody>
@@ -3786,7 +3737,7 @@
               </a:defRPr>
             </a:pPr>
             <a:r>
-              <a:t>3</a:t>
+              <a:t>4</a:t>
             </a:r>
           </a:p>
         </p:txBody>
@@ -3799,13 +3750,13 @@
 </p:sld>
 </file>
 
-<file path=ppt/slides/slide4.xml><?xml version="1.0" encoding="utf-8"?>
+<file path=ppt/slides/slide5.xml><?xml version="1.0" encoding="utf-8"?>
 <p:sld xmlns:a="http://schemas.openxmlformats.org/drawingml/2006/main" xmlns:p="http://schemas.openxmlformats.org/presentationml/2006/main" xmlns:r="http://schemas.openxmlformats.org/officeDocument/2006/relationships">
   <p:cSld>
     <p:bg>
       <p:bgPr>
         <a:solidFill>
-          <a:srgbClr val="FAF8F5"/>
+          <a:srgbClr val="E6F0FF"/>
         </a:solidFill>
         <a:effectLst/>
       </p:bgPr>
@@ -3840,7 +3791,7 @@
               </a:defRPr>
             </a:pPr>
             <a:r>
-              <a:t>Nondeterministic Maze Navigation</a:t>
+              <a:t>Nondeterminism in Network Routing</a:t>
             </a:r>
           </a:p>
         </p:txBody>
@@ -3874,7 +3825,7 @@
               </a:defRPr>
             </a:pPr>
             <a:r>
-              <a:t>A nondeterministic approach considers all possible paths simultaneously. In a nondeterministic maze-solving algorithm, we don’t commit to a single path. Instead, we conceptually explore every possible path until we find the exit or determine that none exists.  This approach elegantly addresses the solvability of a maze regardless of the navigation strategy.  It answers the question of "is there a solution?" rather than "does this specific strategy find a solution?".  This highlights the core difference: determinism focuses on the method, while nondeterminism focuses on the existence of a solution.</a:t>
+              <a:t>Consider sending a data packet from your laptop to a web server.  The route the packet takes is not predetermined; it traverses the network based on various factors like network congestion, link failures, and routing protocols.  This is a quintessential example of nondeterminism.  We don't know a priori which path the packet will follow; multiple paths exist.  Modeling this as a nondeterministic system allows us to analyze network reliability, optimize routing strategies, and understand the potential for delays or packet loss.  The network's behavior is inherently nondeterministic due to unpredictable external factors.</a:t>
             </a:r>
           </a:p>
         </p:txBody>
@@ -3952,7 +3903,7 @@
               </a:defRPr>
             </a:pPr>
             <a:r>
-              <a:t>4</a:t>
+              <a:t>5</a:t>
             </a:r>
           </a:p>
         </p:txBody>
@@ -3965,13 +3916,13 @@
 </p:sld>
 </file>
 
-<file path=ppt/slides/slide5.xml><?xml version="1.0" encoding="utf-8"?>
+<file path=ppt/slides/slide6.xml><?xml version="1.0" encoding="utf-8"?>
 <p:sld xmlns:a="http://schemas.openxmlformats.org/drawingml/2006/main" xmlns:p="http://schemas.openxmlformats.org/presentationml/2006/main" xmlns:r="http://schemas.openxmlformats.org/officeDocument/2006/relationships">
   <p:cSld>
     <p:bg>
       <p:bgPr>
         <a:solidFill>
-          <a:srgbClr val="E6F0FF"/>
+          <a:srgbClr val="F5F0FF"/>
         </a:solidFill>
         <a:effectLst/>
       </p:bgPr>
@@ -4006,7 +3957,7 @@
               </a:defRPr>
             </a:pPr>
             <a:r>
-              <a:t>Nondeterminism in Internet Packet Routing</a:t>
+              <a:t>Nondeterminism in Strategic Game Playing (Chess)</a:t>
             </a:r>
           </a:p>
         </p:txBody>
@@ -4040,7 +3991,7 @@
               </a:defRPr>
             </a:pPr>
             <a:r>
-              <a:t>Consider sending a data packet from your laptop to a web server.  The exact route isn't predetermined.  The packet traverses the network, hopping between routers, each making independent routing decisions based on various factors (network congestion, link failures, etc.).  This is inherently nondeterministic; many potential routes exist, and the chosen path depends on the dynamic state of the network at that moment.  Nondeterminism helps us model this inherent uncertainty and build robust systems that can handle unexpected network conditions.</a:t>
+              <a:t>In chess, planning your moves requires anticipating your opponent's actions.  However, your opponent's moves are nondeterministic from your perspective; you don't know their exact strategy.  To create a robust strategy, you must consider a tree of possibilities – all possible opponent responses to your moves, and then their responses to your countermoves, and so on.  This branching structure of possibilities exemplifies nondeterminism in strategic game playing.  Efficient algorithms for exploring this tree are central to game AI and strategic decision making.</a:t>
             </a:r>
           </a:p>
         </p:txBody>
@@ -4118,7 +4069,7 @@
               </a:defRPr>
             </a:pPr>
             <a:r>
-              <a:t>5</a:t>
+              <a:t>6</a:t>
             </a:r>
           </a:p>
         </p:txBody>
@@ -4131,13 +4082,13 @@
 </p:sld>
 </file>
 
-<file path=ppt/slides/slide6.xml><?xml version="1.0" encoding="utf-8"?>
+<file path=ppt/slides/slide7.xml><?xml version="1.0" encoding="utf-8"?>
 <p:sld xmlns:a="http://schemas.openxmlformats.org/drawingml/2006/main" xmlns:p="http://schemas.openxmlformats.org/presentationml/2006/main" xmlns:r="http://schemas.openxmlformats.org/officeDocument/2006/relationships">
   <p:cSld>
     <p:bg>
       <p:bgPr>
         <a:solidFill>
-          <a:srgbClr val="F5F0FF"/>
+          <a:srgbClr val="F0FFFA"/>
         </a:solidFill>
         <a:effectLst/>
       </p:bgPr>
@@ -4172,7 +4123,7 @@
               </a:defRPr>
             </a:pPr>
             <a:r>
-              <a:t>Nondeterminism in Chess Strategy</a:t>
+              <a:t>The Significance of Nondeterminism</a:t>
             </a:r>
           </a:p>
         </p:txBody>
@@ -4206,7 +4157,7 @@
               </a:defRPr>
             </a:pPr>
             <a:r>
-              <a:t>In chess, predicting your opponent's moves is impossible with certainty.  A nondeterministic approach anticipates multiple possibilities, generating a "game tree" showcasing various potential sequences of moves. This allows you to analyze potential outcomes and select the move that maximizes your chances of success, even if your opponent makes unexpected choices.  This is a clear example of planning under uncertainty, which is fundamental in many game-theoretic scenarios and real-world decision-making.</a:t>
+              <a:t>The importance of nondeterminism in theoretical computer science lies in its power and ability to model uncertainty. The consideration of all possibilities, in parallel if possible, can reveal powerful insights.  It allows for exploration of computational models exceeding the limitations of purely deterministic approaches. In modeling real-world systems, nondeterminism offers a means to account for the inherent uncertainty and unpredictability of many situations.  The question of whether nondeterminism exists in the real world is philosophically complex and extends beyond the scope of this introduction, but it serves as a useful conceptual framework for understanding limited perspectives.</a:t>
             </a:r>
           </a:p>
         </p:txBody>
@@ -4284,7 +4235,7 @@
               </a:defRPr>
             </a:pPr>
             <a:r>
-              <a:t>6</a:t>
+              <a:t>7</a:t>
             </a:r>
           </a:p>
         </p:txBody>
@@ -4297,13 +4248,13 @@
 </p:sld>
 </file>
 
-<file path=ppt/slides/slide7.xml><?xml version="1.0" encoding="utf-8"?>
+<file path=ppt/slides/slide8.xml><?xml version="1.0" encoding="utf-8"?>
 <p:sld xmlns:a="http://schemas.openxmlformats.org/drawingml/2006/main" xmlns:p="http://schemas.openxmlformats.org/presentationml/2006/main" xmlns:r="http://schemas.openxmlformats.org/officeDocument/2006/relationships">
   <p:cSld>
     <p:bg>
       <p:bgPr>
         <a:solidFill>
-          <a:srgbClr val="F0FFFA"/>
+          <a:srgbClr val="FAF8F5"/>
         </a:solidFill>
         <a:effectLst/>
       </p:bgPr>
@@ -4338,7 +4289,7 @@
               </a:defRPr>
             </a:pPr>
             <a:r>
-              <a:t>The Importance of Nondeterminism</a:t>
+              <a:t>Summary and Acknowledgements</a:t>
             </a:r>
           </a:p>
         </p:txBody>
@@ -4372,7 +4323,7 @@
               </a:defRPr>
             </a:pPr>
             <a:r>
-              <a:t>Nondeterminism is important in theoretical computer science for two key reasons:  Power: The ability to explore multiple possibilities simultaneously can lead to more efficient algorithms and the ability to solve problems intractable using purely deterministic approaches. Uncertainty: Modeling uncertainty allows us to design systems that can handle unexpected events and provide robust guarantees of correctness and security. Whether nondeterminism truly exists in the physical world is a deep philosophical question beyond this lecture's scope, but as a conceptual tool, it's invaluable for analyzing systems under incomplete information.</a:t>
+              <a:t>This lecture provided an accessible introduction to the concept of nondeterminism, using three relatable analogies: maze navigation, internet packet routing, and strategic chess planning. We saw how nondeterminism contrasts with determinism, focusing on the exploration of possibilities rather than the prediction of a single outcome.  Understanding nondeterminism is crucial for both theoretical computer science and modelling real-world systems with inherent uncertainties. I would like to thank Dr. Dave Ackley, Dr. Samuel Wein, Dr. Anna Latour, Nate Gaylinn, Ben Aveling, and Akshar Varma for their valuable input and contributions to these examples.</a:t>
             </a:r>
           </a:p>
         </p:txBody>
@@ -4450,172 +4401,6 @@
               </a:defRPr>
             </a:pPr>
             <a:r>
-              <a:t>7</a:t>
-            </a:r>
-          </a:p>
-        </p:txBody>
-      </p:sp>
-    </p:spTree>
-  </p:cSld>
-  <p:clrMapOvr>
-    <a:masterClrMapping/>
-  </p:clrMapOvr>
-</p:sld>
-</file>
-
-<file path=ppt/slides/slide8.xml><?xml version="1.0" encoding="utf-8"?>
-<p:sld xmlns:a="http://schemas.openxmlformats.org/drawingml/2006/main" xmlns:p="http://schemas.openxmlformats.org/presentationml/2006/main" xmlns:r="http://schemas.openxmlformats.org/officeDocument/2006/relationships">
-  <p:cSld>
-    <p:bg>
-      <p:bgPr>
-        <a:solidFill>
-          <a:srgbClr val="FAF8F5"/>
-        </a:solidFill>
-        <a:effectLst/>
-      </p:bgPr>
-    </p:bg>
-    <p:spTree>
-      <p:nvGrpSpPr>
-        <p:cNvPr id="1" name=""/>
-        <p:cNvGrpSpPr/>
-        <p:nvPr/>
-      </p:nvGrpSpPr>
-      <p:grpSpPr/>
-      <p:sp>
-        <p:nvSpPr>
-          <p:cNvPr id="2" name="Title 1"/>
-          <p:cNvSpPr>
-            <a:spLocks noGrp="1"/>
-          </p:cNvSpPr>
-          <p:nvPr>
-            <p:ph type="title"/>
-          </p:nvPr>
-        </p:nvSpPr>
-        <p:spPr/>
-        <p:txBody>
-          <a:bodyPr/>
-          <a:lstStyle/>
-          <a:p>
-            <a:pPr algn="l">
-              <a:defRPr sz="4400" b="1">
-                <a:solidFill>
-                  <a:srgbClr val="283C64"/>
-                </a:solidFill>
-              </a:defRPr>
-            </a:pPr>
-            <a:r>
-              <a:t>Summary and Acknowledgements</a:t>
-            </a:r>
-          </a:p>
-        </p:txBody>
-      </p:sp>
-      <p:sp>
-        <p:nvSpPr>
-          <p:cNvPr id="3" name="Content Placeholder 2"/>
-          <p:cNvSpPr>
-            <a:spLocks noGrp="1"/>
-          </p:cNvSpPr>
-          <p:nvPr>
-            <p:ph idx="1"/>
-          </p:nvPr>
-        </p:nvSpPr>
-        <p:spPr/>
-        <p:txBody>
-          <a:bodyPr/>
-          <a:lstStyle/>
-          <a:p>
-            <a:pPr algn="l">
-              <a:spcBef>
-                <a:spcPts val="1200"/>
-              </a:spcBef>
-              <a:spcAft>
-                <a:spcPts val="1200"/>
-              </a:spcAft>
-              <a:defRPr sz="2000">
-                <a:solidFill>
-                  <a:srgbClr val="3C3C3C"/>
-                </a:solidFill>
-              </a:defRPr>
-            </a:pPr>
-            <a:r>
-              <a:t>Today, we've explored the concept of nondeterminism through the lenses of maze navigation, internet routing, and chess strategy. These diverse examples highlight the power of nondeterministic models in handling uncertainty and exploring multiple possibilities. This perspective is crucial in designing robust and efficient systems. Special thanks are extended to Dr. Dave Ackley, Dr. Samuel Wein, Dr. Anna Latour, Nate Gaylinn, Ben Aveling, and Akshar Varma for their valuable contributions.</a:t>
-            </a:r>
-          </a:p>
-        </p:txBody>
-      </p:sp>
-      <p:sp>
-        <p:nvSpPr>
-          <p:cNvPr id="4" name="Rectangle 3"/>
-          <p:cNvSpPr/>
-          <p:nvPr/>
-        </p:nvSpPr>
-        <p:spPr>
-          <a:xfrm>
-            <a:off x="457200" y="457200"/>
-            <a:ext cx="91440" cy="5943600"/>
-          </a:xfrm>
-          <a:prstGeom prst="rect">
-            <a:avLst/>
-          </a:prstGeom>
-          <a:solidFill>
-            <a:srgbClr val="6478C8"/>
-          </a:solidFill>
-          <a:ln>
-            <a:noFill/>
-          </a:ln>
-        </p:spPr>
-        <p:style>
-          <a:lnRef idx="1">
-            <a:schemeClr val="accent1"/>
-          </a:lnRef>
-          <a:fillRef idx="3">
-            <a:schemeClr val="accent1"/>
-          </a:fillRef>
-          <a:effectRef idx="2">
-            <a:schemeClr val="accent1"/>
-          </a:effectRef>
-          <a:fontRef idx="minor">
-            <a:schemeClr val="lt1"/>
-          </a:fontRef>
-        </p:style>
-        <p:txBody>
-          <a:bodyPr rtlCol="0" anchor="ctr"/>
-          <a:lstStyle/>
-          <a:p>
-            <a:pPr algn="ctr"/>
-          </a:p>
-        </p:txBody>
-      </p:sp>
-      <p:sp>
-        <p:nvSpPr>
-          <p:cNvPr id="5" name="TextBox 4"/>
-          <p:cNvSpPr txBox="1"/>
-          <p:nvPr/>
-        </p:nvSpPr>
-        <p:spPr>
-          <a:xfrm>
-            <a:off x="10972800" y="6400800"/>
-            <a:ext cx="457200" cy="274320"/>
-          </a:xfrm>
-          <a:prstGeom prst="rect">
-            <a:avLst/>
-          </a:prstGeom>
-          <a:noFill/>
-        </p:spPr>
-        <p:txBody>
-          <a:bodyPr wrap="none">
-            <a:spAutoFit/>
-          </a:bodyPr>
-          <a:lstStyle/>
-          <a:p>
-            <a:pPr algn="r">
-              <a:defRPr sz="1200">
-                <a:solidFill>
-                  <a:srgbClr val="646464"/>
-                </a:solidFill>
-              </a:defRPr>
-            </a:pPr>
-            <a:r>
               <a:t>8</a:t>
             </a:r>
           </a:p>
@@ -4670,7 +4455,7 @@
               </a:defRPr>
             </a:pPr>
             <a:r>
-              <a:t>References</a:t>
+              <a:t>References and Thank You</a:t>
             </a:r>
           </a:p>
         </p:txBody>
@@ -4704,7 +4489,7 @@
               </a:defRPr>
             </a:pPr>
             <a:r>
-              <a:t>This slide lists the relevant sources used in the lecture, providing academic rigor and allowing the audience to explore further.</a:t>
+              <a:t>This slide provides a reference for the ChessCoach example used in the presentation.  The lecture concludes with a thank you to the audience for their participation and attention.  Feel free to ask any questions you might have.  Thank you.</a:t>
             </a:r>
           </a:p>
         </p:txBody>

--- a/Styled_Slides.pptx
+++ b/Styled_Slides.pptx
@@ -3127,7 +3127,7 @@
               </a:defRPr>
             </a:pPr>
             <a:r>
-              <a:t>Nondeterminism by Analogy</a:t>
+              <a:t>Introduction: Nondeterminism by Analogy</a:t>
             </a:r>
           </a:p>
         </p:txBody>
@@ -3161,7 +3161,7 @@
               </a:defRPr>
             </a:pPr>
             <a:r>
-              <a:t>This lecture explores the concept of nondeterminism – a crucial concept in computer science, mathematics, and even philosophy.  Unlike determinism, where a single outcome follows a given input, nondeterminism allows for multiple possible outcomes.  We will approach this seemingly abstract idea using concrete, relatable examples – navigating a maze, internet packet routing, and planning chess moves – to illuminate the core principles and applications of nondeterminism.  Understanding nondeterminism is vital for grasping the limitations and potential of computational systems and modeling real-world uncertainties.</a:t>
+              <a:t>This lecture introduces the concept of nondeterminism, a crucial idea in computer science and other fields.  We'll explore it not through abstract definitions, but through concrete examples, using analogies to make the concept intuitive and accessible. These analogies will involve navigating mazes, internet packet routing, and strategic game planning (like in chess).  Understanding nondeterminism helps us model systems where multiple possibilities exist,  and we can only consider all of them to understand the system's behavior. This approach contrasts with determinism where a single outcome is guaranteed based on the input.</a:t>
             </a:r>
           </a:p>
         </p:txBody>
@@ -3293,7 +3293,7 @@
               </a:defRPr>
             </a:pPr>
             <a:r>
-              <a:t>Lecture Outline: Understanding Nondeterminism</a:t>
+              <a:t>Navigating a Maze: Determinism</a:t>
             </a:r>
           </a:p>
         </p:txBody>
@@ -3327,7 +3327,7 @@
               </a:defRPr>
             </a:pPr>
             <a:r>
-              <a:t>Today's lecture systematically introduces the concept of nondeterminism through three carefully chosen analogies. We will first examine deterministic and nondeterministic strategies for navigating a maze, illustrating the core difference between predicting a single outcome and considering all possibilities. Second, we’ll analyze internet packet routing, showcasing how nondeterminism helps model the unpredictable nature of network paths. Finally, we'll delve into strategic game planning in chess, where considering an opponent's nondeterministic moves is essential for effective play. The lecture concludes with a brief discussion of nondeterminism's relevance in the real world and its profound influence on theoretical computer science.</a:t>
+              <a:t>Let's start with a deterministic approach to maze navigation. Determinism means following a single, predetermined set of rules that guarantees a specific outcome (or failure). Consider the "always take the left-most path" strategy. This works perfectly for some mazes (Maze 2 in the presentation), always leading to the solution. However, for other mazes (Maze 1), this strategy fails completely, highlighting the limitations of a purely deterministic approach.  Deterministic systems have predictable outcomes given identical inputs.</a:t>
             </a:r>
           </a:p>
         </p:txBody>
@@ -3459,7 +3459,7 @@
               </a:defRPr>
             </a:pPr>
             <a:r>
-              <a:t>Maze Navigation: A Deterministic Approach</a:t>
+              <a:t>Navigating a Maze: Nondeterminism</a:t>
             </a:r>
           </a:p>
         </p:txBody>
@@ -3493,7 +3493,7 @@
               </a:defRPr>
             </a:pPr>
             <a:r>
-              <a:t>Let's consider a deterministic strategy for maze navigation.  A deterministic algorithm guarantees a specific outcome given a set of inputs. In this case,  we'll use the "always take the leftmost path" strategy.  Observe how this strategy succeeds with Maze 2, reliably leading to the exit. However, as Maze 1 demonstrates, this deterministic approach fails; the choice of the leftmost path doesn't always guarantee a solution.  This highlights the limitation of deterministic approaches: they might not solve every problem instance.</a:t>
+              <a:t>Now, consider a nondeterministic approach.  Nondeterminism explores all possible paths simultaneously, not just one predetermined path. In our maze example, this means exploring every branch at every junction.  This strategy reveals whether a solution exists in the maze, irrespective of the path taken.  For Maze 1, nondeterminism correctly identifies the absence of a solution.  For Maze 2, it finds a solution, but it doesn't specify which solution. Nondeterminism doesn't dictate a path; it assesses the possibilities.</a:t>
             </a:r>
           </a:p>
         </p:txBody>
@@ -3625,7 +3625,7 @@
               </a:defRPr>
             </a:pPr>
             <a:r>
-              <a:t>Maze Navigation: A Nondeterministic Approach</a:t>
+              <a:t>Routing Packets on the Internet: A Nondeterministic System</a:t>
             </a:r>
           </a:p>
         </p:txBody>
@@ -3659,7 +3659,7 @@
               </a:defRPr>
             </a:pPr>
             <a:r>
-              <a:t>Now, let's explore nondeterministic maze solving.  A nondeterministic algorithm explores all possible paths simultaneously, or conceptually speaking, it makes the "right" choice at each junction.  In a nondeterministic approach, the question isn't about the strategy, but about the solvability of the maze.  Analyzing Maze 1 nondeterministically reveals that it’s unsolvable, regardless of strategy. For Maze 2, a solution exists, even though a specific path isn't predetermined.  This shift in perspective from strategy to inherent problem properties is a key characteristic of nondeterminism.</a:t>
+              <a:t>The internet provides a compelling real-world example of nondeterminism. When you send a data packet from your computer to a server, it doesn't follow a single prescribed route. Instead, the packet can take many different paths through the network, depending on network congestion, server availability, and other dynamic factors.  We don't know which route a packet will take in advance, yet the internet manages to deliver packets reliably.  This unpredictable routing is a manifestation of nondeterminism.</a:t>
             </a:r>
           </a:p>
         </p:txBody>
@@ -3791,7 +3791,7 @@
               </a:defRPr>
             </a:pPr>
             <a:r>
-              <a:t>Nondeterminism in Network Routing</a:t>
+              <a:t>Planning Moves in Chess: Modeling Nondeterminism</a:t>
             </a:r>
           </a:p>
         </p:txBody>
@@ -3825,7 +3825,7 @@
               </a:defRPr>
             </a:pPr>
             <a:r>
-              <a:t>Consider sending a data packet from your laptop to a web server.  The route the packet takes is not predetermined; it traverses the network based on various factors like network congestion, link failures, and routing protocols.  This is a quintessential example of nondeterminism.  We don't know a priori which path the packet will follow; multiple paths exist.  Modeling this as a nondeterministic system allows us to analyze network reliability, optimize routing strategies, and understand the potential for delays or packet loss.  The network's behavior is inherently nondeterministic due to unpredictable external factors.</a:t>
+              <a:t>In chess, your strategy must account for your opponent's potential moves.  You don't know exactly what your opponent will do, so you need to consider multiple possibilities. A nondeterministic approach would model this by considering all possible opponent responses to your move and then planning accordingly. This means analyzing a branching tree of possible game states. This way, you are not choosing one best path but exploring the set of possible paths based on your opponent's unknown reaction.</a:t>
             </a:r>
           </a:p>
         </p:txBody>
@@ -3957,7 +3957,7 @@
               </a:defRPr>
             </a:pPr>
             <a:r>
-              <a:t>Nondeterminism in Strategic Game Playing (Chess)</a:t>
+              <a:t>Why Nondeterminism Matters</a:t>
             </a:r>
           </a:p>
         </p:txBody>
@@ -3991,7 +3991,7 @@
               </a:defRPr>
             </a:pPr>
             <a:r>
-              <a:t>In chess, planning your moves requires anticipating your opponent's actions.  However, your opponent's moves are nondeterministic from your perspective; you don't know their exact strategy.  To create a robust strategy, you must consider a tree of possibilities – all possible opponent responses to your moves, and then their responses to your countermoves, and so on.  This branching structure of possibilities exemplifies nondeterminism in strategic game playing.  Efficient algorithms for exploring this tree are central to game AI and strategic decision making.</a:t>
+              <a:t>Nondeterminism is significant in theoretical computer science for two key reasons:  Firstly, it offers computational power. Exploring multiple paths in parallel can solve problems faster than a strictly sequential approach. Secondly, it helps model uncertainty. Considering all possibilities allows us to make strong claims about a system's correctness, security, or performance, even with incomplete knowledge of the system's inputs or environment.  Whether true nondeterminism exists in the physical world is a deeper philosophical question.</a:t>
             </a:r>
           </a:p>
         </p:txBody>
@@ -4123,7 +4123,7 @@
               </a:defRPr>
             </a:pPr>
             <a:r>
-              <a:t>The Significance of Nondeterminism</a:t>
+              <a:t>Summary</a:t>
             </a:r>
           </a:p>
         </p:txBody>
@@ -4157,7 +4157,7 @@
               </a:defRPr>
             </a:pPr>
             <a:r>
-              <a:t>The importance of nondeterminism in theoretical computer science lies in its power and ability to model uncertainty. The consideration of all possibilities, in parallel if possible, can reveal powerful insights.  It allows for exploration of computational models exceeding the limitations of purely deterministic approaches. In modeling real-world systems, nondeterminism offers a means to account for the inherent uncertainty and unpredictability of many situations.  The question of whether nondeterminism exists in the real world is philosophically complex and extends beyond the scope of this introduction, but it serves as a useful conceptual framework for understanding limited perspectives.</a:t>
+              <a:t>We explored nondeterminism via three analogies: maze navigation, internet packet routing, and chess strategy. These analogies illustrate that nondeterminism is not about randomness but about considering all possible computation paths or outcomes.  It is a powerful tool for modeling and analyzing complex systems where we lack complete knowledge or control over certain aspects.  This capacity is crucial in computer science for designing robust and efficient systems.</a:t>
             </a:r>
           </a:p>
         </p:txBody>
@@ -4289,7 +4289,7 @@
               </a:defRPr>
             </a:pPr>
             <a:r>
-              <a:t>Summary and Acknowledgements</a:t>
+              <a:t>References</a:t>
             </a:r>
           </a:p>
         </p:txBody>
@@ -4323,7 +4323,7 @@
               </a:defRPr>
             </a:pPr>
             <a:r>
-              <a:t>This lecture provided an accessible introduction to the concept of nondeterminism, using three relatable analogies: maze navigation, internet packet routing, and strategic chess planning. We saw how nondeterminism contrasts with determinism, focusing on the exploration of possibilities rather than the prediction of a single outcome.  Understanding nondeterminism is crucial for both theoretical computer science and modelling real-world systems with inherent uncertainties. I would like to thank Dr. Dave Ackley, Dr. Samuel Wein, Dr. Anna Latour, Nate Gaylinn, Ben Aveling, and Akshar Varma for their valuable input and contributions to these examples.</a:t>
+              <a:t>This slide lists the resources used in creating the presentation. Note that proper citation is crucial for academic integrity.</a:t>
             </a:r>
           </a:p>
         </p:txBody>
@@ -4455,7 +4455,7 @@
               </a:defRPr>
             </a:pPr>
             <a:r>
-              <a:t>References and Thank You</a:t>
+              <a:t>Thank You!</a:t>
             </a:r>
           </a:p>
         </p:txBody>
@@ -4489,7 +4489,7 @@
               </a:defRPr>
             </a:pPr>
             <a:r>
-              <a:t>This slide provides a reference for the ChessCoach example used in the presentation.  The lecture concludes with a thank you to the audience for their participation and attention.  Feel free to ask any questions you might have.  Thank you.</a:t>
+              <a:t>A simple thank you slide to conclude the presentation.</a:t>
             </a:r>
           </a:p>
         </p:txBody>

--- a/Styled_Slides.pptx
+++ b/Styled_Slides.pptx
@@ -3127,7 +3127,7 @@
               </a:defRPr>
             </a:pPr>
             <a:r>
-              <a:t>Introduction: Nondeterminism by Analogy</a:t>
+              <a:t>Introduction to Nondeterminism</a:t>
             </a:r>
           </a:p>
         </p:txBody>
@@ -3161,7 +3161,7 @@
               </a:defRPr>
             </a:pPr>
             <a:r>
-              <a:t>This lecture introduces the concept of nondeterminism, a crucial idea in computer science and other fields.  We'll explore it not through abstract definitions, but through concrete examples, using analogies to make the concept intuitive and accessible. These analogies will involve navigating mazes, internet packet routing, and strategic game planning (like in chess).  Understanding nondeterminism helps us model systems where multiple possibilities exist,  and we can only consider all of them to understand the system's behavior. This approach contrasts with determinism where a single outcome is guaranteed based on the input.</a:t>
+              <a:t>Nondeterminism, in its simplest form, represents the concept of multiple possible outcomes from a single action or event. Unlike determinism, where a single input always produces a predictable output, nondeterminism embraces the possibility of various outcomes.  This is not randomness; instead, it acknowledges the existence of multiple valid paths or choices.  Imagine a coin that can land on both heads and tails simultaneously—that's a simplified representation of nondeterminism. We will explore this concept through analogies in the following slides.</a:t>
             </a:r>
           </a:p>
         </p:txBody>
@@ -3327,7 +3327,7 @@
               </a:defRPr>
             </a:pPr>
             <a:r>
-              <a:t>Let's start with a deterministic approach to maze navigation. Determinism means following a single, predetermined set of rules that guarantees a specific outcome (or failure). Consider the "always take the left-most path" strategy. This works perfectly for some mazes (Maze 2 in the presentation), always leading to the solution. However, for other mazes (Maze 1), this strategy fails completely, highlighting the limitations of a purely deterministic approach.  Deterministic systems have predictable outcomes given identical inputs.</a:t>
+              <a:t>Let's consider navigating a maze using a deterministic strategy.  A deterministic approach means following a rigidly defined set of rules that will always produce the same result, regardless of the maze. For example, a "left-most" strategy always chooses the leftmost path at every junction. This guarantees a solution for some mazes, but might fail for others.  Deterministic algorithms guarantee a specific outcome given a specific input, but might not be suitable for all situations.  The "left-most" rule would consistently solve one type of maze but consistently fail in another; determinism is about the guaranteed outcome of a specific strategy.</a:t>
             </a:r>
           </a:p>
         </p:txBody>
@@ -3493,7 +3493,7 @@
               </a:defRPr>
             </a:pPr>
             <a:r>
-              <a:t>Now, consider a nondeterministic approach.  Nondeterminism explores all possible paths simultaneously, not just one predetermined path. In our maze example, this means exploring every branch at every junction.  This strategy reveals whether a solution exists in the maze, irrespective of the path taken.  For Maze 1, nondeterminism correctly identifies the absence of a solution.  For Maze 2, it finds a solution, but it doesn't specify which solution. Nondeterminism doesn't dictate a path; it assesses the possibilities.</a:t>
+              <a:t>Now, let's contrast this with a nondeterministic approach to maze navigation. In a nondeterministic solution, we explore all possible paths concurrently.  This implies exploring every path simultaneously to determine if a solution exists. We aren't concerned with a specific strategy for traversal; rather, we're concerned with whether a solution exists at all.  Think of it as trying every path simultaneously to see if any lead to the exit.  If even one path does, the maze is solvable—regardless of which path led to the solution. This highlights nondeterminism's focus on the existence of a solution rather than a specific solution path.</a:t>
             </a:r>
           </a:p>
         </p:txBody>
@@ -3625,7 +3625,7 @@
               </a:defRPr>
             </a:pPr>
             <a:r>
-              <a:t>Routing Packets on the Internet: A Nondeterministic System</a:t>
+              <a:t>Routing Packets on the Internet</a:t>
             </a:r>
           </a:p>
         </p:txBody>
@@ -3659,7 +3659,7 @@
               </a:defRPr>
             </a:pPr>
             <a:r>
-              <a:t>The internet provides a compelling real-world example of nondeterminism. When you send a data packet from your computer to a server, it doesn't follow a single prescribed route. Instead, the packet can take many different paths through the network, depending on network congestion, server availability, and other dynamic factors.  We don't know which route a packet will take in advance, yet the internet manages to deliver packets reliably.  This unpredictable routing is a manifestation of nondeterminism.</a:t>
+              <a:t>Consider sending a data packet from your computer to a web server. The packet's journey is not predetermined; multiple routes exist.  The network chooses a path dynamically, possibly changing with network conditions. This is a real-world instance of nondeterminism. The network doesn't follow a single prescribed route; instead, it chooses the best path available at that moment, a path which might vary significantly from one transmission to the next.  This dynamism is a key element of internet routing.</a:t>
             </a:r>
           </a:p>
         </p:txBody>
@@ -3791,7 +3791,7 @@
               </a:defRPr>
             </a:pPr>
             <a:r>
-              <a:t>Planning Moves in Chess: Modeling Nondeterminism</a:t>
+              <a:t>Planning Moves in Chess</a:t>
             </a:r>
           </a:p>
         </p:txBody>
@@ -3825,7 +3825,7 @@
               </a:defRPr>
             </a:pPr>
             <a:r>
-              <a:t>In chess, your strategy must account for your opponent's potential moves.  You don't know exactly what your opponent will do, so you need to consider multiple possibilities. A nondeterministic approach would model this by considering all possible opponent responses to your move and then planning accordingly. This means analyzing a branching tree of possible game states. This way, you are not choosing one best path but exploring the set of possible paths based on your opponent's unknown reaction.</a:t>
+              <a:t>In chess, planning your move involves considering your opponent's possible responses. Your optimal move depends on anticipating your opponent's actions.  This is a nondeterministic problem because you don't know your opponent's future moves, yet you must plan based on the potential range of their choices.  A nondeterministic approach explores all possible scenarios to determine the best possible move, even in the face of the opponent's uncertainty.  Think of it as a decision tree where each branch represents a different opponent move.</a:t>
             </a:r>
           </a:p>
         </p:txBody>
@@ -3991,7 +3991,7 @@
               </a:defRPr>
             </a:pPr>
             <a:r>
-              <a:t>Nondeterminism is significant in theoretical computer science for two key reasons:  Firstly, it offers computational power. Exploring multiple paths in parallel can solve problems faster than a strictly sequential approach. Secondly, it helps model uncertainty. Considering all possibilities allows us to make strong claims about a system's correctness, security, or performance, even with incomplete knowledge of the system's inputs or environment.  Whether true nondeterminism exists in the physical world is a deeper philosophical question.</a:t>
+              <a:t>Nondeterminism is important in theoretical computer science due to its implications on computational power and problem-solving. Allowing multiple, parallel choices (as in exploring all paths in a maze simultaneously) can potentially remove computational limitations that may exist in a purely deterministic approach. In addition, modeling uncertainty by considering all possibilities allows for stronger guarantees about the correctness, security and performance of a system or algorithm.  The existence of nondeterminism in the real world is a complex philosophical question that we will not delve into here, but it proves useful as a way of thinking about limited perspectives in various scenarios.</a:t>
             </a:r>
           </a:p>
         </p:txBody>
@@ -4157,7 +4157,7 @@
               </a:defRPr>
             </a:pPr>
             <a:r>
-              <a:t>We explored nondeterminism via three analogies: maze navigation, internet packet routing, and chess strategy. These analogies illustrate that nondeterminism is not about randomness but about considering all possible computation paths or outcomes.  It is a powerful tool for modeling and analyzing complex systems where we lack complete knowledge or control over certain aspects.  This capacity is crucial in computer science for designing robust and efficient systems.</a:t>
+              <a:t>In this lecture, we used three tangible analogies (maze navigation, internet packet routing, and chess strategy) to illustrate the concept of nondeterminism.  Nondeterminism helps us explore possibilities rather than following predetermined rules.  It's crucial for modelling systems with inherent uncertainty and exploring the potential for enhanced computational power in theory.</a:t>
             </a:r>
           </a:p>
         </p:txBody>
@@ -4323,7 +4323,7 @@
               </a:defRPr>
             </a:pPr>
             <a:r>
-              <a:t>This slide lists the resources used in creating the presentation. Note that proper citation is crucial for academic integrity.</a:t>
+              <a:t>This slide lists the sources used in preparing this lecture, providing proper attribution and allowing for further reading on the topics discussed.</a:t>
             </a:r>
           </a:p>
         </p:txBody>
@@ -4489,7 +4489,7 @@
               </a:defRPr>
             </a:pPr>
             <a:r>
-              <a:t>A simple thank you slide to conclude the presentation.</a:t>
+              <a:t>This is a concluding slide expressing gratitude to the audience and acknowledging any contributors to the lecture material.</a:t>
             </a:r>
           </a:p>
         </p:txBody>

--- a/Styled_Slides.pptx
+++ b/Styled_Slides.pptx
@@ -14,6 +14,12 @@
     <p:sldId id="262" r:id="rId13"/>
     <p:sldId id="263" r:id="rId14"/>
     <p:sldId id="264" r:id="rId15"/>
+    <p:sldId id="265" r:id="rId16"/>
+    <p:sldId id="266" r:id="rId17"/>
+    <p:sldId id="267" r:id="rId18"/>
+    <p:sldId id="268" r:id="rId19"/>
+    <p:sldId id="269" r:id="rId20"/>
+    <p:sldId id="270" r:id="rId21"/>
   </p:sldIdLst>
   <p:sldSz cx="12191695" cy="6858000" type="screen4x3"/>
   <p:notesSz cx="6858000" cy="9144000"/>
@@ -3092,7 +3098,7 @@
     <p:bg>
       <p:bgPr>
         <a:solidFill>
-          <a:srgbClr val="E6F0FF"/>
+          <a:srgbClr val="F0F8FF"/>
         </a:solidFill>
         <a:effectLst/>
       </p:bgPr>
@@ -3122,12 +3128,13 @@
             <a:pPr algn="l">
               <a:defRPr sz="4400" b="1">
                 <a:solidFill>
-                  <a:srgbClr val="283C64"/>
+                  <a:srgbClr val="2F5496"/>
                 </a:solidFill>
+                <a:latin typeface="Calibri"/>
               </a:defRPr>
             </a:pPr>
             <a:r>
-              <a:t>Introduction to Nondeterminism</a:t>
+              <a:t>Proving Non-Context-Freedom: Introduction</a:t>
             </a:r>
           </a:p>
         </p:txBody>
@@ -3154,14 +3161,226 @@
               <a:spcAft>
                 <a:spcPts val="1200"/>
               </a:spcAft>
-              <a:defRPr sz="2000">
+              <a:defRPr sz="2400" b="0">
+                <a:solidFill>
+                  <a:srgbClr val="3C3C3C"/>
+                </a:solidFill>
+                <a:latin typeface="Calibri"/>
+              </a:defRPr>
+            </a:pPr>
+            <a:r>
+              <a:t>This lecture focuses on proving that certain languages are not context-free.  We'll use the Pumping Lemma for context-free languages, a powerful tool that allows us to demonstrate the limitations of context-free grammars.  The lemma essentially states that in a context-free language, sufficiently long strings can be "pumped" – meaning a portion of the string can be repeated without leaving the language.  By showing that this property fails for a given language, we prove it's non-context-free. This is crucial in understanding the expressive power of different formal language classes.</a:t>
+            </a:r>
+          </a:p>
+        </p:txBody>
+      </p:sp>
+      <p:sp>
+        <p:nvSpPr>
+          <p:cNvPr id="4" name="Rectangle 3"/>
+          <p:cNvSpPr/>
+          <p:nvPr/>
+        </p:nvSpPr>
+        <p:spPr>
+          <a:xfrm>
+            <a:off x="182880" y="457200"/>
+            <a:ext cx="91440" cy="5943600"/>
+          </a:xfrm>
+          <a:prstGeom prst="rect">
+            <a:avLst/>
+          </a:prstGeom>
+          <a:solidFill>
+            <a:srgbClr val="4169E1"/>
+          </a:solidFill>
+          <a:ln>
+            <a:noFill/>
+          </a:ln>
+        </p:spPr>
+        <p:style>
+          <a:lnRef idx="1">
+            <a:schemeClr val="accent1"/>
+          </a:lnRef>
+          <a:fillRef idx="3">
+            <a:schemeClr val="accent1"/>
+          </a:fillRef>
+          <a:effectRef idx="2">
+            <a:schemeClr val="accent1"/>
+          </a:effectRef>
+          <a:fontRef idx="minor">
+            <a:schemeClr val="lt1"/>
+          </a:fontRef>
+        </p:style>
+        <p:txBody>
+          <a:bodyPr rtlCol="0" anchor="ctr"/>
+          <a:lstStyle/>
+          <a:p>
+            <a:pPr algn="ctr"/>
+          </a:p>
+        </p:txBody>
+      </p:sp>
+      <p:sp>
+        <p:nvSpPr>
+          <p:cNvPr id="5" name="Rectangle 4"/>
+          <p:cNvSpPr/>
+          <p:nvPr/>
+        </p:nvSpPr>
+        <p:spPr>
+          <a:xfrm>
+            <a:off x="182880" y="6400800"/>
+            <a:ext cx="11795760" cy="18288"/>
+          </a:xfrm>
+          <a:prstGeom prst="rect">
+            <a:avLst/>
+          </a:prstGeom>
+          <a:solidFill>
+            <a:srgbClr val="4169E1"/>
+          </a:solidFill>
+          <a:ln>
+            <a:noFill/>
+          </a:ln>
+        </p:spPr>
+        <p:style>
+          <a:lnRef idx="1">
+            <a:schemeClr val="accent1"/>
+          </a:lnRef>
+          <a:fillRef idx="3">
+            <a:schemeClr val="accent1"/>
+          </a:fillRef>
+          <a:effectRef idx="2">
+            <a:schemeClr val="accent1"/>
+          </a:effectRef>
+          <a:fontRef idx="minor">
+            <a:schemeClr val="lt1"/>
+          </a:fontRef>
+        </p:style>
+        <p:txBody>
+          <a:bodyPr rtlCol="0" anchor="ctr"/>
+          <a:lstStyle/>
+          <a:p>
+            <a:pPr algn="ctr"/>
+          </a:p>
+        </p:txBody>
+      </p:sp>
+      <p:sp>
+        <p:nvSpPr>
+          <p:cNvPr id="6" name="TextBox 5"/>
+          <p:cNvSpPr txBox="1"/>
+          <p:nvPr/>
+        </p:nvSpPr>
+        <p:spPr>
+          <a:xfrm>
+            <a:off x="11247120" y="6492240"/>
+            <a:ext cx="457200" cy="274320"/>
+          </a:xfrm>
+          <a:prstGeom prst="rect">
+            <a:avLst/>
+          </a:prstGeom>
+          <a:noFill/>
+        </p:spPr>
+        <p:txBody>
+          <a:bodyPr wrap="none">
+            <a:spAutoFit/>
+          </a:bodyPr>
+          <a:lstStyle/>
+          <a:p>
+            <a:pPr algn="r">
+              <a:defRPr sz="1200">
                 <a:solidFill>
                   <a:srgbClr val="3C3C3C"/>
                 </a:solidFill>
               </a:defRPr>
             </a:pPr>
             <a:r>
-              <a:t>Nondeterminism, in its simplest form, represents the concept of multiple possible outcomes from a single action or event. Unlike determinism, where a single input always produces a predictable output, nondeterminism embraces the possibility of various outcomes.  This is not randomness; instead, it acknowledges the existence of multiple valid paths or choices.  Imagine a coin that can land on both heads and tails simultaneously—that's a simplified representation of nondeterminism. We will explore this concept through analogies in the following slides.</a:t>
+              <a:t>1/15</a:t>
+            </a:r>
+          </a:p>
+        </p:txBody>
+      </p:sp>
+    </p:spTree>
+  </p:cSld>
+  <p:clrMapOvr>
+    <a:masterClrMapping/>
+  </p:clrMapOvr>
+</p:sld>
+</file>
+
+<file path=ppt/slides/slide10.xml><?xml version="1.0" encoding="utf-8"?>
+<p:sld xmlns:a="http://schemas.openxmlformats.org/drawingml/2006/main" xmlns:p="http://schemas.openxmlformats.org/presentationml/2006/main" xmlns:r="http://schemas.openxmlformats.org/officeDocument/2006/relationships">
+  <p:cSld>
+    <p:bg>
+      <p:bgPr>
+        <a:solidFill>
+          <a:srgbClr val="F0F8FF"/>
+        </a:solidFill>
+        <a:effectLst/>
+      </p:bgPr>
+    </p:bg>
+    <p:spTree>
+      <p:nvGrpSpPr>
+        <p:cNvPr id="1" name=""/>
+        <p:cNvGrpSpPr/>
+        <p:nvPr/>
+      </p:nvGrpSpPr>
+      <p:grpSpPr/>
+      <p:sp>
+        <p:nvSpPr>
+          <p:cNvPr id="2" name="Title 1"/>
+          <p:cNvSpPr>
+            <a:spLocks noGrp="1"/>
+          </p:cNvSpPr>
+          <p:nvPr>
+            <p:ph type="title"/>
+          </p:nvPr>
+        </p:nvSpPr>
+        <p:spPr/>
+        <p:txBody>
+          <a:bodyPr/>
+          <a:lstStyle/>
+          <a:p>
+            <a:pPr algn="l">
+              <a:defRPr sz="4400" b="1">
+                <a:solidFill>
+                  <a:srgbClr val="2F5496"/>
+                </a:solidFill>
+                <a:latin typeface="Calibri"/>
+              </a:defRPr>
+            </a:pPr>
+            <a:r>
+              <a:t>Proving Non-Context-Freedom: L&lt;sub&gt;2&lt;/sub&gt; - Case 1(c)</a:t>
+            </a:r>
+          </a:p>
+        </p:txBody>
+      </p:sp>
+      <p:sp>
+        <p:nvSpPr>
+          <p:cNvPr id="3" name="Content Placeholder 2"/>
+          <p:cNvSpPr>
+            <a:spLocks noGrp="1"/>
+          </p:cNvSpPr>
+          <p:nvPr>
+            <p:ph idx="1"/>
+          </p:nvPr>
+        </p:nvSpPr>
+        <p:spPr/>
+        <p:txBody>
+          <a:bodyPr/>
+          <a:lstStyle/>
+          <a:p>
+            <a:pPr algn="l">
+              <a:spcBef>
+                <a:spcPts val="1200"/>
+              </a:spcBef>
+              <a:spcAft>
+                <a:spcPts val="1200"/>
+              </a:spcAft>
+              <a:defRPr sz="2400" b="0">
+                <a:solidFill>
+                  <a:srgbClr val="3C3C3C"/>
+                </a:solidFill>
+                <a:latin typeface="Calibri"/>
+              </a:defRPr>
+            </a:pPr>
+            <a:r>
+              <a:t>(c) If v and y don't contain c's, pumping up (i &gt; 1) will increase the number of a's or b's, potentially breaking the i ≤ j ≤ k condition.  Therefore, this subcase also leads to a contradiction.  Since all three subcases of Case 1 yield contradictions, Case 1 itself is proven.</a:t>
             </a:r>
           </a:p>
         </p:txBody>
@@ -3174,14 +3393,14 @@
         </p:nvSpPr>
         <p:spPr>
           <a:xfrm>
-            <a:off x="457200" y="457200"/>
+            <a:off x="182880" y="457200"/>
             <a:ext cx="91440" cy="5943600"/>
           </a:xfrm>
           <a:prstGeom prst="rect">
             <a:avLst/>
           </a:prstGeom>
           <a:solidFill>
-            <a:srgbClr val="6478C8"/>
+            <a:srgbClr val="4169E1"/>
           </a:solidFill>
           <a:ln>
             <a:noFill/>
@@ -3211,13 +3430,56 @@
       </p:sp>
       <p:sp>
         <p:nvSpPr>
-          <p:cNvPr id="5" name="TextBox 4"/>
+          <p:cNvPr id="5" name="Rectangle 4"/>
+          <p:cNvSpPr/>
+          <p:nvPr/>
+        </p:nvSpPr>
+        <p:spPr>
+          <a:xfrm>
+            <a:off x="182880" y="6400800"/>
+            <a:ext cx="11795760" cy="18288"/>
+          </a:xfrm>
+          <a:prstGeom prst="rect">
+            <a:avLst/>
+          </a:prstGeom>
+          <a:solidFill>
+            <a:srgbClr val="4169E1"/>
+          </a:solidFill>
+          <a:ln>
+            <a:noFill/>
+          </a:ln>
+        </p:spPr>
+        <p:style>
+          <a:lnRef idx="1">
+            <a:schemeClr val="accent1"/>
+          </a:lnRef>
+          <a:fillRef idx="3">
+            <a:schemeClr val="accent1"/>
+          </a:fillRef>
+          <a:effectRef idx="2">
+            <a:schemeClr val="accent1"/>
+          </a:effectRef>
+          <a:fontRef idx="minor">
+            <a:schemeClr val="lt1"/>
+          </a:fontRef>
+        </p:style>
+        <p:txBody>
+          <a:bodyPr rtlCol="0" anchor="ctr"/>
+          <a:lstStyle/>
+          <a:p>
+            <a:pPr algn="ctr"/>
+          </a:p>
+        </p:txBody>
+      </p:sp>
+      <p:sp>
+        <p:nvSpPr>
+          <p:cNvPr id="6" name="TextBox 5"/>
           <p:cNvSpPr txBox="1"/>
           <p:nvPr/>
         </p:nvSpPr>
         <p:spPr>
           <a:xfrm>
-            <a:off x="10972800" y="6400800"/>
+            <a:off x="11247120" y="6492240"/>
             <a:ext cx="457200" cy="274320"/>
           </a:xfrm>
           <a:prstGeom prst="rect">
@@ -3234,12 +3496,1067 @@
             <a:pPr algn="r">
               <a:defRPr sz="1200">
                 <a:solidFill>
-                  <a:srgbClr val="646464"/>
+                  <a:srgbClr val="3C3C3C"/>
                 </a:solidFill>
               </a:defRPr>
             </a:pPr>
             <a:r>
-              <a:t>1</a:t>
+              <a:t>10/15</a:t>
+            </a:r>
+          </a:p>
+        </p:txBody>
+      </p:sp>
+    </p:spTree>
+  </p:cSld>
+  <p:clrMapOvr>
+    <a:masterClrMapping/>
+  </p:clrMapOvr>
+</p:sld>
+</file>
+
+<file path=ppt/slides/slide11.xml><?xml version="1.0" encoding="utf-8"?>
+<p:sld xmlns:a="http://schemas.openxmlformats.org/drawingml/2006/main" xmlns:p="http://schemas.openxmlformats.org/presentationml/2006/main" xmlns:r="http://schemas.openxmlformats.org/officeDocument/2006/relationships">
+  <p:cSld>
+    <p:bg>
+      <p:bgPr>
+        <a:solidFill>
+          <a:srgbClr val="FFF5EE"/>
+        </a:solidFill>
+        <a:effectLst/>
+      </p:bgPr>
+    </p:bg>
+    <p:spTree>
+      <p:nvGrpSpPr>
+        <p:cNvPr id="1" name=""/>
+        <p:cNvGrpSpPr/>
+        <p:nvPr/>
+      </p:nvGrpSpPr>
+      <p:grpSpPr/>
+      <p:sp>
+        <p:nvSpPr>
+          <p:cNvPr id="2" name="Title 1"/>
+          <p:cNvSpPr>
+            <a:spLocks noGrp="1"/>
+          </p:cNvSpPr>
+          <p:nvPr>
+            <p:ph type="title"/>
+          </p:nvPr>
+        </p:nvSpPr>
+        <p:spPr/>
+        <p:txBody>
+          <a:bodyPr/>
+          <a:lstStyle/>
+          <a:p>
+            <a:pPr algn="l">
+              <a:defRPr sz="4400" b="1">
+                <a:solidFill>
+                  <a:srgbClr val="8B4513"/>
+                </a:solidFill>
+                <a:latin typeface="Calibri"/>
+              </a:defRPr>
+            </a:pPr>
+            <a:r>
+              <a:t>Proving Non-Context-Freedom: L&lt;sub&gt;2&lt;/sub&gt; - Case 2</a:t>
+            </a:r>
+          </a:p>
+        </p:txBody>
+      </p:sp>
+      <p:sp>
+        <p:nvSpPr>
+          <p:cNvPr id="3" name="Content Placeholder 2"/>
+          <p:cNvSpPr>
+            <a:spLocks noGrp="1"/>
+          </p:cNvSpPr>
+          <p:nvPr>
+            <p:ph idx="1"/>
+          </p:nvPr>
+        </p:nvSpPr>
+        <p:spPr/>
+        <p:txBody>
+          <a:bodyPr/>
+          <a:lstStyle/>
+          <a:p>
+            <a:pPr algn="l">
+              <a:spcBef>
+                <a:spcPts val="1200"/>
+              </a:spcBef>
+              <a:spcAft>
+                <a:spcPts val="1200"/>
+              </a:spcAft>
+              <a:defRPr sz="2400" b="0">
+                <a:solidFill>
+                  <a:srgbClr val="3C3C3C"/>
+                </a:solidFill>
+                <a:latin typeface="Calibri"/>
+              </a:defRPr>
+            </a:pPr>
+            <a:r>
+              <a:t>Case 2 considers v or y containing multiple symbol types. Pumping will disrupt the order of a's, b's, and c's, violating the i ≤ j ≤ k constraint, leading to a contradiction.</a:t>
+            </a:r>
+          </a:p>
+        </p:txBody>
+      </p:sp>
+      <p:sp>
+        <p:nvSpPr>
+          <p:cNvPr id="4" name="Rectangle 3"/>
+          <p:cNvSpPr/>
+          <p:nvPr/>
+        </p:nvSpPr>
+        <p:spPr>
+          <a:xfrm>
+            <a:off x="182880" y="457200"/>
+            <a:ext cx="91440" cy="5943600"/>
+          </a:xfrm>
+          <a:prstGeom prst="rect">
+            <a:avLst/>
+          </a:prstGeom>
+          <a:solidFill>
+            <a:srgbClr val="D2691E"/>
+          </a:solidFill>
+          <a:ln>
+            <a:noFill/>
+          </a:ln>
+        </p:spPr>
+        <p:style>
+          <a:lnRef idx="1">
+            <a:schemeClr val="accent1"/>
+          </a:lnRef>
+          <a:fillRef idx="3">
+            <a:schemeClr val="accent1"/>
+          </a:fillRef>
+          <a:effectRef idx="2">
+            <a:schemeClr val="accent1"/>
+          </a:effectRef>
+          <a:fontRef idx="minor">
+            <a:schemeClr val="lt1"/>
+          </a:fontRef>
+        </p:style>
+        <p:txBody>
+          <a:bodyPr rtlCol="0" anchor="ctr"/>
+          <a:lstStyle/>
+          <a:p>
+            <a:pPr algn="ctr"/>
+          </a:p>
+        </p:txBody>
+      </p:sp>
+      <p:sp>
+        <p:nvSpPr>
+          <p:cNvPr id="5" name="Rectangle 4"/>
+          <p:cNvSpPr/>
+          <p:nvPr/>
+        </p:nvSpPr>
+        <p:spPr>
+          <a:xfrm>
+            <a:off x="182880" y="6400800"/>
+            <a:ext cx="11795760" cy="18288"/>
+          </a:xfrm>
+          <a:prstGeom prst="rect">
+            <a:avLst/>
+          </a:prstGeom>
+          <a:solidFill>
+            <a:srgbClr val="D2691E"/>
+          </a:solidFill>
+          <a:ln>
+            <a:noFill/>
+          </a:ln>
+        </p:spPr>
+        <p:style>
+          <a:lnRef idx="1">
+            <a:schemeClr val="accent1"/>
+          </a:lnRef>
+          <a:fillRef idx="3">
+            <a:schemeClr val="accent1"/>
+          </a:fillRef>
+          <a:effectRef idx="2">
+            <a:schemeClr val="accent1"/>
+          </a:effectRef>
+          <a:fontRef idx="minor">
+            <a:schemeClr val="lt1"/>
+          </a:fontRef>
+        </p:style>
+        <p:txBody>
+          <a:bodyPr rtlCol="0" anchor="ctr"/>
+          <a:lstStyle/>
+          <a:p>
+            <a:pPr algn="ctr"/>
+          </a:p>
+        </p:txBody>
+      </p:sp>
+      <p:sp>
+        <p:nvSpPr>
+          <p:cNvPr id="6" name="TextBox 5"/>
+          <p:cNvSpPr txBox="1"/>
+          <p:nvPr/>
+        </p:nvSpPr>
+        <p:spPr>
+          <a:xfrm>
+            <a:off x="11247120" y="6492240"/>
+            <a:ext cx="457200" cy="274320"/>
+          </a:xfrm>
+          <a:prstGeom prst="rect">
+            <a:avLst/>
+          </a:prstGeom>
+          <a:noFill/>
+        </p:spPr>
+        <p:txBody>
+          <a:bodyPr wrap="none">
+            <a:spAutoFit/>
+          </a:bodyPr>
+          <a:lstStyle/>
+          <a:p>
+            <a:pPr algn="r">
+              <a:defRPr sz="1200">
+                <a:solidFill>
+                  <a:srgbClr val="3C3C3C"/>
+                </a:solidFill>
+              </a:defRPr>
+            </a:pPr>
+            <a:r>
+              <a:t>11/15</a:t>
+            </a:r>
+          </a:p>
+        </p:txBody>
+      </p:sp>
+    </p:spTree>
+  </p:cSld>
+  <p:clrMapOvr>
+    <a:masterClrMapping/>
+  </p:clrMapOvr>
+</p:sld>
+</file>
+
+<file path=ppt/slides/slide12.xml><?xml version="1.0" encoding="utf-8"?>
+<p:sld xmlns:a="http://schemas.openxmlformats.org/drawingml/2006/main" xmlns:p="http://schemas.openxmlformats.org/presentationml/2006/main" xmlns:r="http://schemas.openxmlformats.org/officeDocument/2006/relationships">
+  <p:cSld>
+    <p:bg>
+      <p:bgPr>
+        <a:solidFill>
+          <a:srgbClr val="F0FFF0"/>
+        </a:solidFill>
+        <a:effectLst/>
+      </p:bgPr>
+    </p:bg>
+    <p:spTree>
+      <p:nvGrpSpPr>
+        <p:cNvPr id="1" name=""/>
+        <p:cNvGrpSpPr/>
+        <p:nvPr/>
+      </p:nvGrpSpPr>
+      <p:grpSpPr/>
+      <p:sp>
+        <p:nvSpPr>
+          <p:cNvPr id="2" name="Title 1"/>
+          <p:cNvSpPr>
+            <a:spLocks noGrp="1"/>
+          </p:cNvSpPr>
+          <p:nvPr>
+            <p:ph type="title"/>
+          </p:nvPr>
+        </p:nvSpPr>
+        <p:spPr/>
+        <p:txBody>
+          <a:bodyPr/>
+          <a:lstStyle/>
+          <a:p>
+            <a:pPr algn="l">
+              <a:defRPr sz="4400" b="1">
+                <a:solidFill>
+                  <a:srgbClr val="228B22"/>
+                </a:solidFill>
+                <a:latin typeface="Calibri"/>
+              </a:defRPr>
+            </a:pPr>
+            <a:r>
+              <a:t>Proving Non-Context-Freedom: L&lt;sub&gt;3&lt;/sub&gt; - First Attempt</a:t>
+            </a:r>
+          </a:p>
+        </p:txBody>
+      </p:sp>
+      <p:sp>
+        <p:nvSpPr>
+          <p:cNvPr id="3" name="Content Placeholder 2"/>
+          <p:cNvSpPr>
+            <a:spLocks noGrp="1"/>
+          </p:cNvSpPr>
+          <p:nvPr>
+            <p:ph idx="1"/>
+          </p:nvPr>
+        </p:nvSpPr>
+        <p:spPr/>
+        <p:txBody>
+          <a:bodyPr/>
+          <a:lstStyle/>
+          <a:p>
+            <a:pPr algn="l">
+              <a:spcBef>
+                <a:spcPts val="1200"/>
+              </a:spcBef>
+              <a:spcAft>
+                <a:spcPts val="1200"/>
+              </a:spcAft>
+              <a:defRPr sz="2400" b="0">
+                <a:solidFill>
+                  <a:srgbClr val="3C3C3C"/>
+                </a:solidFill>
+                <a:latin typeface="Calibri"/>
+              </a:defRPr>
+            </a:pPr>
+            <a:r>
+              <a:t>Let's tackle L&lt;sub&gt;3&lt;/sub&gt; = {ss | s ∈ {0, 1}}.  This example demonstrates that choosing the correct string for the Pumping Lemma is crucial. Suppose we initially let s = 0&lt;sup&gt;p&lt;/sup&gt;1&lt;sup&gt;p&lt;/sup&gt; and w = ss. This string can be pumped without violating the condition of being in L3, thus not immediately leading to a contradiction. We need to revise our approach.</a:t>
+            </a:r>
+          </a:p>
+        </p:txBody>
+      </p:sp>
+      <p:sp>
+        <p:nvSpPr>
+          <p:cNvPr id="4" name="Rectangle 3"/>
+          <p:cNvSpPr/>
+          <p:nvPr/>
+        </p:nvSpPr>
+        <p:spPr>
+          <a:xfrm>
+            <a:off x="182880" y="457200"/>
+            <a:ext cx="91440" cy="5943600"/>
+          </a:xfrm>
+          <a:prstGeom prst="rect">
+            <a:avLst/>
+          </a:prstGeom>
+          <a:solidFill>
+            <a:srgbClr val="3CB371"/>
+          </a:solidFill>
+          <a:ln>
+            <a:noFill/>
+          </a:ln>
+        </p:spPr>
+        <p:style>
+          <a:lnRef idx="1">
+            <a:schemeClr val="accent1"/>
+          </a:lnRef>
+          <a:fillRef idx="3">
+            <a:schemeClr val="accent1"/>
+          </a:fillRef>
+          <a:effectRef idx="2">
+            <a:schemeClr val="accent1"/>
+          </a:effectRef>
+          <a:fontRef idx="minor">
+            <a:schemeClr val="lt1"/>
+          </a:fontRef>
+        </p:style>
+        <p:txBody>
+          <a:bodyPr rtlCol="0" anchor="ctr"/>
+          <a:lstStyle/>
+          <a:p>
+            <a:pPr algn="ctr"/>
+          </a:p>
+        </p:txBody>
+      </p:sp>
+      <p:sp>
+        <p:nvSpPr>
+          <p:cNvPr id="5" name="Rectangle 4"/>
+          <p:cNvSpPr/>
+          <p:nvPr/>
+        </p:nvSpPr>
+        <p:spPr>
+          <a:xfrm>
+            <a:off x="182880" y="6400800"/>
+            <a:ext cx="11795760" cy="18288"/>
+          </a:xfrm>
+          <a:prstGeom prst="rect">
+            <a:avLst/>
+          </a:prstGeom>
+          <a:solidFill>
+            <a:srgbClr val="3CB371"/>
+          </a:solidFill>
+          <a:ln>
+            <a:noFill/>
+          </a:ln>
+        </p:spPr>
+        <p:style>
+          <a:lnRef idx="1">
+            <a:schemeClr val="accent1"/>
+          </a:lnRef>
+          <a:fillRef idx="3">
+            <a:schemeClr val="accent1"/>
+          </a:fillRef>
+          <a:effectRef idx="2">
+            <a:schemeClr val="accent1"/>
+          </a:effectRef>
+          <a:fontRef idx="minor">
+            <a:schemeClr val="lt1"/>
+          </a:fontRef>
+        </p:style>
+        <p:txBody>
+          <a:bodyPr rtlCol="0" anchor="ctr"/>
+          <a:lstStyle/>
+          <a:p>
+            <a:pPr algn="ctr"/>
+          </a:p>
+        </p:txBody>
+      </p:sp>
+      <p:sp>
+        <p:nvSpPr>
+          <p:cNvPr id="6" name="TextBox 5"/>
+          <p:cNvSpPr txBox="1"/>
+          <p:nvPr/>
+        </p:nvSpPr>
+        <p:spPr>
+          <a:xfrm>
+            <a:off x="11247120" y="6492240"/>
+            <a:ext cx="457200" cy="274320"/>
+          </a:xfrm>
+          <a:prstGeom prst="rect">
+            <a:avLst/>
+          </a:prstGeom>
+          <a:noFill/>
+        </p:spPr>
+        <p:txBody>
+          <a:bodyPr wrap="none">
+            <a:spAutoFit/>
+          </a:bodyPr>
+          <a:lstStyle/>
+          <a:p>
+            <a:pPr algn="r">
+              <a:defRPr sz="1200">
+                <a:solidFill>
+                  <a:srgbClr val="3C3C3C"/>
+                </a:solidFill>
+              </a:defRPr>
+            </a:pPr>
+            <a:r>
+              <a:t>12/15</a:t>
+            </a:r>
+          </a:p>
+        </p:txBody>
+      </p:sp>
+    </p:spTree>
+  </p:cSld>
+  <p:clrMapOvr>
+    <a:masterClrMapping/>
+  </p:clrMapOvr>
+</p:sld>
+</file>
+
+<file path=ppt/slides/slide13.xml><?xml version="1.0" encoding="utf-8"?>
+<p:sld xmlns:a="http://schemas.openxmlformats.org/drawingml/2006/main" xmlns:p="http://schemas.openxmlformats.org/presentationml/2006/main" xmlns:r="http://schemas.openxmlformats.org/officeDocument/2006/relationships">
+  <p:cSld>
+    <p:bg>
+      <p:bgPr>
+        <a:solidFill>
+          <a:srgbClr val="F0F8FF"/>
+        </a:solidFill>
+        <a:effectLst/>
+      </p:bgPr>
+    </p:bg>
+    <p:spTree>
+      <p:nvGrpSpPr>
+        <p:cNvPr id="1" name=""/>
+        <p:cNvGrpSpPr/>
+        <p:nvPr/>
+      </p:nvGrpSpPr>
+      <p:grpSpPr/>
+      <p:sp>
+        <p:nvSpPr>
+          <p:cNvPr id="2" name="Title 1"/>
+          <p:cNvSpPr>
+            <a:spLocks noGrp="1"/>
+          </p:cNvSpPr>
+          <p:nvPr>
+            <p:ph type="title"/>
+          </p:nvPr>
+        </p:nvSpPr>
+        <p:spPr/>
+        <p:txBody>
+          <a:bodyPr/>
+          <a:lstStyle/>
+          <a:p>
+            <a:pPr algn="l">
+              <a:defRPr sz="4400" b="1">
+                <a:solidFill>
+                  <a:srgbClr val="2F5496"/>
+                </a:solidFill>
+                <a:latin typeface="Calibri"/>
+              </a:defRPr>
+            </a:pPr>
+            <a:r>
+              <a:t>Proving Non-Context-Freedom: L&lt;sub&gt;3&lt;/sub&gt; - Corrected Proof</a:t>
+            </a:r>
+          </a:p>
+        </p:txBody>
+      </p:sp>
+      <p:sp>
+        <p:nvSpPr>
+          <p:cNvPr id="3" name="Content Placeholder 2"/>
+          <p:cNvSpPr>
+            <a:spLocks noGrp="1"/>
+          </p:cNvSpPr>
+          <p:nvPr>
+            <p:ph idx="1"/>
+          </p:nvPr>
+        </p:nvSpPr>
+        <p:spPr/>
+        <p:txBody>
+          <a:bodyPr/>
+          <a:lstStyle/>
+          <a:p>
+            <a:pPr algn="l">
+              <a:spcBef>
+                <a:spcPts val="1200"/>
+              </a:spcBef>
+              <a:spcAft>
+                <a:spcPts val="1200"/>
+              </a:spcAft>
+              <a:defRPr sz="2400" b="0">
+                <a:solidFill>
+                  <a:srgbClr val="3C3C3C"/>
+                </a:solidFill>
+                <a:latin typeface="Calibri"/>
+              </a:defRPr>
+            </a:pPr>
+            <a:r>
+              <a:t>The previous attempt failed because we could pump the string.  Let's revisit this.  Consider any division w = uvxyz where |vy| &gt; 0 and |vxy| ≤ p.  If vxy is contained in the first half of w, then uv&lt;sup&gt;i&lt;/sup&gt;xy&lt;sup&gt;i&lt;/sup&gt;z will start with a 0 but have a 1 in its second half (this is true because the length of vxy is less than or equal to p).  Similarly, if vxy is in the second half, the opposite situation arises.</a:t>
+            </a:r>
+          </a:p>
+        </p:txBody>
+      </p:sp>
+      <p:sp>
+        <p:nvSpPr>
+          <p:cNvPr id="4" name="Rectangle 3"/>
+          <p:cNvSpPr/>
+          <p:nvPr/>
+        </p:nvSpPr>
+        <p:spPr>
+          <a:xfrm>
+            <a:off x="182880" y="457200"/>
+            <a:ext cx="91440" cy="5943600"/>
+          </a:xfrm>
+          <a:prstGeom prst="rect">
+            <a:avLst/>
+          </a:prstGeom>
+          <a:solidFill>
+            <a:srgbClr val="4169E1"/>
+          </a:solidFill>
+          <a:ln>
+            <a:noFill/>
+          </a:ln>
+        </p:spPr>
+        <p:style>
+          <a:lnRef idx="1">
+            <a:schemeClr val="accent1"/>
+          </a:lnRef>
+          <a:fillRef idx="3">
+            <a:schemeClr val="accent1"/>
+          </a:fillRef>
+          <a:effectRef idx="2">
+            <a:schemeClr val="accent1"/>
+          </a:effectRef>
+          <a:fontRef idx="minor">
+            <a:schemeClr val="lt1"/>
+          </a:fontRef>
+        </p:style>
+        <p:txBody>
+          <a:bodyPr rtlCol="0" anchor="ctr"/>
+          <a:lstStyle/>
+          <a:p>
+            <a:pPr algn="ctr"/>
+          </a:p>
+        </p:txBody>
+      </p:sp>
+      <p:sp>
+        <p:nvSpPr>
+          <p:cNvPr id="5" name="Rectangle 4"/>
+          <p:cNvSpPr/>
+          <p:nvPr/>
+        </p:nvSpPr>
+        <p:spPr>
+          <a:xfrm>
+            <a:off x="182880" y="6400800"/>
+            <a:ext cx="11795760" cy="18288"/>
+          </a:xfrm>
+          <a:prstGeom prst="rect">
+            <a:avLst/>
+          </a:prstGeom>
+          <a:solidFill>
+            <a:srgbClr val="4169E1"/>
+          </a:solidFill>
+          <a:ln>
+            <a:noFill/>
+          </a:ln>
+        </p:spPr>
+        <p:style>
+          <a:lnRef idx="1">
+            <a:schemeClr val="accent1"/>
+          </a:lnRef>
+          <a:fillRef idx="3">
+            <a:schemeClr val="accent1"/>
+          </a:fillRef>
+          <a:effectRef idx="2">
+            <a:schemeClr val="accent1"/>
+          </a:effectRef>
+          <a:fontRef idx="minor">
+            <a:schemeClr val="lt1"/>
+          </a:fontRef>
+        </p:style>
+        <p:txBody>
+          <a:bodyPr rtlCol="0" anchor="ctr"/>
+          <a:lstStyle/>
+          <a:p>
+            <a:pPr algn="ctr"/>
+          </a:p>
+        </p:txBody>
+      </p:sp>
+      <p:sp>
+        <p:nvSpPr>
+          <p:cNvPr id="6" name="TextBox 5"/>
+          <p:cNvSpPr txBox="1"/>
+          <p:nvPr/>
+        </p:nvSpPr>
+        <p:spPr>
+          <a:xfrm>
+            <a:off x="11247120" y="6492240"/>
+            <a:ext cx="457200" cy="274320"/>
+          </a:xfrm>
+          <a:prstGeom prst="rect">
+            <a:avLst/>
+          </a:prstGeom>
+          <a:noFill/>
+        </p:spPr>
+        <p:txBody>
+          <a:bodyPr wrap="none">
+            <a:spAutoFit/>
+          </a:bodyPr>
+          <a:lstStyle/>
+          <a:p>
+            <a:pPr algn="r">
+              <a:defRPr sz="1200">
+                <a:solidFill>
+                  <a:srgbClr val="3C3C3C"/>
+                </a:solidFill>
+              </a:defRPr>
+            </a:pPr>
+            <a:r>
+              <a:t>13/15</a:t>
+            </a:r>
+          </a:p>
+        </p:txBody>
+      </p:sp>
+    </p:spTree>
+  </p:cSld>
+  <p:clrMapOvr>
+    <a:masterClrMapping/>
+  </p:clrMapOvr>
+</p:sld>
+</file>
+
+<file path=ppt/slides/slide14.xml><?xml version="1.0" encoding="utf-8"?>
+<p:sld xmlns:a="http://schemas.openxmlformats.org/drawingml/2006/main" xmlns:p="http://schemas.openxmlformats.org/presentationml/2006/main" xmlns:r="http://schemas.openxmlformats.org/officeDocument/2006/relationships">
+  <p:cSld>
+    <p:bg>
+      <p:bgPr>
+        <a:solidFill>
+          <a:srgbClr val="FFF5EE"/>
+        </a:solidFill>
+        <a:effectLst/>
+      </p:bgPr>
+    </p:bg>
+    <p:spTree>
+      <p:nvGrpSpPr>
+        <p:cNvPr id="1" name=""/>
+        <p:cNvGrpSpPr/>
+        <p:nvPr/>
+      </p:nvGrpSpPr>
+      <p:grpSpPr/>
+      <p:sp>
+        <p:nvSpPr>
+          <p:cNvPr id="2" name="Title 1"/>
+          <p:cNvSpPr>
+            <a:spLocks noGrp="1"/>
+          </p:cNvSpPr>
+          <p:nvPr>
+            <p:ph type="title"/>
+          </p:nvPr>
+        </p:nvSpPr>
+        <p:spPr/>
+        <p:txBody>
+          <a:bodyPr/>
+          <a:lstStyle/>
+          <a:p>
+            <a:pPr algn="l">
+              <a:defRPr sz="4400" b="1">
+                <a:solidFill>
+                  <a:srgbClr val="8B4513"/>
+                </a:solidFill>
+                <a:latin typeface="Calibri"/>
+              </a:defRPr>
+            </a:pPr>
+            <a:r>
+              <a:t>Proving Non-Context-Freedom: L&lt;sub&gt;3&lt;/sub&gt; - Final Argument</a:t>
+            </a:r>
+          </a:p>
+        </p:txBody>
+      </p:sp>
+      <p:sp>
+        <p:nvSpPr>
+          <p:cNvPr id="3" name="Content Placeholder 2"/>
+          <p:cNvSpPr>
+            <a:spLocks noGrp="1"/>
+          </p:cNvSpPr>
+          <p:nvPr>
+            <p:ph idx="1"/>
+          </p:nvPr>
+        </p:nvSpPr>
+        <p:spPr/>
+        <p:txBody>
+          <a:bodyPr/>
+          <a:lstStyle/>
+          <a:p>
+            <a:pPr algn="l">
+              <a:spcBef>
+                <a:spcPts val="1200"/>
+              </a:spcBef>
+              <a:spcAft>
+                <a:spcPts val="1200"/>
+              </a:spcAft>
+              <a:defRPr sz="2400" b="0">
+                <a:solidFill>
+                  <a:srgbClr val="3C3C3C"/>
+                </a:solidFill>
+                <a:latin typeface="Calibri"/>
+              </a:defRPr>
+            </a:pPr>
+            <a:r>
+              <a:t>The only remaining possibility is that vxy straddles the midpoint of w. Because |vxy| ≤ p, v and y must be in the middle part of w.  Pumping down (i = 0) will create a string that violates the ss condition. Thus, no matter which division we choose, we always arrive at a contradiction. Consequently, L&lt;sub&gt;3&lt;/sub&gt; is not context-free.</a:t>
+            </a:r>
+          </a:p>
+        </p:txBody>
+      </p:sp>
+      <p:sp>
+        <p:nvSpPr>
+          <p:cNvPr id="4" name="Rectangle 3"/>
+          <p:cNvSpPr/>
+          <p:nvPr/>
+        </p:nvSpPr>
+        <p:spPr>
+          <a:xfrm>
+            <a:off x="182880" y="457200"/>
+            <a:ext cx="91440" cy="5943600"/>
+          </a:xfrm>
+          <a:prstGeom prst="rect">
+            <a:avLst/>
+          </a:prstGeom>
+          <a:solidFill>
+            <a:srgbClr val="D2691E"/>
+          </a:solidFill>
+          <a:ln>
+            <a:noFill/>
+          </a:ln>
+        </p:spPr>
+        <p:style>
+          <a:lnRef idx="1">
+            <a:schemeClr val="accent1"/>
+          </a:lnRef>
+          <a:fillRef idx="3">
+            <a:schemeClr val="accent1"/>
+          </a:fillRef>
+          <a:effectRef idx="2">
+            <a:schemeClr val="accent1"/>
+          </a:effectRef>
+          <a:fontRef idx="minor">
+            <a:schemeClr val="lt1"/>
+          </a:fontRef>
+        </p:style>
+        <p:txBody>
+          <a:bodyPr rtlCol="0" anchor="ctr"/>
+          <a:lstStyle/>
+          <a:p>
+            <a:pPr algn="ctr"/>
+          </a:p>
+        </p:txBody>
+      </p:sp>
+      <p:sp>
+        <p:nvSpPr>
+          <p:cNvPr id="5" name="Rectangle 4"/>
+          <p:cNvSpPr/>
+          <p:nvPr/>
+        </p:nvSpPr>
+        <p:spPr>
+          <a:xfrm>
+            <a:off x="182880" y="6400800"/>
+            <a:ext cx="11795760" cy="18288"/>
+          </a:xfrm>
+          <a:prstGeom prst="rect">
+            <a:avLst/>
+          </a:prstGeom>
+          <a:solidFill>
+            <a:srgbClr val="D2691E"/>
+          </a:solidFill>
+          <a:ln>
+            <a:noFill/>
+          </a:ln>
+        </p:spPr>
+        <p:style>
+          <a:lnRef idx="1">
+            <a:schemeClr val="accent1"/>
+          </a:lnRef>
+          <a:fillRef idx="3">
+            <a:schemeClr val="accent1"/>
+          </a:fillRef>
+          <a:effectRef idx="2">
+            <a:schemeClr val="accent1"/>
+          </a:effectRef>
+          <a:fontRef idx="minor">
+            <a:schemeClr val="lt1"/>
+          </a:fontRef>
+        </p:style>
+        <p:txBody>
+          <a:bodyPr rtlCol="0" anchor="ctr"/>
+          <a:lstStyle/>
+          <a:p>
+            <a:pPr algn="ctr"/>
+          </a:p>
+        </p:txBody>
+      </p:sp>
+      <p:sp>
+        <p:nvSpPr>
+          <p:cNvPr id="6" name="TextBox 5"/>
+          <p:cNvSpPr txBox="1"/>
+          <p:nvPr/>
+        </p:nvSpPr>
+        <p:spPr>
+          <a:xfrm>
+            <a:off x="11247120" y="6492240"/>
+            <a:ext cx="457200" cy="274320"/>
+          </a:xfrm>
+          <a:prstGeom prst="rect">
+            <a:avLst/>
+          </a:prstGeom>
+          <a:noFill/>
+        </p:spPr>
+        <p:txBody>
+          <a:bodyPr wrap="none">
+            <a:spAutoFit/>
+          </a:bodyPr>
+          <a:lstStyle/>
+          <a:p>
+            <a:pPr algn="r">
+              <a:defRPr sz="1200">
+                <a:solidFill>
+                  <a:srgbClr val="3C3C3C"/>
+                </a:solidFill>
+              </a:defRPr>
+            </a:pPr>
+            <a:r>
+              <a:t>14/15</a:t>
+            </a:r>
+          </a:p>
+        </p:txBody>
+      </p:sp>
+    </p:spTree>
+  </p:cSld>
+  <p:clrMapOvr>
+    <a:masterClrMapping/>
+  </p:clrMapOvr>
+</p:sld>
+</file>
+
+<file path=ppt/slides/slide15.xml><?xml version="1.0" encoding="utf-8"?>
+<p:sld xmlns:a="http://schemas.openxmlformats.org/drawingml/2006/main" xmlns:p="http://schemas.openxmlformats.org/presentationml/2006/main" xmlns:r="http://schemas.openxmlformats.org/officeDocument/2006/relationships">
+  <p:cSld>
+    <p:bg>
+      <p:bgPr>
+        <a:solidFill>
+          <a:srgbClr val="F0FFF0"/>
+        </a:solidFill>
+        <a:effectLst/>
+      </p:bgPr>
+    </p:bg>
+    <p:spTree>
+      <p:nvGrpSpPr>
+        <p:cNvPr id="1" name=""/>
+        <p:cNvGrpSpPr/>
+        <p:nvPr/>
+      </p:nvGrpSpPr>
+      <p:grpSpPr/>
+      <p:sp>
+        <p:nvSpPr>
+          <p:cNvPr id="2" name="Title 1"/>
+          <p:cNvSpPr>
+            <a:spLocks noGrp="1"/>
+          </p:cNvSpPr>
+          <p:nvPr>
+            <p:ph type="title"/>
+          </p:nvPr>
+        </p:nvSpPr>
+        <p:spPr/>
+        <p:txBody>
+          <a:bodyPr/>
+          <a:lstStyle/>
+          <a:p>
+            <a:pPr algn="l">
+              <a:defRPr sz="4400" b="1">
+                <a:solidFill>
+                  <a:srgbClr val="228B22"/>
+                </a:solidFill>
+                <a:latin typeface="Calibri"/>
+              </a:defRPr>
+            </a:pPr>
+            <a:r>
+              <a:t>Summary</a:t>
+            </a:r>
+          </a:p>
+        </p:txBody>
+      </p:sp>
+      <p:sp>
+        <p:nvSpPr>
+          <p:cNvPr id="3" name="Content Placeholder 2"/>
+          <p:cNvSpPr>
+            <a:spLocks noGrp="1"/>
+          </p:cNvSpPr>
+          <p:nvPr>
+            <p:ph idx="1"/>
+          </p:nvPr>
+        </p:nvSpPr>
+        <p:spPr/>
+        <p:txBody>
+          <a:bodyPr/>
+          <a:lstStyle/>
+          <a:p>
+            <a:pPr algn="l">
+              <a:spcBef>
+                <a:spcPts val="1200"/>
+              </a:spcBef>
+              <a:spcAft>
+                <a:spcPts val="1200"/>
+              </a:spcAft>
+              <a:defRPr sz="2400" b="0">
+                <a:solidFill>
+                  <a:srgbClr val="3C3C3C"/>
+                </a:solidFill>
+                <a:latin typeface="Calibri"/>
+              </a:defRPr>
+            </a:pPr>
+            <a:r>
+              <a:t>In this lecture, we successfully used the Pumping Lemma to prove that L&lt;sub&gt;1&lt;/sub&gt;, L&lt;sub&gt;2&lt;/sub&gt;, and L&lt;sub&gt;3&lt;/sub&gt; are non-context-free.  This demonstrates the power of the lemma in analyzing the limitations of context-free languages.  Remember that choosing the right string and carefully analyzing the possible pump positions are critical for successful application of this method.</a:t>
+            </a:r>
+          </a:p>
+        </p:txBody>
+      </p:sp>
+      <p:sp>
+        <p:nvSpPr>
+          <p:cNvPr id="4" name="Rectangle 3"/>
+          <p:cNvSpPr/>
+          <p:nvPr/>
+        </p:nvSpPr>
+        <p:spPr>
+          <a:xfrm>
+            <a:off x="182880" y="457200"/>
+            <a:ext cx="91440" cy="5943600"/>
+          </a:xfrm>
+          <a:prstGeom prst="rect">
+            <a:avLst/>
+          </a:prstGeom>
+          <a:solidFill>
+            <a:srgbClr val="3CB371"/>
+          </a:solidFill>
+          <a:ln>
+            <a:noFill/>
+          </a:ln>
+        </p:spPr>
+        <p:style>
+          <a:lnRef idx="1">
+            <a:schemeClr val="accent1"/>
+          </a:lnRef>
+          <a:fillRef idx="3">
+            <a:schemeClr val="accent1"/>
+          </a:fillRef>
+          <a:effectRef idx="2">
+            <a:schemeClr val="accent1"/>
+          </a:effectRef>
+          <a:fontRef idx="minor">
+            <a:schemeClr val="lt1"/>
+          </a:fontRef>
+        </p:style>
+        <p:txBody>
+          <a:bodyPr rtlCol="0" anchor="ctr"/>
+          <a:lstStyle/>
+          <a:p>
+            <a:pPr algn="ctr"/>
+          </a:p>
+        </p:txBody>
+      </p:sp>
+      <p:sp>
+        <p:nvSpPr>
+          <p:cNvPr id="5" name="Rectangle 4"/>
+          <p:cNvSpPr/>
+          <p:nvPr/>
+        </p:nvSpPr>
+        <p:spPr>
+          <a:xfrm>
+            <a:off x="182880" y="6400800"/>
+            <a:ext cx="11795760" cy="18288"/>
+          </a:xfrm>
+          <a:prstGeom prst="rect">
+            <a:avLst/>
+          </a:prstGeom>
+          <a:solidFill>
+            <a:srgbClr val="3CB371"/>
+          </a:solidFill>
+          <a:ln>
+            <a:noFill/>
+          </a:ln>
+        </p:spPr>
+        <p:style>
+          <a:lnRef idx="1">
+            <a:schemeClr val="accent1"/>
+          </a:lnRef>
+          <a:fillRef idx="3">
+            <a:schemeClr val="accent1"/>
+          </a:fillRef>
+          <a:effectRef idx="2">
+            <a:schemeClr val="accent1"/>
+          </a:effectRef>
+          <a:fontRef idx="minor">
+            <a:schemeClr val="lt1"/>
+          </a:fontRef>
+        </p:style>
+        <p:txBody>
+          <a:bodyPr rtlCol="0" anchor="ctr"/>
+          <a:lstStyle/>
+          <a:p>
+            <a:pPr algn="ctr"/>
+          </a:p>
+        </p:txBody>
+      </p:sp>
+      <p:sp>
+        <p:nvSpPr>
+          <p:cNvPr id="6" name="TextBox 5"/>
+          <p:cNvSpPr txBox="1"/>
+          <p:nvPr/>
+        </p:nvSpPr>
+        <p:spPr>
+          <a:xfrm>
+            <a:off x="11247120" y="6492240"/>
+            <a:ext cx="457200" cy="274320"/>
+          </a:xfrm>
+          <a:prstGeom prst="rect">
+            <a:avLst/>
+          </a:prstGeom>
+          <a:noFill/>
+        </p:spPr>
+        <p:txBody>
+          <a:bodyPr wrap="none">
+            <a:spAutoFit/>
+          </a:bodyPr>
+          <a:lstStyle/>
+          <a:p>
+            <a:pPr algn="r">
+              <a:defRPr sz="1200">
+                <a:solidFill>
+                  <a:srgbClr val="3C3C3C"/>
+                </a:solidFill>
+              </a:defRPr>
+            </a:pPr>
+            <a:r>
+              <a:t>15/15</a:t>
             </a:r>
           </a:p>
         </p:txBody>
@@ -3258,7 +4575,7 @@
     <p:bg>
       <p:bgPr>
         <a:solidFill>
-          <a:srgbClr val="F5F0FF"/>
+          <a:srgbClr val="FFF5EE"/>
         </a:solidFill>
         <a:effectLst/>
       </p:bgPr>
@@ -3288,12 +4605,13 @@
             <a:pPr algn="l">
               <a:defRPr sz="4400" b="1">
                 <a:solidFill>
-                  <a:srgbClr val="283C64"/>
+                  <a:srgbClr val="8B4513"/>
                 </a:solidFill>
+                <a:latin typeface="Calibri"/>
               </a:defRPr>
             </a:pPr>
             <a:r>
-              <a:t>Navigating a Maze: Determinism</a:t>
+              <a:t>Outline and Resources</a:t>
             </a:r>
           </a:p>
         </p:txBody>
@@ -3320,92 +4638,136 @@
               <a:spcAft>
                 <a:spcPts val="1200"/>
               </a:spcAft>
-              <a:defRPr sz="2000">
+              <a:defRPr sz="2400" b="0">
+                <a:solidFill>
+                  <a:srgbClr val="3C3C3C"/>
+                </a:solidFill>
+                <a:latin typeface="Calibri"/>
+              </a:defRPr>
+            </a:pPr>
+            <a:r>
+              <a:t>Today's lecture will cover three examples of proving non-context-freedom:  L&lt;sub&gt;1&lt;/sub&gt; = {a&lt;sup&gt;n&lt;/sup&gt;b&lt;sup&gt;n&lt;/sup&gt;c&lt;sup&gt;n&lt;/sup&gt; | n ≥ 0}, L&lt;sub&gt;2&lt;/sub&gt; = {a&lt;sup&gt;i&lt;/sup&gt;b&lt;sup&gt;j&lt;/sup&gt;c&lt;sup&gt;k&lt;/sup&gt; | 0 ≤ i ≤ j ≤ k}, and L&lt;sub&gt;3&lt;/sub&gt; = {ss | s ∈ {0, 1}}.  We will use the Pumping Lemma in each case.  For further reading and a more detailed mathematical treatment, please refer to Section 2.3 (pp. 128-129) of Sipser's "Introduction to the Theory of Computation." This text provides a robust foundation in automata theory and formal languages.</a:t>
+            </a:r>
+          </a:p>
+        </p:txBody>
+      </p:sp>
+      <p:sp>
+        <p:nvSpPr>
+          <p:cNvPr id="4" name="Rectangle 3"/>
+          <p:cNvSpPr/>
+          <p:nvPr/>
+        </p:nvSpPr>
+        <p:spPr>
+          <a:xfrm>
+            <a:off x="182880" y="457200"/>
+            <a:ext cx="91440" cy="5943600"/>
+          </a:xfrm>
+          <a:prstGeom prst="rect">
+            <a:avLst/>
+          </a:prstGeom>
+          <a:solidFill>
+            <a:srgbClr val="D2691E"/>
+          </a:solidFill>
+          <a:ln>
+            <a:noFill/>
+          </a:ln>
+        </p:spPr>
+        <p:style>
+          <a:lnRef idx="1">
+            <a:schemeClr val="accent1"/>
+          </a:lnRef>
+          <a:fillRef idx="3">
+            <a:schemeClr val="accent1"/>
+          </a:fillRef>
+          <a:effectRef idx="2">
+            <a:schemeClr val="accent1"/>
+          </a:effectRef>
+          <a:fontRef idx="minor">
+            <a:schemeClr val="lt1"/>
+          </a:fontRef>
+        </p:style>
+        <p:txBody>
+          <a:bodyPr rtlCol="0" anchor="ctr"/>
+          <a:lstStyle/>
+          <a:p>
+            <a:pPr algn="ctr"/>
+          </a:p>
+        </p:txBody>
+      </p:sp>
+      <p:sp>
+        <p:nvSpPr>
+          <p:cNvPr id="5" name="Rectangle 4"/>
+          <p:cNvSpPr/>
+          <p:nvPr/>
+        </p:nvSpPr>
+        <p:spPr>
+          <a:xfrm>
+            <a:off x="182880" y="6400800"/>
+            <a:ext cx="11795760" cy="18288"/>
+          </a:xfrm>
+          <a:prstGeom prst="rect">
+            <a:avLst/>
+          </a:prstGeom>
+          <a:solidFill>
+            <a:srgbClr val="D2691E"/>
+          </a:solidFill>
+          <a:ln>
+            <a:noFill/>
+          </a:ln>
+        </p:spPr>
+        <p:style>
+          <a:lnRef idx="1">
+            <a:schemeClr val="accent1"/>
+          </a:lnRef>
+          <a:fillRef idx="3">
+            <a:schemeClr val="accent1"/>
+          </a:fillRef>
+          <a:effectRef idx="2">
+            <a:schemeClr val="accent1"/>
+          </a:effectRef>
+          <a:fontRef idx="minor">
+            <a:schemeClr val="lt1"/>
+          </a:fontRef>
+        </p:style>
+        <p:txBody>
+          <a:bodyPr rtlCol="0" anchor="ctr"/>
+          <a:lstStyle/>
+          <a:p>
+            <a:pPr algn="ctr"/>
+          </a:p>
+        </p:txBody>
+      </p:sp>
+      <p:sp>
+        <p:nvSpPr>
+          <p:cNvPr id="6" name="TextBox 5"/>
+          <p:cNvSpPr txBox="1"/>
+          <p:nvPr/>
+        </p:nvSpPr>
+        <p:spPr>
+          <a:xfrm>
+            <a:off x="11247120" y="6492240"/>
+            <a:ext cx="457200" cy="274320"/>
+          </a:xfrm>
+          <a:prstGeom prst="rect">
+            <a:avLst/>
+          </a:prstGeom>
+          <a:noFill/>
+        </p:spPr>
+        <p:txBody>
+          <a:bodyPr wrap="none">
+            <a:spAutoFit/>
+          </a:bodyPr>
+          <a:lstStyle/>
+          <a:p>
+            <a:pPr algn="r">
+              <a:defRPr sz="1200">
                 <a:solidFill>
                   <a:srgbClr val="3C3C3C"/>
                 </a:solidFill>
               </a:defRPr>
             </a:pPr>
             <a:r>
-              <a:t>Let's consider navigating a maze using a deterministic strategy.  A deterministic approach means following a rigidly defined set of rules that will always produce the same result, regardless of the maze. For example, a "left-most" strategy always chooses the leftmost path at every junction. This guarantees a solution for some mazes, but might fail for others.  Deterministic algorithms guarantee a specific outcome given a specific input, but might not be suitable for all situations.  The "left-most" rule would consistently solve one type of maze but consistently fail in another; determinism is about the guaranteed outcome of a specific strategy.</a:t>
-            </a:r>
-          </a:p>
-        </p:txBody>
-      </p:sp>
-      <p:sp>
-        <p:nvSpPr>
-          <p:cNvPr id="4" name="Rectangle 3"/>
-          <p:cNvSpPr/>
-          <p:nvPr/>
-        </p:nvSpPr>
-        <p:spPr>
-          <a:xfrm>
-            <a:off x="457200" y="457200"/>
-            <a:ext cx="91440" cy="5943600"/>
-          </a:xfrm>
-          <a:prstGeom prst="rect">
-            <a:avLst/>
-          </a:prstGeom>
-          <a:solidFill>
-            <a:srgbClr val="6478C8"/>
-          </a:solidFill>
-          <a:ln>
-            <a:noFill/>
-          </a:ln>
-        </p:spPr>
-        <p:style>
-          <a:lnRef idx="1">
-            <a:schemeClr val="accent1"/>
-          </a:lnRef>
-          <a:fillRef idx="3">
-            <a:schemeClr val="accent1"/>
-          </a:fillRef>
-          <a:effectRef idx="2">
-            <a:schemeClr val="accent1"/>
-          </a:effectRef>
-          <a:fontRef idx="minor">
-            <a:schemeClr val="lt1"/>
-          </a:fontRef>
-        </p:style>
-        <p:txBody>
-          <a:bodyPr rtlCol="0" anchor="ctr"/>
-          <a:lstStyle/>
-          <a:p>
-            <a:pPr algn="ctr"/>
-          </a:p>
-        </p:txBody>
-      </p:sp>
-      <p:sp>
-        <p:nvSpPr>
-          <p:cNvPr id="5" name="TextBox 4"/>
-          <p:cNvSpPr txBox="1"/>
-          <p:nvPr/>
-        </p:nvSpPr>
-        <p:spPr>
-          <a:xfrm>
-            <a:off x="10972800" y="6400800"/>
-            <a:ext cx="457200" cy="274320"/>
-          </a:xfrm>
-          <a:prstGeom prst="rect">
-            <a:avLst/>
-          </a:prstGeom>
-          <a:noFill/>
-        </p:spPr>
-        <p:txBody>
-          <a:bodyPr wrap="none">
-            <a:spAutoFit/>
-          </a:bodyPr>
-          <a:lstStyle/>
-          <a:p>
-            <a:pPr algn="r">
-              <a:defRPr sz="1200">
-                <a:solidFill>
-                  <a:srgbClr val="646464"/>
-                </a:solidFill>
-              </a:defRPr>
-            </a:pPr>
-            <a:r>
-              <a:t>2</a:t>
+              <a:t>2/15</a:t>
             </a:r>
           </a:p>
         </p:txBody>
@@ -3424,7 +4786,7 @@
     <p:bg>
       <p:bgPr>
         <a:solidFill>
-          <a:srgbClr val="F0FFFA"/>
+          <a:srgbClr val="F0FFF0"/>
         </a:solidFill>
         <a:effectLst/>
       </p:bgPr>
@@ -3454,12 +4816,13 @@
             <a:pPr algn="l">
               <a:defRPr sz="4400" b="1">
                 <a:solidFill>
-                  <a:srgbClr val="283C64"/>
+                  <a:srgbClr val="228B22"/>
                 </a:solidFill>
+                <a:latin typeface="Calibri"/>
               </a:defRPr>
             </a:pPr>
             <a:r>
-              <a:t>Navigating a Maze: Nondeterminism</a:t>
+              <a:t>The Pumping Lemma for Context-Free Languages</a:t>
             </a:r>
           </a:p>
         </p:txBody>
@@ -3486,92 +4849,136 @@
               <a:spcAft>
                 <a:spcPts val="1200"/>
               </a:spcAft>
-              <a:defRPr sz="2000">
+              <a:defRPr sz="2400" b="0">
+                <a:solidFill>
+                  <a:srgbClr val="3C3C3C"/>
+                </a:solidFill>
+                <a:latin typeface="Calibri"/>
+              </a:defRPr>
+            </a:pPr>
+            <a:r>
+              <a:t>The Pumping Lemma states that for any context-free language L, there exists a pumping length p such that any string w in L with |w| ≥ p can be divided into five parts: w = uvxyz.  Crucially, three conditions must hold: (1) for all i ≥ 0, uv&lt;sup&gt;i&lt;/sup&gt;xy&lt;sup&gt;i&lt;/sup&gt;z ∈ L; (2) |vy| &gt; 0; and (3) |vxy| ≤ p. This means we can repeat the substring v and y any number of times, and the resulting string will still be in the language. This forms the basis of our proof technique.</a:t>
+            </a:r>
+          </a:p>
+        </p:txBody>
+      </p:sp>
+      <p:sp>
+        <p:nvSpPr>
+          <p:cNvPr id="4" name="Rectangle 3"/>
+          <p:cNvSpPr/>
+          <p:nvPr/>
+        </p:nvSpPr>
+        <p:spPr>
+          <a:xfrm>
+            <a:off x="182880" y="457200"/>
+            <a:ext cx="91440" cy="5943600"/>
+          </a:xfrm>
+          <a:prstGeom prst="rect">
+            <a:avLst/>
+          </a:prstGeom>
+          <a:solidFill>
+            <a:srgbClr val="3CB371"/>
+          </a:solidFill>
+          <a:ln>
+            <a:noFill/>
+          </a:ln>
+        </p:spPr>
+        <p:style>
+          <a:lnRef idx="1">
+            <a:schemeClr val="accent1"/>
+          </a:lnRef>
+          <a:fillRef idx="3">
+            <a:schemeClr val="accent1"/>
+          </a:fillRef>
+          <a:effectRef idx="2">
+            <a:schemeClr val="accent1"/>
+          </a:effectRef>
+          <a:fontRef idx="minor">
+            <a:schemeClr val="lt1"/>
+          </a:fontRef>
+        </p:style>
+        <p:txBody>
+          <a:bodyPr rtlCol="0" anchor="ctr"/>
+          <a:lstStyle/>
+          <a:p>
+            <a:pPr algn="ctr"/>
+          </a:p>
+        </p:txBody>
+      </p:sp>
+      <p:sp>
+        <p:nvSpPr>
+          <p:cNvPr id="5" name="Rectangle 4"/>
+          <p:cNvSpPr/>
+          <p:nvPr/>
+        </p:nvSpPr>
+        <p:spPr>
+          <a:xfrm>
+            <a:off x="182880" y="6400800"/>
+            <a:ext cx="11795760" cy="18288"/>
+          </a:xfrm>
+          <a:prstGeom prst="rect">
+            <a:avLst/>
+          </a:prstGeom>
+          <a:solidFill>
+            <a:srgbClr val="3CB371"/>
+          </a:solidFill>
+          <a:ln>
+            <a:noFill/>
+          </a:ln>
+        </p:spPr>
+        <p:style>
+          <a:lnRef idx="1">
+            <a:schemeClr val="accent1"/>
+          </a:lnRef>
+          <a:fillRef idx="3">
+            <a:schemeClr val="accent1"/>
+          </a:fillRef>
+          <a:effectRef idx="2">
+            <a:schemeClr val="accent1"/>
+          </a:effectRef>
+          <a:fontRef idx="minor">
+            <a:schemeClr val="lt1"/>
+          </a:fontRef>
+        </p:style>
+        <p:txBody>
+          <a:bodyPr rtlCol="0" anchor="ctr"/>
+          <a:lstStyle/>
+          <a:p>
+            <a:pPr algn="ctr"/>
+          </a:p>
+        </p:txBody>
+      </p:sp>
+      <p:sp>
+        <p:nvSpPr>
+          <p:cNvPr id="6" name="TextBox 5"/>
+          <p:cNvSpPr txBox="1"/>
+          <p:nvPr/>
+        </p:nvSpPr>
+        <p:spPr>
+          <a:xfrm>
+            <a:off x="11247120" y="6492240"/>
+            <a:ext cx="457200" cy="274320"/>
+          </a:xfrm>
+          <a:prstGeom prst="rect">
+            <a:avLst/>
+          </a:prstGeom>
+          <a:noFill/>
+        </p:spPr>
+        <p:txBody>
+          <a:bodyPr wrap="none">
+            <a:spAutoFit/>
+          </a:bodyPr>
+          <a:lstStyle/>
+          <a:p>
+            <a:pPr algn="r">
+              <a:defRPr sz="1200">
                 <a:solidFill>
                   <a:srgbClr val="3C3C3C"/>
                 </a:solidFill>
               </a:defRPr>
             </a:pPr>
             <a:r>
-              <a:t>Now, let's contrast this with a nondeterministic approach to maze navigation. In a nondeterministic solution, we explore all possible paths concurrently.  This implies exploring every path simultaneously to determine if a solution exists. We aren't concerned with a specific strategy for traversal; rather, we're concerned with whether a solution exists at all.  Think of it as trying every path simultaneously to see if any lead to the exit.  If even one path does, the maze is solvable—regardless of which path led to the solution. This highlights nondeterminism's focus on the existence of a solution rather than a specific solution path.</a:t>
-            </a:r>
-          </a:p>
-        </p:txBody>
-      </p:sp>
-      <p:sp>
-        <p:nvSpPr>
-          <p:cNvPr id="4" name="Rectangle 3"/>
-          <p:cNvSpPr/>
-          <p:nvPr/>
-        </p:nvSpPr>
-        <p:spPr>
-          <a:xfrm>
-            <a:off x="457200" y="457200"/>
-            <a:ext cx="91440" cy="5943600"/>
-          </a:xfrm>
-          <a:prstGeom prst="rect">
-            <a:avLst/>
-          </a:prstGeom>
-          <a:solidFill>
-            <a:srgbClr val="6478C8"/>
-          </a:solidFill>
-          <a:ln>
-            <a:noFill/>
-          </a:ln>
-        </p:spPr>
-        <p:style>
-          <a:lnRef idx="1">
-            <a:schemeClr val="accent1"/>
-          </a:lnRef>
-          <a:fillRef idx="3">
-            <a:schemeClr val="accent1"/>
-          </a:fillRef>
-          <a:effectRef idx="2">
-            <a:schemeClr val="accent1"/>
-          </a:effectRef>
-          <a:fontRef idx="minor">
-            <a:schemeClr val="lt1"/>
-          </a:fontRef>
-        </p:style>
-        <p:txBody>
-          <a:bodyPr rtlCol="0" anchor="ctr"/>
-          <a:lstStyle/>
-          <a:p>
-            <a:pPr algn="ctr"/>
-          </a:p>
-        </p:txBody>
-      </p:sp>
-      <p:sp>
-        <p:nvSpPr>
-          <p:cNvPr id="5" name="TextBox 4"/>
-          <p:cNvSpPr txBox="1"/>
-          <p:nvPr/>
-        </p:nvSpPr>
-        <p:spPr>
-          <a:xfrm>
-            <a:off x="10972800" y="6400800"/>
-            <a:ext cx="457200" cy="274320"/>
-          </a:xfrm>
-          <a:prstGeom prst="rect">
-            <a:avLst/>
-          </a:prstGeom>
-          <a:noFill/>
-        </p:spPr>
-        <p:txBody>
-          <a:bodyPr wrap="none">
-            <a:spAutoFit/>
-          </a:bodyPr>
-          <a:lstStyle/>
-          <a:p>
-            <a:pPr algn="r">
-              <a:defRPr sz="1200">
-                <a:solidFill>
-                  <a:srgbClr val="646464"/>
-                </a:solidFill>
-              </a:defRPr>
-            </a:pPr>
-            <a:r>
-              <a:t>3</a:t>
+              <a:t>3/15</a:t>
             </a:r>
           </a:p>
         </p:txBody>
@@ -3590,7 +4997,7 @@
     <p:bg>
       <p:bgPr>
         <a:solidFill>
-          <a:srgbClr val="FAF8F5"/>
+          <a:srgbClr val="F0F8FF"/>
         </a:solidFill>
         <a:effectLst/>
       </p:bgPr>
@@ -3620,12 +5027,13 @@
             <a:pPr algn="l">
               <a:defRPr sz="4400" b="1">
                 <a:solidFill>
-                  <a:srgbClr val="283C64"/>
+                  <a:srgbClr val="2F5496"/>
                 </a:solidFill>
+                <a:latin typeface="Calibri"/>
               </a:defRPr>
             </a:pPr>
             <a:r>
-              <a:t>Routing Packets on the Internet</a:t>
+              <a:t>Proving Non-Context-Freedom: L&lt;sub&gt;1&lt;/sub&gt; - Example</a:t>
             </a:r>
           </a:p>
         </p:txBody>
@@ -3652,92 +5060,136 @@
               <a:spcAft>
                 <a:spcPts val="1200"/>
               </a:spcAft>
-              <a:defRPr sz="2000">
+              <a:defRPr sz="2400" b="0">
+                <a:solidFill>
+                  <a:srgbClr val="3C3C3C"/>
+                </a:solidFill>
+                <a:latin typeface="Calibri"/>
+              </a:defRPr>
+            </a:pPr>
+            <a:r>
+              <a:t>Let's prove L&lt;sub&gt;1&lt;/sub&gt; = {a&lt;sup&gt;n&lt;/sup&gt;b&lt;sup&gt;n&lt;/sup&gt;c&lt;sup&gt;n&lt;/sup&gt; | n ≥ 0} is non-context-free.  Assume, for the sake of contradiction, that L&lt;sub&gt;1&lt;/sub&gt; is context-free. Let p be the pumping length given by the Pumping Lemma. Consider the string w = a&lt;sup&gt;p&lt;/sup&gt;b&lt;sup&gt;p&lt;/sup&gt;c&lt;sup&gt;p&lt;/sup&gt;.  Clearly, w ∈ L&lt;sub&gt;1&lt;/sub&gt; and |w| ≥ p. We need to show that any valid division of w into uvxyz satisfying the Pumping Lemma’s conditions will lead to a contradiction. We’ll consider this in two cases: those where v and y contain only one type of symbol and those where v or y contain multiple symbol types.</a:t>
+            </a:r>
+          </a:p>
+        </p:txBody>
+      </p:sp>
+      <p:sp>
+        <p:nvSpPr>
+          <p:cNvPr id="4" name="Rectangle 3"/>
+          <p:cNvSpPr/>
+          <p:nvPr/>
+        </p:nvSpPr>
+        <p:spPr>
+          <a:xfrm>
+            <a:off x="182880" y="457200"/>
+            <a:ext cx="91440" cy="5943600"/>
+          </a:xfrm>
+          <a:prstGeom prst="rect">
+            <a:avLst/>
+          </a:prstGeom>
+          <a:solidFill>
+            <a:srgbClr val="4169E1"/>
+          </a:solidFill>
+          <a:ln>
+            <a:noFill/>
+          </a:ln>
+        </p:spPr>
+        <p:style>
+          <a:lnRef idx="1">
+            <a:schemeClr val="accent1"/>
+          </a:lnRef>
+          <a:fillRef idx="3">
+            <a:schemeClr val="accent1"/>
+          </a:fillRef>
+          <a:effectRef idx="2">
+            <a:schemeClr val="accent1"/>
+          </a:effectRef>
+          <a:fontRef idx="minor">
+            <a:schemeClr val="lt1"/>
+          </a:fontRef>
+        </p:style>
+        <p:txBody>
+          <a:bodyPr rtlCol="0" anchor="ctr"/>
+          <a:lstStyle/>
+          <a:p>
+            <a:pPr algn="ctr"/>
+          </a:p>
+        </p:txBody>
+      </p:sp>
+      <p:sp>
+        <p:nvSpPr>
+          <p:cNvPr id="5" name="Rectangle 4"/>
+          <p:cNvSpPr/>
+          <p:nvPr/>
+        </p:nvSpPr>
+        <p:spPr>
+          <a:xfrm>
+            <a:off x="182880" y="6400800"/>
+            <a:ext cx="11795760" cy="18288"/>
+          </a:xfrm>
+          <a:prstGeom prst="rect">
+            <a:avLst/>
+          </a:prstGeom>
+          <a:solidFill>
+            <a:srgbClr val="4169E1"/>
+          </a:solidFill>
+          <a:ln>
+            <a:noFill/>
+          </a:ln>
+        </p:spPr>
+        <p:style>
+          <a:lnRef idx="1">
+            <a:schemeClr val="accent1"/>
+          </a:lnRef>
+          <a:fillRef idx="3">
+            <a:schemeClr val="accent1"/>
+          </a:fillRef>
+          <a:effectRef idx="2">
+            <a:schemeClr val="accent1"/>
+          </a:effectRef>
+          <a:fontRef idx="minor">
+            <a:schemeClr val="lt1"/>
+          </a:fontRef>
+        </p:style>
+        <p:txBody>
+          <a:bodyPr rtlCol="0" anchor="ctr"/>
+          <a:lstStyle/>
+          <a:p>
+            <a:pPr algn="ctr"/>
+          </a:p>
+        </p:txBody>
+      </p:sp>
+      <p:sp>
+        <p:nvSpPr>
+          <p:cNvPr id="6" name="TextBox 5"/>
+          <p:cNvSpPr txBox="1"/>
+          <p:nvPr/>
+        </p:nvSpPr>
+        <p:spPr>
+          <a:xfrm>
+            <a:off x="11247120" y="6492240"/>
+            <a:ext cx="457200" cy="274320"/>
+          </a:xfrm>
+          <a:prstGeom prst="rect">
+            <a:avLst/>
+          </a:prstGeom>
+          <a:noFill/>
+        </p:spPr>
+        <p:txBody>
+          <a:bodyPr wrap="none">
+            <a:spAutoFit/>
+          </a:bodyPr>
+          <a:lstStyle/>
+          <a:p>
+            <a:pPr algn="r">
+              <a:defRPr sz="1200">
                 <a:solidFill>
                   <a:srgbClr val="3C3C3C"/>
                 </a:solidFill>
               </a:defRPr>
             </a:pPr>
             <a:r>
-              <a:t>Consider sending a data packet from your computer to a web server. The packet's journey is not predetermined; multiple routes exist.  The network chooses a path dynamically, possibly changing with network conditions. This is a real-world instance of nondeterminism. The network doesn't follow a single prescribed route; instead, it chooses the best path available at that moment, a path which might vary significantly from one transmission to the next.  This dynamism is a key element of internet routing.</a:t>
-            </a:r>
-          </a:p>
-        </p:txBody>
-      </p:sp>
-      <p:sp>
-        <p:nvSpPr>
-          <p:cNvPr id="4" name="Rectangle 3"/>
-          <p:cNvSpPr/>
-          <p:nvPr/>
-        </p:nvSpPr>
-        <p:spPr>
-          <a:xfrm>
-            <a:off x="457200" y="457200"/>
-            <a:ext cx="91440" cy="5943600"/>
-          </a:xfrm>
-          <a:prstGeom prst="rect">
-            <a:avLst/>
-          </a:prstGeom>
-          <a:solidFill>
-            <a:srgbClr val="6478C8"/>
-          </a:solidFill>
-          <a:ln>
-            <a:noFill/>
-          </a:ln>
-        </p:spPr>
-        <p:style>
-          <a:lnRef idx="1">
-            <a:schemeClr val="accent1"/>
-          </a:lnRef>
-          <a:fillRef idx="3">
-            <a:schemeClr val="accent1"/>
-          </a:fillRef>
-          <a:effectRef idx="2">
-            <a:schemeClr val="accent1"/>
-          </a:effectRef>
-          <a:fontRef idx="minor">
-            <a:schemeClr val="lt1"/>
-          </a:fontRef>
-        </p:style>
-        <p:txBody>
-          <a:bodyPr rtlCol="0" anchor="ctr"/>
-          <a:lstStyle/>
-          <a:p>
-            <a:pPr algn="ctr"/>
-          </a:p>
-        </p:txBody>
-      </p:sp>
-      <p:sp>
-        <p:nvSpPr>
-          <p:cNvPr id="5" name="TextBox 4"/>
-          <p:cNvSpPr txBox="1"/>
-          <p:nvPr/>
-        </p:nvSpPr>
-        <p:spPr>
-          <a:xfrm>
-            <a:off x="10972800" y="6400800"/>
-            <a:ext cx="457200" cy="274320"/>
-          </a:xfrm>
-          <a:prstGeom prst="rect">
-            <a:avLst/>
-          </a:prstGeom>
-          <a:noFill/>
-        </p:spPr>
-        <p:txBody>
-          <a:bodyPr wrap="none">
-            <a:spAutoFit/>
-          </a:bodyPr>
-          <a:lstStyle/>
-          <a:p>
-            <a:pPr algn="r">
-              <a:defRPr sz="1200">
-                <a:solidFill>
-                  <a:srgbClr val="646464"/>
-                </a:solidFill>
-              </a:defRPr>
-            </a:pPr>
-            <a:r>
-              <a:t>4</a:t>
+              <a:t>4/15</a:t>
             </a:r>
           </a:p>
         </p:txBody>
@@ -3756,7 +5208,7 @@
     <p:bg>
       <p:bgPr>
         <a:solidFill>
-          <a:srgbClr val="E6F0FF"/>
+          <a:srgbClr val="FFF5EE"/>
         </a:solidFill>
         <a:effectLst/>
       </p:bgPr>
@@ -3786,12 +5238,13 @@
             <a:pPr algn="l">
               <a:defRPr sz="4400" b="1">
                 <a:solidFill>
-                  <a:srgbClr val="283C64"/>
+                  <a:srgbClr val="8B4513"/>
                 </a:solidFill>
+                <a:latin typeface="Calibri"/>
               </a:defRPr>
             </a:pPr>
             <a:r>
-              <a:t>Planning Moves in Chess</a:t>
+              <a:t>Proving Non-Context-Freedom: L&lt;sub&gt;1&lt;/sub&gt; - Case 1</a:t>
             </a:r>
           </a:p>
         </p:txBody>
@@ -3818,92 +5271,136 @@
               <a:spcAft>
                 <a:spcPts val="1200"/>
               </a:spcAft>
-              <a:defRPr sz="2000">
+              <a:defRPr sz="2400" b="0">
+                <a:solidFill>
+                  <a:srgbClr val="3C3C3C"/>
+                </a:solidFill>
+                <a:latin typeface="Calibri"/>
+              </a:defRPr>
+            </a:pPr>
+            <a:r>
+              <a:t>Consider any division w = uvxyz where both v and y contain only one type of alphabet symbol (a, b, or c).  Regardless of which symbol(s) v and y contain, there will always be at least one symbol type missing from both v and y.  Therefore, uv&lt;sup&gt;2&lt;/sup&gt;xy&lt;sup&gt;2&lt;/sup&gt;z cannot have an equal number of a's, b's, and c's. This means uv&lt;sup&gt;2&lt;/sup&gt;xy&lt;sup&gt;2&lt;/sup&gt;z ∉ L&lt;sub&gt;1&lt;/sub&gt;, a contradiction.</a:t>
+            </a:r>
+          </a:p>
+        </p:txBody>
+      </p:sp>
+      <p:sp>
+        <p:nvSpPr>
+          <p:cNvPr id="4" name="Rectangle 3"/>
+          <p:cNvSpPr/>
+          <p:nvPr/>
+        </p:nvSpPr>
+        <p:spPr>
+          <a:xfrm>
+            <a:off x="182880" y="457200"/>
+            <a:ext cx="91440" cy="5943600"/>
+          </a:xfrm>
+          <a:prstGeom prst="rect">
+            <a:avLst/>
+          </a:prstGeom>
+          <a:solidFill>
+            <a:srgbClr val="D2691E"/>
+          </a:solidFill>
+          <a:ln>
+            <a:noFill/>
+          </a:ln>
+        </p:spPr>
+        <p:style>
+          <a:lnRef idx="1">
+            <a:schemeClr val="accent1"/>
+          </a:lnRef>
+          <a:fillRef idx="3">
+            <a:schemeClr val="accent1"/>
+          </a:fillRef>
+          <a:effectRef idx="2">
+            <a:schemeClr val="accent1"/>
+          </a:effectRef>
+          <a:fontRef idx="minor">
+            <a:schemeClr val="lt1"/>
+          </a:fontRef>
+        </p:style>
+        <p:txBody>
+          <a:bodyPr rtlCol="0" anchor="ctr"/>
+          <a:lstStyle/>
+          <a:p>
+            <a:pPr algn="ctr"/>
+          </a:p>
+        </p:txBody>
+      </p:sp>
+      <p:sp>
+        <p:nvSpPr>
+          <p:cNvPr id="5" name="Rectangle 4"/>
+          <p:cNvSpPr/>
+          <p:nvPr/>
+        </p:nvSpPr>
+        <p:spPr>
+          <a:xfrm>
+            <a:off x="182880" y="6400800"/>
+            <a:ext cx="11795760" cy="18288"/>
+          </a:xfrm>
+          <a:prstGeom prst="rect">
+            <a:avLst/>
+          </a:prstGeom>
+          <a:solidFill>
+            <a:srgbClr val="D2691E"/>
+          </a:solidFill>
+          <a:ln>
+            <a:noFill/>
+          </a:ln>
+        </p:spPr>
+        <p:style>
+          <a:lnRef idx="1">
+            <a:schemeClr val="accent1"/>
+          </a:lnRef>
+          <a:fillRef idx="3">
+            <a:schemeClr val="accent1"/>
+          </a:fillRef>
+          <a:effectRef idx="2">
+            <a:schemeClr val="accent1"/>
+          </a:effectRef>
+          <a:fontRef idx="minor">
+            <a:schemeClr val="lt1"/>
+          </a:fontRef>
+        </p:style>
+        <p:txBody>
+          <a:bodyPr rtlCol="0" anchor="ctr"/>
+          <a:lstStyle/>
+          <a:p>
+            <a:pPr algn="ctr"/>
+          </a:p>
+        </p:txBody>
+      </p:sp>
+      <p:sp>
+        <p:nvSpPr>
+          <p:cNvPr id="6" name="TextBox 5"/>
+          <p:cNvSpPr txBox="1"/>
+          <p:nvPr/>
+        </p:nvSpPr>
+        <p:spPr>
+          <a:xfrm>
+            <a:off x="11247120" y="6492240"/>
+            <a:ext cx="457200" cy="274320"/>
+          </a:xfrm>
+          <a:prstGeom prst="rect">
+            <a:avLst/>
+          </a:prstGeom>
+          <a:noFill/>
+        </p:spPr>
+        <p:txBody>
+          <a:bodyPr wrap="none">
+            <a:spAutoFit/>
+          </a:bodyPr>
+          <a:lstStyle/>
+          <a:p>
+            <a:pPr algn="r">
+              <a:defRPr sz="1200">
                 <a:solidFill>
                   <a:srgbClr val="3C3C3C"/>
                 </a:solidFill>
               </a:defRPr>
             </a:pPr>
             <a:r>
-              <a:t>In chess, planning your move involves considering your opponent's possible responses. Your optimal move depends on anticipating your opponent's actions.  This is a nondeterministic problem because you don't know your opponent's future moves, yet you must plan based on the potential range of their choices.  A nondeterministic approach explores all possible scenarios to determine the best possible move, even in the face of the opponent's uncertainty.  Think of it as a decision tree where each branch represents a different opponent move.</a:t>
-            </a:r>
-          </a:p>
-        </p:txBody>
-      </p:sp>
-      <p:sp>
-        <p:nvSpPr>
-          <p:cNvPr id="4" name="Rectangle 3"/>
-          <p:cNvSpPr/>
-          <p:nvPr/>
-        </p:nvSpPr>
-        <p:spPr>
-          <a:xfrm>
-            <a:off x="457200" y="457200"/>
-            <a:ext cx="91440" cy="5943600"/>
-          </a:xfrm>
-          <a:prstGeom prst="rect">
-            <a:avLst/>
-          </a:prstGeom>
-          <a:solidFill>
-            <a:srgbClr val="6478C8"/>
-          </a:solidFill>
-          <a:ln>
-            <a:noFill/>
-          </a:ln>
-        </p:spPr>
-        <p:style>
-          <a:lnRef idx="1">
-            <a:schemeClr val="accent1"/>
-          </a:lnRef>
-          <a:fillRef idx="3">
-            <a:schemeClr val="accent1"/>
-          </a:fillRef>
-          <a:effectRef idx="2">
-            <a:schemeClr val="accent1"/>
-          </a:effectRef>
-          <a:fontRef idx="minor">
-            <a:schemeClr val="lt1"/>
-          </a:fontRef>
-        </p:style>
-        <p:txBody>
-          <a:bodyPr rtlCol="0" anchor="ctr"/>
-          <a:lstStyle/>
-          <a:p>
-            <a:pPr algn="ctr"/>
-          </a:p>
-        </p:txBody>
-      </p:sp>
-      <p:sp>
-        <p:nvSpPr>
-          <p:cNvPr id="5" name="TextBox 4"/>
-          <p:cNvSpPr txBox="1"/>
-          <p:nvPr/>
-        </p:nvSpPr>
-        <p:spPr>
-          <a:xfrm>
-            <a:off x="10972800" y="6400800"/>
-            <a:ext cx="457200" cy="274320"/>
-          </a:xfrm>
-          <a:prstGeom prst="rect">
-            <a:avLst/>
-          </a:prstGeom>
-          <a:noFill/>
-        </p:spPr>
-        <p:txBody>
-          <a:bodyPr wrap="none">
-            <a:spAutoFit/>
-          </a:bodyPr>
-          <a:lstStyle/>
-          <a:p>
-            <a:pPr algn="r">
-              <a:defRPr sz="1200">
-                <a:solidFill>
-                  <a:srgbClr val="646464"/>
-                </a:solidFill>
-              </a:defRPr>
-            </a:pPr>
-            <a:r>
-              <a:t>5</a:t>
+              <a:t>5/15</a:t>
             </a:r>
           </a:p>
         </p:txBody>
@@ -3922,7 +5419,7 @@
     <p:bg>
       <p:bgPr>
         <a:solidFill>
-          <a:srgbClr val="F5F0FF"/>
+          <a:srgbClr val="F0FFF0"/>
         </a:solidFill>
         <a:effectLst/>
       </p:bgPr>
@@ -3952,12 +5449,13 @@
             <a:pPr algn="l">
               <a:defRPr sz="4400" b="1">
                 <a:solidFill>
-                  <a:srgbClr val="283C64"/>
+                  <a:srgbClr val="228B22"/>
                 </a:solidFill>
+                <a:latin typeface="Calibri"/>
               </a:defRPr>
             </a:pPr>
             <a:r>
-              <a:t>Why Nondeterminism Matters</a:t>
+              <a:t>Proving Non-Context-Freedom: L&lt;sub&gt;1&lt;/sub&gt; - Case 2</a:t>
             </a:r>
           </a:p>
         </p:txBody>
@@ -3984,92 +5482,136 @@
               <a:spcAft>
                 <a:spcPts val="1200"/>
               </a:spcAft>
-              <a:defRPr sz="2000">
+              <a:defRPr sz="2400" b="0">
+                <a:solidFill>
+                  <a:srgbClr val="3C3C3C"/>
+                </a:solidFill>
+                <a:latin typeface="Calibri"/>
+              </a:defRPr>
+            </a:pPr>
+            <a:r>
+              <a:t>Now, consider divisions w = uvxyz where v or y contains multiple types of alphabet symbols (e.g., v contains both a's and b's). Pumping v and y will disrupt the a&lt;sup&gt;n&lt;/sup&gt;b&lt;sup&gt;n&lt;/sup&gt;c&lt;sup&gt;n&lt;/sup&gt; pattern.  For example, pumping up might result in more a's than b's, or more b's than c's.  This again leads to uv&lt;sup&gt;i&lt;/sup&gt;xy&lt;sup&gt;i&lt;/sup&gt;z ∉ L&lt;sub&gt;1&lt;/sub&gt; for some i, creating a contradiction. Since both cases result in a contradiction, L&lt;sub&gt;1&lt;/sub&gt; must be non-context-free.</a:t>
+            </a:r>
+          </a:p>
+        </p:txBody>
+      </p:sp>
+      <p:sp>
+        <p:nvSpPr>
+          <p:cNvPr id="4" name="Rectangle 3"/>
+          <p:cNvSpPr/>
+          <p:nvPr/>
+        </p:nvSpPr>
+        <p:spPr>
+          <a:xfrm>
+            <a:off x="182880" y="457200"/>
+            <a:ext cx="91440" cy="5943600"/>
+          </a:xfrm>
+          <a:prstGeom prst="rect">
+            <a:avLst/>
+          </a:prstGeom>
+          <a:solidFill>
+            <a:srgbClr val="3CB371"/>
+          </a:solidFill>
+          <a:ln>
+            <a:noFill/>
+          </a:ln>
+        </p:spPr>
+        <p:style>
+          <a:lnRef idx="1">
+            <a:schemeClr val="accent1"/>
+          </a:lnRef>
+          <a:fillRef idx="3">
+            <a:schemeClr val="accent1"/>
+          </a:fillRef>
+          <a:effectRef idx="2">
+            <a:schemeClr val="accent1"/>
+          </a:effectRef>
+          <a:fontRef idx="minor">
+            <a:schemeClr val="lt1"/>
+          </a:fontRef>
+        </p:style>
+        <p:txBody>
+          <a:bodyPr rtlCol="0" anchor="ctr"/>
+          <a:lstStyle/>
+          <a:p>
+            <a:pPr algn="ctr"/>
+          </a:p>
+        </p:txBody>
+      </p:sp>
+      <p:sp>
+        <p:nvSpPr>
+          <p:cNvPr id="5" name="Rectangle 4"/>
+          <p:cNvSpPr/>
+          <p:nvPr/>
+        </p:nvSpPr>
+        <p:spPr>
+          <a:xfrm>
+            <a:off x="182880" y="6400800"/>
+            <a:ext cx="11795760" cy="18288"/>
+          </a:xfrm>
+          <a:prstGeom prst="rect">
+            <a:avLst/>
+          </a:prstGeom>
+          <a:solidFill>
+            <a:srgbClr val="3CB371"/>
+          </a:solidFill>
+          <a:ln>
+            <a:noFill/>
+          </a:ln>
+        </p:spPr>
+        <p:style>
+          <a:lnRef idx="1">
+            <a:schemeClr val="accent1"/>
+          </a:lnRef>
+          <a:fillRef idx="3">
+            <a:schemeClr val="accent1"/>
+          </a:fillRef>
+          <a:effectRef idx="2">
+            <a:schemeClr val="accent1"/>
+          </a:effectRef>
+          <a:fontRef idx="minor">
+            <a:schemeClr val="lt1"/>
+          </a:fontRef>
+        </p:style>
+        <p:txBody>
+          <a:bodyPr rtlCol="0" anchor="ctr"/>
+          <a:lstStyle/>
+          <a:p>
+            <a:pPr algn="ctr"/>
+          </a:p>
+        </p:txBody>
+      </p:sp>
+      <p:sp>
+        <p:nvSpPr>
+          <p:cNvPr id="6" name="TextBox 5"/>
+          <p:cNvSpPr txBox="1"/>
+          <p:nvPr/>
+        </p:nvSpPr>
+        <p:spPr>
+          <a:xfrm>
+            <a:off x="11247120" y="6492240"/>
+            <a:ext cx="457200" cy="274320"/>
+          </a:xfrm>
+          <a:prstGeom prst="rect">
+            <a:avLst/>
+          </a:prstGeom>
+          <a:noFill/>
+        </p:spPr>
+        <p:txBody>
+          <a:bodyPr wrap="none">
+            <a:spAutoFit/>
+          </a:bodyPr>
+          <a:lstStyle/>
+          <a:p>
+            <a:pPr algn="r">
+              <a:defRPr sz="1200">
                 <a:solidFill>
                   <a:srgbClr val="3C3C3C"/>
                 </a:solidFill>
               </a:defRPr>
             </a:pPr>
             <a:r>
-              <a:t>Nondeterminism is important in theoretical computer science due to its implications on computational power and problem-solving. Allowing multiple, parallel choices (as in exploring all paths in a maze simultaneously) can potentially remove computational limitations that may exist in a purely deterministic approach. In addition, modeling uncertainty by considering all possibilities allows for stronger guarantees about the correctness, security and performance of a system or algorithm.  The existence of nondeterminism in the real world is a complex philosophical question that we will not delve into here, but it proves useful as a way of thinking about limited perspectives in various scenarios.</a:t>
-            </a:r>
-          </a:p>
-        </p:txBody>
-      </p:sp>
-      <p:sp>
-        <p:nvSpPr>
-          <p:cNvPr id="4" name="Rectangle 3"/>
-          <p:cNvSpPr/>
-          <p:nvPr/>
-        </p:nvSpPr>
-        <p:spPr>
-          <a:xfrm>
-            <a:off x="457200" y="457200"/>
-            <a:ext cx="91440" cy="5943600"/>
-          </a:xfrm>
-          <a:prstGeom prst="rect">
-            <a:avLst/>
-          </a:prstGeom>
-          <a:solidFill>
-            <a:srgbClr val="6478C8"/>
-          </a:solidFill>
-          <a:ln>
-            <a:noFill/>
-          </a:ln>
-        </p:spPr>
-        <p:style>
-          <a:lnRef idx="1">
-            <a:schemeClr val="accent1"/>
-          </a:lnRef>
-          <a:fillRef idx="3">
-            <a:schemeClr val="accent1"/>
-          </a:fillRef>
-          <a:effectRef idx="2">
-            <a:schemeClr val="accent1"/>
-          </a:effectRef>
-          <a:fontRef idx="minor">
-            <a:schemeClr val="lt1"/>
-          </a:fontRef>
-        </p:style>
-        <p:txBody>
-          <a:bodyPr rtlCol="0" anchor="ctr"/>
-          <a:lstStyle/>
-          <a:p>
-            <a:pPr algn="ctr"/>
-          </a:p>
-        </p:txBody>
-      </p:sp>
-      <p:sp>
-        <p:nvSpPr>
-          <p:cNvPr id="5" name="TextBox 4"/>
-          <p:cNvSpPr txBox="1"/>
-          <p:nvPr/>
-        </p:nvSpPr>
-        <p:spPr>
-          <a:xfrm>
-            <a:off x="10972800" y="6400800"/>
-            <a:ext cx="457200" cy="274320"/>
-          </a:xfrm>
-          <a:prstGeom prst="rect">
-            <a:avLst/>
-          </a:prstGeom>
-          <a:noFill/>
-        </p:spPr>
-        <p:txBody>
-          <a:bodyPr wrap="none">
-            <a:spAutoFit/>
-          </a:bodyPr>
-          <a:lstStyle/>
-          <a:p>
-            <a:pPr algn="r">
-              <a:defRPr sz="1200">
-                <a:solidFill>
-                  <a:srgbClr val="646464"/>
-                </a:solidFill>
-              </a:defRPr>
-            </a:pPr>
-            <a:r>
-              <a:t>6</a:t>
+              <a:t>6/15</a:t>
             </a:r>
           </a:p>
         </p:txBody>
@@ -4088,7 +5630,7 @@
     <p:bg>
       <p:bgPr>
         <a:solidFill>
-          <a:srgbClr val="F0FFFA"/>
+          <a:srgbClr val="F0F8FF"/>
         </a:solidFill>
         <a:effectLst/>
       </p:bgPr>
@@ -4118,12 +5660,13 @@
             <a:pPr algn="l">
               <a:defRPr sz="4400" b="1">
                 <a:solidFill>
-                  <a:srgbClr val="283C64"/>
+                  <a:srgbClr val="2F5496"/>
                 </a:solidFill>
+                <a:latin typeface="Calibri"/>
               </a:defRPr>
             </a:pPr>
             <a:r>
-              <a:t>Summary</a:t>
+              <a:t>Proving Non-Context-Freedom: L&lt;sub&gt;2&lt;/sub&gt; - Example</a:t>
             </a:r>
           </a:p>
         </p:txBody>
@@ -4150,92 +5693,136 @@
               <a:spcAft>
                 <a:spcPts val="1200"/>
               </a:spcAft>
-              <a:defRPr sz="2000">
+              <a:defRPr sz="2400" b="0">
+                <a:solidFill>
+                  <a:srgbClr val="3C3C3C"/>
+                </a:solidFill>
+                <a:latin typeface="Calibri"/>
+              </a:defRPr>
+            </a:pPr>
+            <a:r>
+              <a:t>Let's move on to L&lt;sub&gt;2&lt;/sub&gt; = {a&lt;sup&gt;i&lt;/sup&gt;b&lt;sup&gt;j&lt;/sup&gt;c&lt;sup&gt;k&lt;/sup&gt; | 0 ≤ i ≤ j ≤ k}. We follow the same approach: assume L&lt;sub&gt;2&lt;/sub&gt; is context-free, let p be the pumping length, and choose w = a&lt;sup&gt;p&lt;/sup&gt;b&lt;sup&gt;p&lt;/sup&gt;c&lt;sup&gt;p&lt;/sup&gt;. Again, we'll analyze different cases based on the content of the pumped substrings v and y.</a:t>
+            </a:r>
+          </a:p>
+        </p:txBody>
+      </p:sp>
+      <p:sp>
+        <p:nvSpPr>
+          <p:cNvPr id="4" name="Rectangle 3"/>
+          <p:cNvSpPr/>
+          <p:nvPr/>
+        </p:nvSpPr>
+        <p:spPr>
+          <a:xfrm>
+            <a:off x="182880" y="457200"/>
+            <a:ext cx="91440" cy="5943600"/>
+          </a:xfrm>
+          <a:prstGeom prst="rect">
+            <a:avLst/>
+          </a:prstGeom>
+          <a:solidFill>
+            <a:srgbClr val="4169E1"/>
+          </a:solidFill>
+          <a:ln>
+            <a:noFill/>
+          </a:ln>
+        </p:spPr>
+        <p:style>
+          <a:lnRef idx="1">
+            <a:schemeClr val="accent1"/>
+          </a:lnRef>
+          <a:fillRef idx="3">
+            <a:schemeClr val="accent1"/>
+          </a:fillRef>
+          <a:effectRef idx="2">
+            <a:schemeClr val="accent1"/>
+          </a:effectRef>
+          <a:fontRef idx="minor">
+            <a:schemeClr val="lt1"/>
+          </a:fontRef>
+        </p:style>
+        <p:txBody>
+          <a:bodyPr rtlCol="0" anchor="ctr"/>
+          <a:lstStyle/>
+          <a:p>
+            <a:pPr algn="ctr"/>
+          </a:p>
+        </p:txBody>
+      </p:sp>
+      <p:sp>
+        <p:nvSpPr>
+          <p:cNvPr id="5" name="Rectangle 4"/>
+          <p:cNvSpPr/>
+          <p:nvPr/>
+        </p:nvSpPr>
+        <p:spPr>
+          <a:xfrm>
+            <a:off x="182880" y="6400800"/>
+            <a:ext cx="11795760" cy="18288"/>
+          </a:xfrm>
+          <a:prstGeom prst="rect">
+            <a:avLst/>
+          </a:prstGeom>
+          <a:solidFill>
+            <a:srgbClr val="4169E1"/>
+          </a:solidFill>
+          <a:ln>
+            <a:noFill/>
+          </a:ln>
+        </p:spPr>
+        <p:style>
+          <a:lnRef idx="1">
+            <a:schemeClr val="accent1"/>
+          </a:lnRef>
+          <a:fillRef idx="3">
+            <a:schemeClr val="accent1"/>
+          </a:fillRef>
+          <a:effectRef idx="2">
+            <a:schemeClr val="accent1"/>
+          </a:effectRef>
+          <a:fontRef idx="minor">
+            <a:schemeClr val="lt1"/>
+          </a:fontRef>
+        </p:style>
+        <p:txBody>
+          <a:bodyPr rtlCol="0" anchor="ctr"/>
+          <a:lstStyle/>
+          <a:p>
+            <a:pPr algn="ctr"/>
+          </a:p>
+        </p:txBody>
+      </p:sp>
+      <p:sp>
+        <p:nvSpPr>
+          <p:cNvPr id="6" name="TextBox 5"/>
+          <p:cNvSpPr txBox="1"/>
+          <p:nvPr/>
+        </p:nvSpPr>
+        <p:spPr>
+          <a:xfrm>
+            <a:off x="11247120" y="6492240"/>
+            <a:ext cx="457200" cy="274320"/>
+          </a:xfrm>
+          <a:prstGeom prst="rect">
+            <a:avLst/>
+          </a:prstGeom>
+          <a:noFill/>
+        </p:spPr>
+        <p:txBody>
+          <a:bodyPr wrap="none">
+            <a:spAutoFit/>
+          </a:bodyPr>
+          <a:lstStyle/>
+          <a:p>
+            <a:pPr algn="r">
+              <a:defRPr sz="1200">
                 <a:solidFill>
                   <a:srgbClr val="3C3C3C"/>
                 </a:solidFill>
               </a:defRPr>
             </a:pPr>
             <a:r>
-              <a:t>In this lecture, we used three tangible analogies (maze navigation, internet packet routing, and chess strategy) to illustrate the concept of nondeterminism.  Nondeterminism helps us explore possibilities rather than following predetermined rules.  It's crucial for modelling systems with inherent uncertainty and exploring the potential for enhanced computational power in theory.</a:t>
-            </a:r>
-          </a:p>
-        </p:txBody>
-      </p:sp>
-      <p:sp>
-        <p:nvSpPr>
-          <p:cNvPr id="4" name="Rectangle 3"/>
-          <p:cNvSpPr/>
-          <p:nvPr/>
-        </p:nvSpPr>
-        <p:spPr>
-          <a:xfrm>
-            <a:off x="457200" y="457200"/>
-            <a:ext cx="91440" cy="5943600"/>
-          </a:xfrm>
-          <a:prstGeom prst="rect">
-            <a:avLst/>
-          </a:prstGeom>
-          <a:solidFill>
-            <a:srgbClr val="6478C8"/>
-          </a:solidFill>
-          <a:ln>
-            <a:noFill/>
-          </a:ln>
-        </p:spPr>
-        <p:style>
-          <a:lnRef idx="1">
-            <a:schemeClr val="accent1"/>
-          </a:lnRef>
-          <a:fillRef idx="3">
-            <a:schemeClr val="accent1"/>
-          </a:fillRef>
-          <a:effectRef idx="2">
-            <a:schemeClr val="accent1"/>
-          </a:effectRef>
-          <a:fontRef idx="minor">
-            <a:schemeClr val="lt1"/>
-          </a:fontRef>
-        </p:style>
-        <p:txBody>
-          <a:bodyPr rtlCol="0" anchor="ctr"/>
-          <a:lstStyle/>
-          <a:p>
-            <a:pPr algn="ctr"/>
-          </a:p>
-        </p:txBody>
-      </p:sp>
-      <p:sp>
-        <p:nvSpPr>
-          <p:cNvPr id="5" name="TextBox 4"/>
-          <p:cNvSpPr txBox="1"/>
-          <p:nvPr/>
-        </p:nvSpPr>
-        <p:spPr>
-          <a:xfrm>
-            <a:off x="10972800" y="6400800"/>
-            <a:ext cx="457200" cy="274320"/>
-          </a:xfrm>
-          <a:prstGeom prst="rect">
-            <a:avLst/>
-          </a:prstGeom>
-          <a:noFill/>
-        </p:spPr>
-        <p:txBody>
-          <a:bodyPr wrap="none">
-            <a:spAutoFit/>
-          </a:bodyPr>
-          <a:lstStyle/>
-          <a:p>
-            <a:pPr algn="r">
-              <a:defRPr sz="1200">
-                <a:solidFill>
-                  <a:srgbClr val="646464"/>
-                </a:solidFill>
-              </a:defRPr>
-            </a:pPr>
-            <a:r>
-              <a:t>7</a:t>
+              <a:t>7/15</a:t>
             </a:r>
           </a:p>
         </p:txBody>
@@ -4254,7 +5841,7 @@
     <p:bg>
       <p:bgPr>
         <a:solidFill>
-          <a:srgbClr val="FAF8F5"/>
+          <a:srgbClr val="FFF5EE"/>
         </a:solidFill>
         <a:effectLst/>
       </p:bgPr>
@@ -4284,12 +5871,13 @@
             <a:pPr algn="l">
               <a:defRPr sz="4400" b="1">
                 <a:solidFill>
-                  <a:srgbClr val="283C64"/>
+                  <a:srgbClr val="8B4513"/>
                 </a:solidFill>
+                <a:latin typeface="Calibri"/>
               </a:defRPr>
             </a:pPr>
             <a:r>
-              <a:t>References</a:t>
+              <a:t>Proving Non-Context-Freedom: L&lt;sub&gt;2&lt;/sub&gt; - Case 1</a:t>
             </a:r>
           </a:p>
         </p:txBody>
@@ -4316,92 +5904,136 @@
               <a:spcAft>
                 <a:spcPts val="1200"/>
               </a:spcAft>
-              <a:defRPr sz="2000">
+              <a:defRPr sz="2400" b="0">
+                <a:solidFill>
+                  <a:srgbClr val="3C3C3C"/>
+                </a:solidFill>
+                <a:latin typeface="Calibri"/>
+              </a:defRPr>
+            </a:pPr>
+            <a:r>
+              <a:t>We consider divisions w = uvxyz where v and y each contain only one type of symbol.  Unlike L&lt;sub&gt;1&lt;/sub&gt;, simply having one symbol type missing isn't enough for a contradiction.  Here, we subdivide Case 1 into three subcases: (a) v and y contain no a's; (b) v and y contain no b's; (c) v and y contain no c's. We'll analyze each subcase to find a contradiction.</a:t>
+            </a:r>
+          </a:p>
+        </p:txBody>
+      </p:sp>
+      <p:sp>
+        <p:nvSpPr>
+          <p:cNvPr id="4" name="Rectangle 3"/>
+          <p:cNvSpPr/>
+          <p:nvPr/>
+        </p:nvSpPr>
+        <p:spPr>
+          <a:xfrm>
+            <a:off x="182880" y="457200"/>
+            <a:ext cx="91440" cy="5943600"/>
+          </a:xfrm>
+          <a:prstGeom prst="rect">
+            <a:avLst/>
+          </a:prstGeom>
+          <a:solidFill>
+            <a:srgbClr val="D2691E"/>
+          </a:solidFill>
+          <a:ln>
+            <a:noFill/>
+          </a:ln>
+        </p:spPr>
+        <p:style>
+          <a:lnRef idx="1">
+            <a:schemeClr val="accent1"/>
+          </a:lnRef>
+          <a:fillRef idx="3">
+            <a:schemeClr val="accent1"/>
+          </a:fillRef>
+          <a:effectRef idx="2">
+            <a:schemeClr val="accent1"/>
+          </a:effectRef>
+          <a:fontRef idx="minor">
+            <a:schemeClr val="lt1"/>
+          </a:fontRef>
+        </p:style>
+        <p:txBody>
+          <a:bodyPr rtlCol="0" anchor="ctr"/>
+          <a:lstStyle/>
+          <a:p>
+            <a:pPr algn="ctr"/>
+          </a:p>
+        </p:txBody>
+      </p:sp>
+      <p:sp>
+        <p:nvSpPr>
+          <p:cNvPr id="5" name="Rectangle 4"/>
+          <p:cNvSpPr/>
+          <p:nvPr/>
+        </p:nvSpPr>
+        <p:spPr>
+          <a:xfrm>
+            <a:off x="182880" y="6400800"/>
+            <a:ext cx="11795760" cy="18288"/>
+          </a:xfrm>
+          <a:prstGeom prst="rect">
+            <a:avLst/>
+          </a:prstGeom>
+          <a:solidFill>
+            <a:srgbClr val="D2691E"/>
+          </a:solidFill>
+          <a:ln>
+            <a:noFill/>
+          </a:ln>
+        </p:spPr>
+        <p:style>
+          <a:lnRef idx="1">
+            <a:schemeClr val="accent1"/>
+          </a:lnRef>
+          <a:fillRef idx="3">
+            <a:schemeClr val="accent1"/>
+          </a:fillRef>
+          <a:effectRef idx="2">
+            <a:schemeClr val="accent1"/>
+          </a:effectRef>
+          <a:fontRef idx="minor">
+            <a:schemeClr val="lt1"/>
+          </a:fontRef>
+        </p:style>
+        <p:txBody>
+          <a:bodyPr rtlCol="0" anchor="ctr"/>
+          <a:lstStyle/>
+          <a:p>
+            <a:pPr algn="ctr"/>
+          </a:p>
+        </p:txBody>
+      </p:sp>
+      <p:sp>
+        <p:nvSpPr>
+          <p:cNvPr id="6" name="TextBox 5"/>
+          <p:cNvSpPr txBox="1"/>
+          <p:nvPr/>
+        </p:nvSpPr>
+        <p:spPr>
+          <a:xfrm>
+            <a:off x="11247120" y="6492240"/>
+            <a:ext cx="457200" cy="274320"/>
+          </a:xfrm>
+          <a:prstGeom prst="rect">
+            <a:avLst/>
+          </a:prstGeom>
+          <a:noFill/>
+        </p:spPr>
+        <p:txBody>
+          <a:bodyPr wrap="none">
+            <a:spAutoFit/>
+          </a:bodyPr>
+          <a:lstStyle/>
+          <a:p>
+            <a:pPr algn="r">
+              <a:defRPr sz="1200">
                 <a:solidFill>
                   <a:srgbClr val="3C3C3C"/>
                 </a:solidFill>
               </a:defRPr>
             </a:pPr>
             <a:r>
-              <a:t>This slide lists the sources used in preparing this lecture, providing proper attribution and allowing for further reading on the topics discussed.</a:t>
-            </a:r>
-          </a:p>
-        </p:txBody>
-      </p:sp>
-      <p:sp>
-        <p:nvSpPr>
-          <p:cNvPr id="4" name="Rectangle 3"/>
-          <p:cNvSpPr/>
-          <p:nvPr/>
-        </p:nvSpPr>
-        <p:spPr>
-          <a:xfrm>
-            <a:off x="457200" y="457200"/>
-            <a:ext cx="91440" cy="5943600"/>
-          </a:xfrm>
-          <a:prstGeom prst="rect">
-            <a:avLst/>
-          </a:prstGeom>
-          <a:solidFill>
-            <a:srgbClr val="6478C8"/>
-          </a:solidFill>
-          <a:ln>
-            <a:noFill/>
-          </a:ln>
-        </p:spPr>
-        <p:style>
-          <a:lnRef idx="1">
-            <a:schemeClr val="accent1"/>
-          </a:lnRef>
-          <a:fillRef idx="3">
-            <a:schemeClr val="accent1"/>
-          </a:fillRef>
-          <a:effectRef idx="2">
-            <a:schemeClr val="accent1"/>
-          </a:effectRef>
-          <a:fontRef idx="minor">
-            <a:schemeClr val="lt1"/>
-          </a:fontRef>
-        </p:style>
-        <p:txBody>
-          <a:bodyPr rtlCol="0" anchor="ctr"/>
-          <a:lstStyle/>
-          <a:p>
-            <a:pPr algn="ctr"/>
-          </a:p>
-        </p:txBody>
-      </p:sp>
-      <p:sp>
-        <p:nvSpPr>
-          <p:cNvPr id="5" name="TextBox 4"/>
-          <p:cNvSpPr txBox="1"/>
-          <p:nvPr/>
-        </p:nvSpPr>
-        <p:spPr>
-          <a:xfrm>
-            <a:off x="10972800" y="6400800"/>
-            <a:ext cx="457200" cy="274320"/>
-          </a:xfrm>
-          <a:prstGeom prst="rect">
-            <a:avLst/>
-          </a:prstGeom>
-          <a:noFill/>
-        </p:spPr>
-        <p:txBody>
-          <a:bodyPr wrap="none">
-            <a:spAutoFit/>
-          </a:bodyPr>
-          <a:lstStyle/>
-          <a:p>
-            <a:pPr algn="r">
-              <a:defRPr sz="1200">
-                <a:solidFill>
-                  <a:srgbClr val="646464"/>
-                </a:solidFill>
-              </a:defRPr>
-            </a:pPr>
-            <a:r>
-              <a:t>8</a:t>
+              <a:t>8/15</a:t>
             </a:r>
           </a:p>
         </p:txBody>
@@ -4420,7 +6052,7 @@
     <p:bg>
       <p:bgPr>
         <a:solidFill>
-          <a:srgbClr val="E6F0FF"/>
+          <a:srgbClr val="F0FFF0"/>
         </a:solidFill>
         <a:effectLst/>
       </p:bgPr>
@@ -4450,12 +6082,13 @@
             <a:pPr algn="l">
               <a:defRPr sz="4400" b="1">
                 <a:solidFill>
-                  <a:srgbClr val="283C64"/>
+                  <a:srgbClr val="228B22"/>
                 </a:solidFill>
+                <a:latin typeface="Calibri"/>
               </a:defRPr>
             </a:pPr>
             <a:r>
-              <a:t>Thank You!</a:t>
+              <a:t>Proving Non-Context-Freedom: L&lt;sub&gt;2&lt;/sub&gt; - Case 1(a) &amp; (b)</a:t>
             </a:r>
           </a:p>
         </p:txBody>
@@ -4482,92 +6115,136 @@
               <a:spcAft>
                 <a:spcPts val="1200"/>
               </a:spcAft>
-              <a:defRPr sz="2000">
+              <a:defRPr sz="2400" b="0">
+                <a:solidFill>
+                  <a:srgbClr val="3C3C3C"/>
+                </a:solidFill>
+                <a:latin typeface="Calibri"/>
+              </a:defRPr>
+            </a:pPr>
+            <a:r>
+              <a:t>(a) If v and y don't contain a's, pumping down (i = 0) reduces the number of b's or c's, violating the i ≤ j ≤ k condition. (b) If v and y don't contain b's, at least one of v or y must contain a's or c's.  Pumping will either increase a's relative to b's or c's relative to b's.  Both scenarios cause a violation of i ≤ j ≤ k, resulting in a contradiction.</a:t>
+            </a:r>
+          </a:p>
+        </p:txBody>
+      </p:sp>
+      <p:sp>
+        <p:nvSpPr>
+          <p:cNvPr id="4" name="Rectangle 3"/>
+          <p:cNvSpPr/>
+          <p:nvPr/>
+        </p:nvSpPr>
+        <p:spPr>
+          <a:xfrm>
+            <a:off x="182880" y="457200"/>
+            <a:ext cx="91440" cy="5943600"/>
+          </a:xfrm>
+          <a:prstGeom prst="rect">
+            <a:avLst/>
+          </a:prstGeom>
+          <a:solidFill>
+            <a:srgbClr val="3CB371"/>
+          </a:solidFill>
+          <a:ln>
+            <a:noFill/>
+          </a:ln>
+        </p:spPr>
+        <p:style>
+          <a:lnRef idx="1">
+            <a:schemeClr val="accent1"/>
+          </a:lnRef>
+          <a:fillRef idx="3">
+            <a:schemeClr val="accent1"/>
+          </a:fillRef>
+          <a:effectRef idx="2">
+            <a:schemeClr val="accent1"/>
+          </a:effectRef>
+          <a:fontRef idx="minor">
+            <a:schemeClr val="lt1"/>
+          </a:fontRef>
+        </p:style>
+        <p:txBody>
+          <a:bodyPr rtlCol="0" anchor="ctr"/>
+          <a:lstStyle/>
+          <a:p>
+            <a:pPr algn="ctr"/>
+          </a:p>
+        </p:txBody>
+      </p:sp>
+      <p:sp>
+        <p:nvSpPr>
+          <p:cNvPr id="5" name="Rectangle 4"/>
+          <p:cNvSpPr/>
+          <p:nvPr/>
+        </p:nvSpPr>
+        <p:spPr>
+          <a:xfrm>
+            <a:off x="182880" y="6400800"/>
+            <a:ext cx="11795760" cy="18288"/>
+          </a:xfrm>
+          <a:prstGeom prst="rect">
+            <a:avLst/>
+          </a:prstGeom>
+          <a:solidFill>
+            <a:srgbClr val="3CB371"/>
+          </a:solidFill>
+          <a:ln>
+            <a:noFill/>
+          </a:ln>
+        </p:spPr>
+        <p:style>
+          <a:lnRef idx="1">
+            <a:schemeClr val="accent1"/>
+          </a:lnRef>
+          <a:fillRef idx="3">
+            <a:schemeClr val="accent1"/>
+          </a:fillRef>
+          <a:effectRef idx="2">
+            <a:schemeClr val="accent1"/>
+          </a:effectRef>
+          <a:fontRef idx="minor">
+            <a:schemeClr val="lt1"/>
+          </a:fontRef>
+        </p:style>
+        <p:txBody>
+          <a:bodyPr rtlCol="0" anchor="ctr"/>
+          <a:lstStyle/>
+          <a:p>
+            <a:pPr algn="ctr"/>
+          </a:p>
+        </p:txBody>
+      </p:sp>
+      <p:sp>
+        <p:nvSpPr>
+          <p:cNvPr id="6" name="TextBox 5"/>
+          <p:cNvSpPr txBox="1"/>
+          <p:nvPr/>
+        </p:nvSpPr>
+        <p:spPr>
+          <a:xfrm>
+            <a:off x="11247120" y="6492240"/>
+            <a:ext cx="457200" cy="274320"/>
+          </a:xfrm>
+          <a:prstGeom prst="rect">
+            <a:avLst/>
+          </a:prstGeom>
+          <a:noFill/>
+        </p:spPr>
+        <p:txBody>
+          <a:bodyPr wrap="none">
+            <a:spAutoFit/>
+          </a:bodyPr>
+          <a:lstStyle/>
+          <a:p>
+            <a:pPr algn="r">
+              <a:defRPr sz="1200">
                 <a:solidFill>
                   <a:srgbClr val="3C3C3C"/>
                 </a:solidFill>
               </a:defRPr>
             </a:pPr>
             <a:r>
-              <a:t>This is a concluding slide expressing gratitude to the audience and acknowledging any contributors to the lecture material.</a:t>
-            </a:r>
-          </a:p>
-        </p:txBody>
-      </p:sp>
-      <p:sp>
-        <p:nvSpPr>
-          <p:cNvPr id="4" name="Rectangle 3"/>
-          <p:cNvSpPr/>
-          <p:nvPr/>
-        </p:nvSpPr>
-        <p:spPr>
-          <a:xfrm>
-            <a:off x="457200" y="457200"/>
-            <a:ext cx="91440" cy="5943600"/>
-          </a:xfrm>
-          <a:prstGeom prst="rect">
-            <a:avLst/>
-          </a:prstGeom>
-          <a:solidFill>
-            <a:srgbClr val="6478C8"/>
-          </a:solidFill>
-          <a:ln>
-            <a:noFill/>
-          </a:ln>
-        </p:spPr>
-        <p:style>
-          <a:lnRef idx="1">
-            <a:schemeClr val="accent1"/>
-          </a:lnRef>
-          <a:fillRef idx="3">
-            <a:schemeClr val="accent1"/>
-          </a:fillRef>
-          <a:effectRef idx="2">
-            <a:schemeClr val="accent1"/>
-          </a:effectRef>
-          <a:fontRef idx="minor">
-            <a:schemeClr val="lt1"/>
-          </a:fontRef>
-        </p:style>
-        <p:txBody>
-          <a:bodyPr rtlCol="0" anchor="ctr"/>
-          <a:lstStyle/>
-          <a:p>
-            <a:pPr algn="ctr"/>
-          </a:p>
-        </p:txBody>
-      </p:sp>
-      <p:sp>
-        <p:nvSpPr>
-          <p:cNvPr id="5" name="TextBox 4"/>
-          <p:cNvSpPr txBox="1"/>
-          <p:nvPr/>
-        </p:nvSpPr>
-        <p:spPr>
-          <a:xfrm>
-            <a:off x="10972800" y="6400800"/>
-            <a:ext cx="457200" cy="274320"/>
-          </a:xfrm>
-          <a:prstGeom prst="rect">
-            <a:avLst/>
-          </a:prstGeom>
-          <a:noFill/>
-        </p:spPr>
-        <p:txBody>
-          <a:bodyPr wrap="none">
-            <a:spAutoFit/>
-          </a:bodyPr>
-          <a:lstStyle/>
-          <a:p>
-            <a:pPr algn="r">
-              <a:defRPr sz="1200">
-                <a:solidFill>
-                  <a:srgbClr val="646464"/>
-                </a:solidFill>
-              </a:defRPr>
-            </a:pPr>
-            <a:r>
-              <a:t>9</a:t>
+              <a:t>9/15</a:t>
             </a:r>
           </a:p>
         </p:txBody>

--- a/Styled_Slides.pptx
+++ b/Styled_Slides.pptx
@@ -14,12 +14,6 @@
     <p:sldId id="262" r:id="rId13"/>
     <p:sldId id="263" r:id="rId14"/>
     <p:sldId id="264" r:id="rId15"/>
-    <p:sldId id="265" r:id="rId16"/>
-    <p:sldId id="266" r:id="rId17"/>
-    <p:sldId id="267" r:id="rId18"/>
-    <p:sldId id="268" r:id="rId19"/>
-    <p:sldId id="269" r:id="rId20"/>
-    <p:sldId id="270" r:id="rId21"/>
   </p:sldIdLst>
   <p:sldSz cx="12191695" cy="6858000" type="screen4x3"/>
   <p:notesSz cx="6858000" cy="9144000"/>
@@ -3134,7 +3128,7 @@
               </a:defRPr>
             </a:pPr>
             <a:r>
-              <a:t>Proving Non-Context-Freedom: Introduction</a:t>
+              <a:t>Introduction: Nondeterminism by Analogy</a:t>
             </a:r>
           </a:p>
         </p:txBody>
@@ -3169,7 +3163,7 @@
               </a:defRPr>
             </a:pPr>
             <a:r>
-              <a:t>This lecture focuses on proving that certain languages are not context-free.  We'll use the Pumping Lemma for context-free languages, a powerful tool that allows us to demonstrate the limitations of context-free grammars.  The lemma essentially states that in a context-free language, sufficiently long strings can be "pumped" – meaning a portion of the string can be repeated without leaving the language.  By showing that this property fails for a given language, we prove it's non-context-free. This is crucial in understanding the expressive power of different formal language classes.</a:t>
+              <a:t>This lecture explores the concept of nondeterminism, a crucial idea in computer science and other fields.  We'll understand it not through abstract definitions, but by examining relatable analogies.  These analogies will show how nondeterminism deals with multiple possibilities simultaneously, rather than following a single predetermined path.  We will examine navigating a maze, internet packet routing, and chess as examples to illustrate different facets of this concept.  The lecture concludes by discussing the implications of nondeterminism in the real world and theoretical computer science.</a:t>
             </a:r>
           </a:p>
         </p:txBody>
@@ -3290,7 +3284,7 @@
               </a:defRPr>
             </a:pPr>
             <a:r>
-              <a:t>1/15</a:t>
+              <a:t>1/9</a:t>
             </a:r>
           </a:p>
         </p:txBody>
@@ -3303,7 +3297,429 @@
 </p:sld>
 </file>
 
-<file path=ppt/slides/slide10.xml><?xml version="1.0" encoding="utf-8"?>
+<file path=ppt/slides/slide2.xml><?xml version="1.0" encoding="utf-8"?>
+<p:sld xmlns:a="http://schemas.openxmlformats.org/drawingml/2006/main" xmlns:p="http://schemas.openxmlformats.org/presentationml/2006/main" xmlns:r="http://schemas.openxmlformats.org/officeDocument/2006/relationships">
+  <p:cSld>
+    <p:bg>
+      <p:bgPr>
+        <a:solidFill>
+          <a:srgbClr val="FFF5EE"/>
+        </a:solidFill>
+        <a:effectLst/>
+      </p:bgPr>
+    </p:bg>
+    <p:spTree>
+      <p:nvGrpSpPr>
+        <p:cNvPr id="1" name=""/>
+        <p:cNvGrpSpPr/>
+        <p:nvPr/>
+      </p:nvGrpSpPr>
+      <p:grpSpPr/>
+      <p:sp>
+        <p:nvSpPr>
+          <p:cNvPr id="2" name="Title 1"/>
+          <p:cNvSpPr>
+            <a:spLocks noGrp="1"/>
+          </p:cNvSpPr>
+          <p:nvPr>
+            <p:ph type="title"/>
+          </p:nvPr>
+        </p:nvSpPr>
+        <p:spPr/>
+        <p:txBody>
+          <a:bodyPr/>
+          <a:lstStyle/>
+          <a:p>
+            <a:pPr algn="l">
+              <a:defRPr sz="4400" b="1">
+                <a:solidFill>
+                  <a:srgbClr val="8B4513"/>
+                </a:solidFill>
+                <a:latin typeface="Calibri"/>
+              </a:defRPr>
+            </a:pPr>
+            <a:r>
+              <a:t>Navigating a Maze: Determinism</a:t>
+            </a:r>
+          </a:p>
+        </p:txBody>
+      </p:sp>
+      <p:sp>
+        <p:nvSpPr>
+          <p:cNvPr id="3" name="Content Placeholder 2"/>
+          <p:cNvSpPr>
+            <a:spLocks noGrp="1"/>
+          </p:cNvSpPr>
+          <p:nvPr>
+            <p:ph idx="1"/>
+          </p:nvPr>
+        </p:nvSpPr>
+        <p:spPr/>
+        <p:txBody>
+          <a:bodyPr/>
+          <a:lstStyle/>
+          <a:p>
+            <a:pPr algn="l">
+              <a:spcBef>
+                <a:spcPts val="1200"/>
+              </a:spcBef>
+              <a:spcAft>
+                <a:spcPts val="1200"/>
+              </a:spcAft>
+              <a:defRPr sz="2400" b="0">
+                <a:solidFill>
+                  <a:srgbClr val="3C3C3C"/>
+                </a:solidFill>
+                <a:latin typeface="Calibri"/>
+              </a:defRPr>
+            </a:pPr>
+            <a:r>
+              <a:t>Let's consider a deterministic approach to navigating a maze.  Determinism means following a single, pre-defined rule to achieve a goal.  A simple example is a "left-most" strategy: always choose the leftmost path at every junction.  This strategy guarantees success in some mazes (like Maze 2 in the slides), and complete failure in others (like Maze 1).  The key is that a deterministic strategy provides a guaranteed outcome (success or failure) for every instance given the strategy, making the outcome certain.</a:t>
+            </a:r>
+          </a:p>
+        </p:txBody>
+      </p:sp>
+      <p:sp>
+        <p:nvSpPr>
+          <p:cNvPr id="4" name="Rectangle 3"/>
+          <p:cNvSpPr/>
+          <p:nvPr/>
+        </p:nvSpPr>
+        <p:spPr>
+          <a:xfrm>
+            <a:off x="182880" y="457200"/>
+            <a:ext cx="91440" cy="5943600"/>
+          </a:xfrm>
+          <a:prstGeom prst="rect">
+            <a:avLst/>
+          </a:prstGeom>
+          <a:solidFill>
+            <a:srgbClr val="D2691E"/>
+          </a:solidFill>
+          <a:ln>
+            <a:noFill/>
+          </a:ln>
+        </p:spPr>
+        <p:style>
+          <a:lnRef idx="1">
+            <a:schemeClr val="accent1"/>
+          </a:lnRef>
+          <a:fillRef idx="3">
+            <a:schemeClr val="accent1"/>
+          </a:fillRef>
+          <a:effectRef idx="2">
+            <a:schemeClr val="accent1"/>
+          </a:effectRef>
+          <a:fontRef idx="minor">
+            <a:schemeClr val="lt1"/>
+          </a:fontRef>
+        </p:style>
+        <p:txBody>
+          <a:bodyPr rtlCol="0" anchor="ctr"/>
+          <a:lstStyle/>
+          <a:p>
+            <a:pPr algn="ctr"/>
+          </a:p>
+        </p:txBody>
+      </p:sp>
+      <p:sp>
+        <p:nvSpPr>
+          <p:cNvPr id="5" name="Rectangle 4"/>
+          <p:cNvSpPr/>
+          <p:nvPr/>
+        </p:nvSpPr>
+        <p:spPr>
+          <a:xfrm>
+            <a:off x="182880" y="6400800"/>
+            <a:ext cx="11795760" cy="18288"/>
+          </a:xfrm>
+          <a:prstGeom prst="rect">
+            <a:avLst/>
+          </a:prstGeom>
+          <a:solidFill>
+            <a:srgbClr val="D2691E"/>
+          </a:solidFill>
+          <a:ln>
+            <a:noFill/>
+          </a:ln>
+        </p:spPr>
+        <p:style>
+          <a:lnRef idx="1">
+            <a:schemeClr val="accent1"/>
+          </a:lnRef>
+          <a:fillRef idx="3">
+            <a:schemeClr val="accent1"/>
+          </a:fillRef>
+          <a:effectRef idx="2">
+            <a:schemeClr val="accent1"/>
+          </a:effectRef>
+          <a:fontRef idx="minor">
+            <a:schemeClr val="lt1"/>
+          </a:fontRef>
+        </p:style>
+        <p:txBody>
+          <a:bodyPr rtlCol="0" anchor="ctr"/>
+          <a:lstStyle/>
+          <a:p>
+            <a:pPr algn="ctr"/>
+          </a:p>
+        </p:txBody>
+      </p:sp>
+      <p:sp>
+        <p:nvSpPr>
+          <p:cNvPr id="6" name="TextBox 5"/>
+          <p:cNvSpPr txBox="1"/>
+          <p:nvPr/>
+        </p:nvSpPr>
+        <p:spPr>
+          <a:xfrm>
+            <a:off x="11247120" y="6492240"/>
+            <a:ext cx="457200" cy="274320"/>
+          </a:xfrm>
+          <a:prstGeom prst="rect">
+            <a:avLst/>
+          </a:prstGeom>
+          <a:noFill/>
+        </p:spPr>
+        <p:txBody>
+          <a:bodyPr wrap="none">
+            <a:spAutoFit/>
+          </a:bodyPr>
+          <a:lstStyle/>
+          <a:p>
+            <a:pPr algn="r">
+              <a:defRPr sz="1200">
+                <a:solidFill>
+                  <a:srgbClr val="3C3C3C"/>
+                </a:solidFill>
+              </a:defRPr>
+            </a:pPr>
+            <a:r>
+              <a:t>2/9</a:t>
+            </a:r>
+          </a:p>
+        </p:txBody>
+      </p:sp>
+    </p:spTree>
+  </p:cSld>
+  <p:clrMapOvr>
+    <a:masterClrMapping/>
+  </p:clrMapOvr>
+</p:sld>
+</file>
+
+<file path=ppt/slides/slide3.xml><?xml version="1.0" encoding="utf-8"?>
+<p:sld xmlns:a="http://schemas.openxmlformats.org/drawingml/2006/main" xmlns:p="http://schemas.openxmlformats.org/presentationml/2006/main" xmlns:r="http://schemas.openxmlformats.org/officeDocument/2006/relationships">
+  <p:cSld>
+    <p:bg>
+      <p:bgPr>
+        <a:solidFill>
+          <a:srgbClr val="F0FFF0"/>
+        </a:solidFill>
+        <a:effectLst/>
+      </p:bgPr>
+    </p:bg>
+    <p:spTree>
+      <p:nvGrpSpPr>
+        <p:cNvPr id="1" name=""/>
+        <p:cNvGrpSpPr/>
+        <p:nvPr/>
+      </p:nvGrpSpPr>
+      <p:grpSpPr/>
+      <p:sp>
+        <p:nvSpPr>
+          <p:cNvPr id="2" name="Title 1"/>
+          <p:cNvSpPr>
+            <a:spLocks noGrp="1"/>
+          </p:cNvSpPr>
+          <p:nvPr>
+            <p:ph type="title"/>
+          </p:nvPr>
+        </p:nvSpPr>
+        <p:spPr/>
+        <p:txBody>
+          <a:bodyPr/>
+          <a:lstStyle/>
+          <a:p>
+            <a:pPr algn="l">
+              <a:defRPr sz="4400" b="1">
+                <a:solidFill>
+                  <a:srgbClr val="228B22"/>
+                </a:solidFill>
+                <a:latin typeface="Calibri"/>
+              </a:defRPr>
+            </a:pPr>
+            <a:r>
+              <a:t>Navigating a Maze: Nondeterminism</a:t>
+            </a:r>
+          </a:p>
+        </p:txBody>
+      </p:sp>
+      <p:sp>
+        <p:nvSpPr>
+          <p:cNvPr id="3" name="Content Placeholder 2"/>
+          <p:cNvSpPr>
+            <a:spLocks noGrp="1"/>
+          </p:cNvSpPr>
+          <p:nvPr>
+            <p:ph idx="1"/>
+          </p:nvPr>
+        </p:nvSpPr>
+        <p:spPr/>
+        <p:txBody>
+          <a:bodyPr/>
+          <a:lstStyle/>
+          <a:p>
+            <a:pPr algn="l">
+              <a:spcBef>
+                <a:spcPts val="1200"/>
+              </a:spcBef>
+              <a:spcAft>
+                <a:spcPts val="1200"/>
+              </a:spcAft>
+              <a:defRPr sz="2400" b="0">
+                <a:solidFill>
+                  <a:srgbClr val="3C3C3C"/>
+                </a:solidFill>
+                <a:latin typeface="Calibri"/>
+              </a:defRPr>
+            </a:pPr>
+            <a:r>
+              <a:t>In contrast to determinism, nondeterminism considers all possible paths simultaneously. When solving a maze nondeterministically, we imagine exploring every path concurrently to determine if a solution exists. In Maze 1 (unsolvable), all paths would be explored, and the nondeterministic approach would correctly identify the lack of a solution.  In Maze 2, at least one solution would be found. Nondeterminism describes the maze's inherent solvability rather than the method used to solve it. It's about the potential for solutions, not a guaranteed path.</a:t>
+            </a:r>
+          </a:p>
+        </p:txBody>
+      </p:sp>
+      <p:sp>
+        <p:nvSpPr>
+          <p:cNvPr id="4" name="Rectangle 3"/>
+          <p:cNvSpPr/>
+          <p:nvPr/>
+        </p:nvSpPr>
+        <p:spPr>
+          <a:xfrm>
+            <a:off x="182880" y="457200"/>
+            <a:ext cx="91440" cy="5943600"/>
+          </a:xfrm>
+          <a:prstGeom prst="rect">
+            <a:avLst/>
+          </a:prstGeom>
+          <a:solidFill>
+            <a:srgbClr val="3CB371"/>
+          </a:solidFill>
+          <a:ln>
+            <a:noFill/>
+          </a:ln>
+        </p:spPr>
+        <p:style>
+          <a:lnRef idx="1">
+            <a:schemeClr val="accent1"/>
+          </a:lnRef>
+          <a:fillRef idx="3">
+            <a:schemeClr val="accent1"/>
+          </a:fillRef>
+          <a:effectRef idx="2">
+            <a:schemeClr val="accent1"/>
+          </a:effectRef>
+          <a:fontRef idx="minor">
+            <a:schemeClr val="lt1"/>
+          </a:fontRef>
+        </p:style>
+        <p:txBody>
+          <a:bodyPr rtlCol="0" anchor="ctr"/>
+          <a:lstStyle/>
+          <a:p>
+            <a:pPr algn="ctr"/>
+          </a:p>
+        </p:txBody>
+      </p:sp>
+      <p:sp>
+        <p:nvSpPr>
+          <p:cNvPr id="5" name="Rectangle 4"/>
+          <p:cNvSpPr/>
+          <p:nvPr/>
+        </p:nvSpPr>
+        <p:spPr>
+          <a:xfrm>
+            <a:off x="182880" y="6400800"/>
+            <a:ext cx="11795760" cy="18288"/>
+          </a:xfrm>
+          <a:prstGeom prst="rect">
+            <a:avLst/>
+          </a:prstGeom>
+          <a:solidFill>
+            <a:srgbClr val="3CB371"/>
+          </a:solidFill>
+          <a:ln>
+            <a:noFill/>
+          </a:ln>
+        </p:spPr>
+        <p:style>
+          <a:lnRef idx="1">
+            <a:schemeClr val="accent1"/>
+          </a:lnRef>
+          <a:fillRef idx="3">
+            <a:schemeClr val="accent1"/>
+          </a:fillRef>
+          <a:effectRef idx="2">
+            <a:schemeClr val="accent1"/>
+          </a:effectRef>
+          <a:fontRef idx="minor">
+            <a:schemeClr val="lt1"/>
+          </a:fontRef>
+        </p:style>
+        <p:txBody>
+          <a:bodyPr rtlCol="0" anchor="ctr"/>
+          <a:lstStyle/>
+          <a:p>
+            <a:pPr algn="ctr"/>
+          </a:p>
+        </p:txBody>
+      </p:sp>
+      <p:sp>
+        <p:nvSpPr>
+          <p:cNvPr id="6" name="TextBox 5"/>
+          <p:cNvSpPr txBox="1"/>
+          <p:nvPr/>
+        </p:nvSpPr>
+        <p:spPr>
+          <a:xfrm>
+            <a:off x="11247120" y="6492240"/>
+            <a:ext cx="457200" cy="274320"/>
+          </a:xfrm>
+          <a:prstGeom prst="rect">
+            <a:avLst/>
+          </a:prstGeom>
+          <a:noFill/>
+        </p:spPr>
+        <p:txBody>
+          <a:bodyPr wrap="none">
+            <a:spAutoFit/>
+          </a:bodyPr>
+          <a:lstStyle/>
+          <a:p>
+            <a:pPr algn="r">
+              <a:defRPr sz="1200">
+                <a:solidFill>
+                  <a:srgbClr val="3C3C3C"/>
+                </a:solidFill>
+              </a:defRPr>
+            </a:pPr>
+            <a:r>
+              <a:t>3/9</a:t>
+            </a:r>
+          </a:p>
+        </p:txBody>
+      </p:sp>
+    </p:spTree>
+  </p:cSld>
+  <p:clrMapOvr>
+    <a:masterClrMapping/>
+  </p:clrMapOvr>
+</p:sld>
+</file>
+
+<file path=ppt/slides/slide4.xml><?xml version="1.0" encoding="utf-8"?>
 <p:sld xmlns:a="http://schemas.openxmlformats.org/drawingml/2006/main" xmlns:p="http://schemas.openxmlformats.org/presentationml/2006/main" xmlns:r="http://schemas.openxmlformats.org/officeDocument/2006/relationships">
   <p:cSld>
     <p:bg>
@@ -3345,7 +3761,7 @@
               </a:defRPr>
             </a:pPr>
             <a:r>
-              <a:t>Proving Non-Context-Freedom: L&lt;sub&gt;2&lt;/sub&gt; - Case 1(c)</a:t>
+              <a:t>Routing Packets on the Internet: A Nondeterministic System</a:t>
             </a:r>
           </a:p>
         </p:txBody>
@@ -3380,7 +3796,7 @@
               </a:defRPr>
             </a:pPr>
             <a:r>
-              <a:t>(c) If v and y don't contain c's, pumping up (i &gt; 1) will increase the number of a's or b's, potentially breaking the i ≤ j ≤ k condition.  Therefore, this subcase also leads to a contradiction.  Since all three subcases of Case 1 yield contradictions, Case 1 itself is proven.</a:t>
+              <a:t>Consider sending a data packet from your computer to a website's server. The packet's journey isn't a single, predetermined path.  The internet's routing protocols explore multiple routes concurrently, choosing the fastest or most reliable available at each step. This is a naturally nondeterministic system because we can't predict which specific route a packet will take in advance.  The system must be prepared for many possibilities and chooses the best amongst them dynamically.</a:t>
             </a:r>
           </a:p>
         </p:txBody>
@@ -3501,7 +3917,7 @@
               </a:defRPr>
             </a:pPr>
             <a:r>
-              <a:t>10/15</a:t>
+              <a:t>4/9</a:t>
             </a:r>
           </a:p>
         </p:txBody>
@@ -3514,7 +3930,7 @@
 </p:sld>
 </file>
 
-<file path=ppt/slides/slide11.xml><?xml version="1.0" encoding="utf-8"?>
+<file path=ppt/slides/slide5.xml><?xml version="1.0" encoding="utf-8"?>
 <p:sld xmlns:a="http://schemas.openxmlformats.org/drawingml/2006/main" xmlns:p="http://schemas.openxmlformats.org/presentationml/2006/main" xmlns:r="http://schemas.openxmlformats.org/officeDocument/2006/relationships">
   <p:cSld>
     <p:bg>
@@ -3556,7 +3972,7 @@
               </a:defRPr>
             </a:pPr>
             <a:r>
-              <a:t>Proving Non-Context-Freedom: L&lt;sub&gt;2&lt;/sub&gt; - Case 2</a:t>
+              <a:t>Planning Moves in Chess: Nondeterministic Strategy</a:t>
             </a:r>
           </a:p>
         </p:txBody>
@@ -3591,7 +4007,7 @@
               </a:defRPr>
             </a:pPr>
             <a:r>
-              <a:t>Case 2 considers v or y containing multiple symbol types. Pumping will disrupt the order of a's, b's, and c's, violating the i ≤ j ≤ k constraint, leading to a contradiction.</a:t>
+              <a:t>In chess, planning your moves requires considering your opponent's potential responses.  A nondeterministic approach would involve creating a game tree – a tree-like structure exploring all possible moves and counter-moves. Although we can't know with certainty what the opponent will do, nondeterminism helps model this uncertainty, allowing you to plan for many future scenarios and choose the best possible move based on a range of potential outcomes.   This doesn't necessarily mean that we consider every possible game; rather, we consider possible responses that are deemed likely or relevant.</a:t>
             </a:r>
           </a:p>
         </p:txBody>
@@ -3712,7 +4128,7 @@
               </a:defRPr>
             </a:pPr>
             <a:r>
-              <a:t>11/15</a:t>
+              <a:t>5/9</a:t>
             </a:r>
           </a:p>
         </p:txBody>
@@ -3725,7 +4141,7 @@
 </p:sld>
 </file>
 
-<file path=ppt/slides/slide12.xml><?xml version="1.0" encoding="utf-8"?>
+<file path=ppt/slides/slide6.xml><?xml version="1.0" encoding="utf-8"?>
 <p:sld xmlns:a="http://schemas.openxmlformats.org/drawingml/2006/main" xmlns:p="http://schemas.openxmlformats.org/presentationml/2006/main" xmlns:r="http://schemas.openxmlformats.org/officeDocument/2006/relationships">
   <p:cSld>
     <p:bg>
@@ -3767,7 +4183,7 @@
               </a:defRPr>
             </a:pPr>
             <a:r>
-              <a:t>Proving Non-Context-Freedom: L&lt;sub&gt;3&lt;/sub&gt; - First Attempt</a:t>
+              <a:t>Why Nondeterminism Matters</a:t>
             </a:r>
           </a:p>
         </p:txBody>
@@ -3802,7 +4218,7 @@
               </a:defRPr>
             </a:pPr>
             <a:r>
-              <a:t>Let's tackle L&lt;sub&gt;3&lt;/sub&gt; = {ss | s ∈ {0, 1}}.  This example demonstrates that choosing the correct string for the Pumping Lemma is crucial. Suppose we initially let s = 0&lt;sup&gt;p&lt;/sup&gt;1&lt;sup&gt;p&lt;/sup&gt; and w = ss. This string can be pumped without violating the condition of being in L3, thus not immediately leading to a contradiction. We need to revise our approach.</a:t>
+              <a:t>Nondeterminism is powerful in theoretical computer science for two main reasons: (1) Power:  Allowing multiple parallel choices can overcome limitations of deterministic algorithms, potentially solving problems more efficiently. (2) Uncertainty: Modeling the unknown by considering all possibilities allows for strong guarantees about system correctness, security, and performance – even in uncertain environments.  The question of whether true nondeterminism exists in the real world is philosophically complex and beyond the scope of this lecture, but it is extremely valuable as a modeling tool.</a:t>
             </a:r>
           </a:p>
         </p:txBody>
@@ -3923,7 +4339,7 @@
               </a:defRPr>
             </a:pPr>
             <a:r>
-              <a:t>12/15</a:t>
+              <a:t>6/9</a:t>
             </a:r>
           </a:p>
         </p:txBody>
@@ -3936,7 +4352,7 @@
 </p:sld>
 </file>
 
-<file path=ppt/slides/slide13.xml><?xml version="1.0" encoding="utf-8"?>
+<file path=ppt/slides/slide7.xml><?xml version="1.0" encoding="utf-8"?>
 <p:sld xmlns:a="http://schemas.openxmlformats.org/drawingml/2006/main" xmlns:p="http://schemas.openxmlformats.org/presentationml/2006/main" xmlns:r="http://schemas.openxmlformats.org/officeDocument/2006/relationships">
   <p:cSld>
     <p:bg>
@@ -3978,7 +4394,7 @@
               </a:defRPr>
             </a:pPr>
             <a:r>
-              <a:t>Proving Non-Context-Freedom: L&lt;sub&gt;3&lt;/sub&gt; - Corrected Proof</a:t>
+              <a:t>Summary</a:t>
             </a:r>
           </a:p>
         </p:txBody>
@@ -4013,7 +4429,7 @@
               </a:defRPr>
             </a:pPr>
             <a:r>
-              <a:t>The previous attempt failed because we could pump the string.  Let's revisit this.  Consider any division w = uvxyz where |vy| &gt; 0 and |vxy| ≤ p.  If vxy is contained in the first half of w, then uv&lt;sup&gt;i&lt;/sup&gt;xy&lt;sup&gt;i&lt;/sup&gt;z will start with a 0 but have a 1 in its second half (this is true because the length of vxy is less than or equal to p).  Similarly, if vxy is in the second half, the opposite situation arises.</a:t>
+              <a:t>This lecture introduced the concept of nondeterminism using three tangible analogies: navigating a maze, internet packet routing, and chess move planning.  We explored how nondeterminism handles multiple possibilities simultaneously, providing insights into both potential solutions and inherent system properties.  We then discussed the significance of nondeterminism in theoretical computer science for both its power and its ability to handle uncertainty.</a:t>
             </a:r>
           </a:p>
         </p:txBody>
@@ -4134,7 +4550,7 @@
               </a:defRPr>
             </a:pPr>
             <a:r>
-              <a:t>13/15</a:t>
+              <a:t>7/9</a:t>
             </a:r>
           </a:p>
         </p:txBody>
@@ -4147,7 +4563,7 @@
 </p:sld>
 </file>
 
-<file path=ppt/slides/slide14.xml><?xml version="1.0" encoding="utf-8"?>
+<file path=ppt/slides/slide8.xml><?xml version="1.0" encoding="utf-8"?>
 <p:sld xmlns:a="http://schemas.openxmlformats.org/drawingml/2006/main" xmlns:p="http://schemas.openxmlformats.org/presentationml/2006/main" xmlns:r="http://schemas.openxmlformats.org/officeDocument/2006/relationships">
   <p:cSld>
     <p:bg>
@@ -4189,7 +4605,7 @@
               </a:defRPr>
             </a:pPr>
             <a:r>
-              <a:t>Proving Non-Context-Freedom: L&lt;sub&gt;3&lt;/sub&gt; - Final Argument</a:t>
+              <a:t>References</a:t>
             </a:r>
           </a:p>
         </p:txBody>
@@ -4224,7 +4640,7 @@
               </a:defRPr>
             </a:pPr>
             <a:r>
-              <a:t>The only remaining possibility is that vxy straddles the midpoint of w. Because |vxy| ≤ p, v and y must be in the middle part of w.  Pumping down (i = 0) will create a string that violates the ss condition. Thus, no matter which division we choose, we always arrive at a contradiction. Consequently, L&lt;sub&gt;3&lt;/sub&gt; is not context-free.</a:t>
+              <a:t>This slide provides references for further reading on the concepts discussed in the lecture, focusing on the chess example.</a:t>
             </a:r>
           </a:p>
         </p:txBody>
@@ -4345,7 +4761,7 @@
               </a:defRPr>
             </a:pPr>
             <a:r>
-              <a:t>14/15</a:t>
+              <a:t>8/9</a:t>
             </a:r>
           </a:p>
         </p:txBody>
@@ -4358,7 +4774,7 @@
 </p:sld>
 </file>
 
-<file path=ppt/slides/slide15.xml><?xml version="1.0" encoding="utf-8"?>
+<file path=ppt/slides/slide9.xml><?xml version="1.0" encoding="utf-8"?>
 <p:sld xmlns:a="http://schemas.openxmlformats.org/drawingml/2006/main" xmlns:p="http://schemas.openxmlformats.org/presentationml/2006/main" xmlns:r="http://schemas.openxmlformats.org/officeDocument/2006/relationships">
   <p:cSld>
     <p:bg>
@@ -4400,7 +4816,7 @@
               </a:defRPr>
             </a:pPr>
             <a:r>
-              <a:t>Summary</a:t>
+              <a:t>Thank You!</a:t>
             </a:r>
           </a:p>
         </p:txBody>
@@ -4435,7 +4851,7 @@
               </a:defRPr>
             </a:pPr>
             <a:r>
-              <a:t>In this lecture, we successfully used the Pumping Lemma to prove that L&lt;sub&gt;1&lt;/sub&gt;, L&lt;sub&gt;2&lt;/sub&gt;, and L&lt;sub&gt;3&lt;/sub&gt; are non-context-free.  This demonstrates the power of the lemma in analyzing the limitations of context-free languages.  Remember that choosing the right string and carefully analyzing the possible pump positions are critical for successful application of this method.</a:t>
+              <a:t>This is the concluding slide expressing gratitude to the audience and acknowledging those who contributed to the lecture content.</a:t>
             </a:r>
           </a:p>
         </p:txBody>
@@ -4556,1695 +4972,7 @@
               </a:defRPr>
             </a:pPr>
             <a:r>
-              <a:t>15/15</a:t>
-            </a:r>
-          </a:p>
-        </p:txBody>
-      </p:sp>
-    </p:spTree>
-  </p:cSld>
-  <p:clrMapOvr>
-    <a:masterClrMapping/>
-  </p:clrMapOvr>
-</p:sld>
-</file>
-
-<file path=ppt/slides/slide2.xml><?xml version="1.0" encoding="utf-8"?>
-<p:sld xmlns:a="http://schemas.openxmlformats.org/drawingml/2006/main" xmlns:p="http://schemas.openxmlformats.org/presentationml/2006/main" xmlns:r="http://schemas.openxmlformats.org/officeDocument/2006/relationships">
-  <p:cSld>
-    <p:bg>
-      <p:bgPr>
-        <a:solidFill>
-          <a:srgbClr val="FFF5EE"/>
-        </a:solidFill>
-        <a:effectLst/>
-      </p:bgPr>
-    </p:bg>
-    <p:spTree>
-      <p:nvGrpSpPr>
-        <p:cNvPr id="1" name=""/>
-        <p:cNvGrpSpPr/>
-        <p:nvPr/>
-      </p:nvGrpSpPr>
-      <p:grpSpPr/>
-      <p:sp>
-        <p:nvSpPr>
-          <p:cNvPr id="2" name="Title 1"/>
-          <p:cNvSpPr>
-            <a:spLocks noGrp="1"/>
-          </p:cNvSpPr>
-          <p:nvPr>
-            <p:ph type="title"/>
-          </p:nvPr>
-        </p:nvSpPr>
-        <p:spPr/>
-        <p:txBody>
-          <a:bodyPr/>
-          <a:lstStyle/>
-          <a:p>
-            <a:pPr algn="l">
-              <a:defRPr sz="4400" b="1">
-                <a:solidFill>
-                  <a:srgbClr val="8B4513"/>
-                </a:solidFill>
-                <a:latin typeface="Calibri"/>
-              </a:defRPr>
-            </a:pPr>
-            <a:r>
-              <a:t>Outline and Resources</a:t>
-            </a:r>
-          </a:p>
-        </p:txBody>
-      </p:sp>
-      <p:sp>
-        <p:nvSpPr>
-          <p:cNvPr id="3" name="Content Placeholder 2"/>
-          <p:cNvSpPr>
-            <a:spLocks noGrp="1"/>
-          </p:cNvSpPr>
-          <p:nvPr>
-            <p:ph idx="1"/>
-          </p:nvPr>
-        </p:nvSpPr>
-        <p:spPr/>
-        <p:txBody>
-          <a:bodyPr/>
-          <a:lstStyle/>
-          <a:p>
-            <a:pPr algn="l">
-              <a:spcBef>
-                <a:spcPts val="1200"/>
-              </a:spcBef>
-              <a:spcAft>
-                <a:spcPts val="1200"/>
-              </a:spcAft>
-              <a:defRPr sz="2400" b="0">
-                <a:solidFill>
-                  <a:srgbClr val="3C3C3C"/>
-                </a:solidFill>
-                <a:latin typeface="Calibri"/>
-              </a:defRPr>
-            </a:pPr>
-            <a:r>
-              <a:t>Today's lecture will cover three examples of proving non-context-freedom:  L&lt;sub&gt;1&lt;/sub&gt; = {a&lt;sup&gt;n&lt;/sup&gt;b&lt;sup&gt;n&lt;/sup&gt;c&lt;sup&gt;n&lt;/sup&gt; | n ≥ 0}, L&lt;sub&gt;2&lt;/sub&gt; = {a&lt;sup&gt;i&lt;/sup&gt;b&lt;sup&gt;j&lt;/sup&gt;c&lt;sup&gt;k&lt;/sup&gt; | 0 ≤ i ≤ j ≤ k}, and L&lt;sub&gt;3&lt;/sub&gt; = {ss | s ∈ {0, 1}}.  We will use the Pumping Lemma in each case.  For further reading and a more detailed mathematical treatment, please refer to Section 2.3 (pp. 128-129) of Sipser's "Introduction to the Theory of Computation." This text provides a robust foundation in automata theory and formal languages.</a:t>
-            </a:r>
-          </a:p>
-        </p:txBody>
-      </p:sp>
-      <p:sp>
-        <p:nvSpPr>
-          <p:cNvPr id="4" name="Rectangle 3"/>
-          <p:cNvSpPr/>
-          <p:nvPr/>
-        </p:nvSpPr>
-        <p:spPr>
-          <a:xfrm>
-            <a:off x="182880" y="457200"/>
-            <a:ext cx="91440" cy="5943600"/>
-          </a:xfrm>
-          <a:prstGeom prst="rect">
-            <a:avLst/>
-          </a:prstGeom>
-          <a:solidFill>
-            <a:srgbClr val="D2691E"/>
-          </a:solidFill>
-          <a:ln>
-            <a:noFill/>
-          </a:ln>
-        </p:spPr>
-        <p:style>
-          <a:lnRef idx="1">
-            <a:schemeClr val="accent1"/>
-          </a:lnRef>
-          <a:fillRef idx="3">
-            <a:schemeClr val="accent1"/>
-          </a:fillRef>
-          <a:effectRef idx="2">
-            <a:schemeClr val="accent1"/>
-          </a:effectRef>
-          <a:fontRef idx="minor">
-            <a:schemeClr val="lt1"/>
-          </a:fontRef>
-        </p:style>
-        <p:txBody>
-          <a:bodyPr rtlCol="0" anchor="ctr"/>
-          <a:lstStyle/>
-          <a:p>
-            <a:pPr algn="ctr"/>
-          </a:p>
-        </p:txBody>
-      </p:sp>
-      <p:sp>
-        <p:nvSpPr>
-          <p:cNvPr id="5" name="Rectangle 4"/>
-          <p:cNvSpPr/>
-          <p:nvPr/>
-        </p:nvSpPr>
-        <p:spPr>
-          <a:xfrm>
-            <a:off x="182880" y="6400800"/>
-            <a:ext cx="11795760" cy="18288"/>
-          </a:xfrm>
-          <a:prstGeom prst="rect">
-            <a:avLst/>
-          </a:prstGeom>
-          <a:solidFill>
-            <a:srgbClr val="D2691E"/>
-          </a:solidFill>
-          <a:ln>
-            <a:noFill/>
-          </a:ln>
-        </p:spPr>
-        <p:style>
-          <a:lnRef idx="1">
-            <a:schemeClr val="accent1"/>
-          </a:lnRef>
-          <a:fillRef idx="3">
-            <a:schemeClr val="accent1"/>
-          </a:fillRef>
-          <a:effectRef idx="2">
-            <a:schemeClr val="accent1"/>
-          </a:effectRef>
-          <a:fontRef idx="minor">
-            <a:schemeClr val="lt1"/>
-          </a:fontRef>
-        </p:style>
-        <p:txBody>
-          <a:bodyPr rtlCol="0" anchor="ctr"/>
-          <a:lstStyle/>
-          <a:p>
-            <a:pPr algn="ctr"/>
-          </a:p>
-        </p:txBody>
-      </p:sp>
-      <p:sp>
-        <p:nvSpPr>
-          <p:cNvPr id="6" name="TextBox 5"/>
-          <p:cNvSpPr txBox="1"/>
-          <p:nvPr/>
-        </p:nvSpPr>
-        <p:spPr>
-          <a:xfrm>
-            <a:off x="11247120" y="6492240"/>
-            <a:ext cx="457200" cy="274320"/>
-          </a:xfrm>
-          <a:prstGeom prst="rect">
-            <a:avLst/>
-          </a:prstGeom>
-          <a:noFill/>
-        </p:spPr>
-        <p:txBody>
-          <a:bodyPr wrap="none">
-            <a:spAutoFit/>
-          </a:bodyPr>
-          <a:lstStyle/>
-          <a:p>
-            <a:pPr algn="r">
-              <a:defRPr sz="1200">
-                <a:solidFill>
-                  <a:srgbClr val="3C3C3C"/>
-                </a:solidFill>
-              </a:defRPr>
-            </a:pPr>
-            <a:r>
-              <a:t>2/15</a:t>
-            </a:r>
-          </a:p>
-        </p:txBody>
-      </p:sp>
-    </p:spTree>
-  </p:cSld>
-  <p:clrMapOvr>
-    <a:masterClrMapping/>
-  </p:clrMapOvr>
-</p:sld>
-</file>
-
-<file path=ppt/slides/slide3.xml><?xml version="1.0" encoding="utf-8"?>
-<p:sld xmlns:a="http://schemas.openxmlformats.org/drawingml/2006/main" xmlns:p="http://schemas.openxmlformats.org/presentationml/2006/main" xmlns:r="http://schemas.openxmlformats.org/officeDocument/2006/relationships">
-  <p:cSld>
-    <p:bg>
-      <p:bgPr>
-        <a:solidFill>
-          <a:srgbClr val="F0FFF0"/>
-        </a:solidFill>
-        <a:effectLst/>
-      </p:bgPr>
-    </p:bg>
-    <p:spTree>
-      <p:nvGrpSpPr>
-        <p:cNvPr id="1" name=""/>
-        <p:cNvGrpSpPr/>
-        <p:nvPr/>
-      </p:nvGrpSpPr>
-      <p:grpSpPr/>
-      <p:sp>
-        <p:nvSpPr>
-          <p:cNvPr id="2" name="Title 1"/>
-          <p:cNvSpPr>
-            <a:spLocks noGrp="1"/>
-          </p:cNvSpPr>
-          <p:nvPr>
-            <p:ph type="title"/>
-          </p:nvPr>
-        </p:nvSpPr>
-        <p:spPr/>
-        <p:txBody>
-          <a:bodyPr/>
-          <a:lstStyle/>
-          <a:p>
-            <a:pPr algn="l">
-              <a:defRPr sz="4400" b="1">
-                <a:solidFill>
-                  <a:srgbClr val="228B22"/>
-                </a:solidFill>
-                <a:latin typeface="Calibri"/>
-              </a:defRPr>
-            </a:pPr>
-            <a:r>
-              <a:t>The Pumping Lemma for Context-Free Languages</a:t>
-            </a:r>
-          </a:p>
-        </p:txBody>
-      </p:sp>
-      <p:sp>
-        <p:nvSpPr>
-          <p:cNvPr id="3" name="Content Placeholder 2"/>
-          <p:cNvSpPr>
-            <a:spLocks noGrp="1"/>
-          </p:cNvSpPr>
-          <p:nvPr>
-            <p:ph idx="1"/>
-          </p:nvPr>
-        </p:nvSpPr>
-        <p:spPr/>
-        <p:txBody>
-          <a:bodyPr/>
-          <a:lstStyle/>
-          <a:p>
-            <a:pPr algn="l">
-              <a:spcBef>
-                <a:spcPts val="1200"/>
-              </a:spcBef>
-              <a:spcAft>
-                <a:spcPts val="1200"/>
-              </a:spcAft>
-              <a:defRPr sz="2400" b="0">
-                <a:solidFill>
-                  <a:srgbClr val="3C3C3C"/>
-                </a:solidFill>
-                <a:latin typeface="Calibri"/>
-              </a:defRPr>
-            </a:pPr>
-            <a:r>
-              <a:t>The Pumping Lemma states that for any context-free language L, there exists a pumping length p such that any string w in L with |w| ≥ p can be divided into five parts: w = uvxyz.  Crucially, three conditions must hold: (1) for all i ≥ 0, uv&lt;sup&gt;i&lt;/sup&gt;xy&lt;sup&gt;i&lt;/sup&gt;z ∈ L; (2) |vy| &gt; 0; and (3) |vxy| ≤ p. This means we can repeat the substring v and y any number of times, and the resulting string will still be in the language. This forms the basis of our proof technique.</a:t>
-            </a:r>
-          </a:p>
-        </p:txBody>
-      </p:sp>
-      <p:sp>
-        <p:nvSpPr>
-          <p:cNvPr id="4" name="Rectangle 3"/>
-          <p:cNvSpPr/>
-          <p:nvPr/>
-        </p:nvSpPr>
-        <p:spPr>
-          <a:xfrm>
-            <a:off x="182880" y="457200"/>
-            <a:ext cx="91440" cy="5943600"/>
-          </a:xfrm>
-          <a:prstGeom prst="rect">
-            <a:avLst/>
-          </a:prstGeom>
-          <a:solidFill>
-            <a:srgbClr val="3CB371"/>
-          </a:solidFill>
-          <a:ln>
-            <a:noFill/>
-          </a:ln>
-        </p:spPr>
-        <p:style>
-          <a:lnRef idx="1">
-            <a:schemeClr val="accent1"/>
-          </a:lnRef>
-          <a:fillRef idx="3">
-            <a:schemeClr val="accent1"/>
-          </a:fillRef>
-          <a:effectRef idx="2">
-            <a:schemeClr val="accent1"/>
-          </a:effectRef>
-          <a:fontRef idx="minor">
-            <a:schemeClr val="lt1"/>
-          </a:fontRef>
-        </p:style>
-        <p:txBody>
-          <a:bodyPr rtlCol="0" anchor="ctr"/>
-          <a:lstStyle/>
-          <a:p>
-            <a:pPr algn="ctr"/>
-          </a:p>
-        </p:txBody>
-      </p:sp>
-      <p:sp>
-        <p:nvSpPr>
-          <p:cNvPr id="5" name="Rectangle 4"/>
-          <p:cNvSpPr/>
-          <p:nvPr/>
-        </p:nvSpPr>
-        <p:spPr>
-          <a:xfrm>
-            <a:off x="182880" y="6400800"/>
-            <a:ext cx="11795760" cy="18288"/>
-          </a:xfrm>
-          <a:prstGeom prst="rect">
-            <a:avLst/>
-          </a:prstGeom>
-          <a:solidFill>
-            <a:srgbClr val="3CB371"/>
-          </a:solidFill>
-          <a:ln>
-            <a:noFill/>
-          </a:ln>
-        </p:spPr>
-        <p:style>
-          <a:lnRef idx="1">
-            <a:schemeClr val="accent1"/>
-          </a:lnRef>
-          <a:fillRef idx="3">
-            <a:schemeClr val="accent1"/>
-          </a:fillRef>
-          <a:effectRef idx="2">
-            <a:schemeClr val="accent1"/>
-          </a:effectRef>
-          <a:fontRef idx="minor">
-            <a:schemeClr val="lt1"/>
-          </a:fontRef>
-        </p:style>
-        <p:txBody>
-          <a:bodyPr rtlCol="0" anchor="ctr"/>
-          <a:lstStyle/>
-          <a:p>
-            <a:pPr algn="ctr"/>
-          </a:p>
-        </p:txBody>
-      </p:sp>
-      <p:sp>
-        <p:nvSpPr>
-          <p:cNvPr id="6" name="TextBox 5"/>
-          <p:cNvSpPr txBox="1"/>
-          <p:nvPr/>
-        </p:nvSpPr>
-        <p:spPr>
-          <a:xfrm>
-            <a:off x="11247120" y="6492240"/>
-            <a:ext cx="457200" cy="274320"/>
-          </a:xfrm>
-          <a:prstGeom prst="rect">
-            <a:avLst/>
-          </a:prstGeom>
-          <a:noFill/>
-        </p:spPr>
-        <p:txBody>
-          <a:bodyPr wrap="none">
-            <a:spAutoFit/>
-          </a:bodyPr>
-          <a:lstStyle/>
-          <a:p>
-            <a:pPr algn="r">
-              <a:defRPr sz="1200">
-                <a:solidFill>
-                  <a:srgbClr val="3C3C3C"/>
-                </a:solidFill>
-              </a:defRPr>
-            </a:pPr>
-            <a:r>
-              <a:t>3/15</a:t>
-            </a:r>
-          </a:p>
-        </p:txBody>
-      </p:sp>
-    </p:spTree>
-  </p:cSld>
-  <p:clrMapOvr>
-    <a:masterClrMapping/>
-  </p:clrMapOvr>
-</p:sld>
-</file>
-
-<file path=ppt/slides/slide4.xml><?xml version="1.0" encoding="utf-8"?>
-<p:sld xmlns:a="http://schemas.openxmlformats.org/drawingml/2006/main" xmlns:p="http://schemas.openxmlformats.org/presentationml/2006/main" xmlns:r="http://schemas.openxmlformats.org/officeDocument/2006/relationships">
-  <p:cSld>
-    <p:bg>
-      <p:bgPr>
-        <a:solidFill>
-          <a:srgbClr val="F0F8FF"/>
-        </a:solidFill>
-        <a:effectLst/>
-      </p:bgPr>
-    </p:bg>
-    <p:spTree>
-      <p:nvGrpSpPr>
-        <p:cNvPr id="1" name=""/>
-        <p:cNvGrpSpPr/>
-        <p:nvPr/>
-      </p:nvGrpSpPr>
-      <p:grpSpPr/>
-      <p:sp>
-        <p:nvSpPr>
-          <p:cNvPr id="2" name="Title 1"/>
-          <p:cNvSpPr>
-            <a:spLocks noGrp="1"/>
-          </p:cNvSpPr>
-          <p:nvPr>
-            <p:ph type="title"/>
-          </p:nvPr>
-        </p:nvSpPr>
-        <p:spPr/>
-        <p:txBody>
-          <a:bodyPr/>
-          <a:lstStyle/>
-          <a:p>
-            <a:pPr algn="l">
-              <a:defRPr sz="4400" b="1">
-                <a:solidFill>
-                  <a:srgbClr val="2F5496"/>
-                </a:solidFill>
-                <a:latin typeface="Calibri"/>
-              </a:defRPr>
-            </a:pPr>
-            <a:r>
-              <a:t>Proving Non-Context-Freedom: L&lt;sub&gt;1&lt;/sub&gt; - Example</a:t>
-            </a:r>
-          </a:p>
-        </p:txBody>
-      </p:sp>
-      <p:sp>
-        <p:nvSpPr>
-          <p:cNvPr id="3" name="Content Placeholder 2"/>
-          <p:cNvSpPr>
-            <a:spLocks noGrp="1"/>
-          </p:cNvSpPr>
-          <p:nvPr>
-            <p:ph idx="1"/>
-          </p:nvPr>
-        </p:nvSpPr>
-        <p:spPr/>
-        <p:txBody>
-          <a:bodyPr/>
-          <a:lstStyle/>
-          <a:p>
-            <a:pPr algn="l">
-              <a:spcBef>
-                <a:spcPts val="1200"/>
-              </a:spcBef>
-              <a:spcAft>
-                <a:spcPts val="1200"/>
-              </a:spcAft>
-              <a:defRPr sz="2400" b="0">
-                <a:solidFill>
-                  <a:srgbClr val="3C3C3C"/>
-                </a:solidFill>
-                <a:latin typeface="Calibri"/>
-              </a:defRPr>
-            </a:pPr>
-            <a:r>
-              <a:t>Let's prove L&lt;sub&gt;1&lt;/sub&gt; = {a&lt;sup&gt;n&lt;/sup&gt;b&lt;sup&gt;n&lt;/sup&gt;c&lt;sup&gt;n&lt;/sup&gt; | n ≥ 0} is non-context-free.  Assume, for the sake of contradiction, that L&lt;sub&gt;1&lt;/sub&gt; is context-free. Let p be the pumping length given by the Pumping Lemma. Consider the string w = a&lt;sup&gt;p&lt;/sup&gt;b&lt;sup&gt;p&lt;/sup&gt;c&lt;sup&gt;p&lt;/sup&gt;.  Clearly, w ∈ L&lt;sub&gt;1&lt;/sub&gt; and |w| ≥ p. We need to show that any valid division of w into uvxyz satisfying the Pumping Lemma’s conditions will lead to a contradiction. We’ll consider this in two cases: those where v and y contain only one type of symbol and those where v or y contain multiple symbol types.</a:t>
-            </a:r>
-          </a:p>
-        </p:txBody>
-      </p:sp>
-      <p:sp>
-        <p:nvSpPr>
-          <p:cNvPr id="4" name="Rectangle 3"/>
-          <p:cNvSpPr/>
-          <p:nvPr/>
-        </p:nvSpPr>
-        <p:spPr>
-          <a:xfrm>
-            <a:off x="182880" y="457200"/>
-            <a:ext cx="91440" cy="5943600"/>
-          </a:xfrm>
-          <a:prstGeom prst="rect">
-            <a:avLst/>
-          </a:prstGeom>
-          <a:solidFill>
-            <a:srgbClr val="4169E1"/>
-          </a:solidFill>
-          <a:ln>
-            <a:noFill/>
-          </a:ln>
-        </p:spPr>
-        <p:style>
-          <a:lnRef idx="1">
-            <a:schemeClr val="accent1"/>
-          </a:lnRef>
-          <a:fillRef idx="3">
-            <a:schemeClr val="accent1"/>
-          </a:fillRef>
-          <a:effectRef idx="2">
-            <a:schemeClr val="accent1"/>
-          </a:effectRef>
-          <a:fontRef idx="minor">
-            <a:schemeClr val="lt1"/>
-          </a:fontRef>
-        </p:style>
-        <p:txBody>
-          <a:bodyPr rtlCol="0" anchor="ctr"/>
-          <a:lstStyle/>
-          <a:p>
-            <a:pPr algn="ctr"/>
-          </a:p>
-        </p:txBody>
-      </p:sp>
-      <p:sp>
-        <p:nvSpPr>
-          <p:cNvPr id="5" name="Rectangle 4"/>
-          <p:cNvSpPr/>
-          <p:nvPr/>
-        </p:nvSpPr>
-        <p:spPr>
-          <a:xfrm>
-            <a:off x="182880" y="6400800"/>
-            <a:ext cx="11795760" cy="18288"/>
-          </a:xfrm>
-          <a:prstGeom prst="rect">
-            <a:avLst/>
-          </a:prstGeom>
-          <a:solidFill>
-            <a:srgbClr val="4169E1"/>
-          </a:solidFill>
-          <a:ln>
-            <a:noFill/>
-          </a:ln>
-        </p:spPr>
-        <p:style>
-          <a:lnRef idx="1">
-            <a:schemeClr val="accent1"/>
-          </a:lnRef>
-          <a:fillRef idx="3">
-            <a:schemeClr val="accent1"/>
-          </a:fillRef>
-          <a:effectRef idx="2">
-            <a:schemeClr val="accent1"/>
-          </a:effectRef>
-          <a:fontRef idx="minor">
-            <a:schemeClr val="lt1"/>
-          </a:fontRef>
-        </p:style>
-        <p:txBody>
-          <a:bodyPr rtlCol="0" anchor="ctr"/>
-          <a:lstStyle/>
-          <a:p>
-            <a:pPr algn="ctr"/>
-          </a:p>
-        </p:txBody>
-      </p:sp>
-      <p:sp>
-        <p:nvSpPr>
-          <p:cNvPr id="6" name="TextBox 5"/>
-          <p:cNvSpPr txBox="1"/>
-          <p:nvPr/>
-        </p:nvSpPr>
-        <p:spPr>
-          <a:xfrm>
-            <a:off x="11247120" y="6492240"/>
-            <a:ext cx="457200" cy="274320"/>
-          </a:xfrm>
-          <a:prstGeom prst="rect">
-            <a:avLst/>
-          </a:prstGeom>
-          <a:noFill/>
-        </p:spPr>
-        <p:txBody>
-          <a:bodyPr wrap="none">
-            <a:spAutoFit/>
-          </a:bodyPr>
-          <a:lstStyle/>
-          <a:p>
-            <a:pPr algn="r">
-              <a:defRPr sz="1200">
-                <a:solidFill>
-                  <a:srgbClr val="3C3C3C"/>
-                </a:solidFill>
-              </a:defRPr>
-            </a:pPr>
-            <a:r>
-              <a:t>4/15</a:t>
-            </a:r>
-          </a:p>
-        </p:txBody>
-      </p:sp>
-    </p:spTree>
-  </p:cSld>
-  <p:clrMapOvr>
-    <a:masterClrMapping/>
-  </p:clrMapOvr>
-</p:sld>
-</file>
-
-<file path=ppt/slides/slide5.xml><?xml version="1.0" encoding="utf-8"?>
-<p:sld xmlns:a="http://schemas.openxmlformats.org/drawingml/2006/main" xmlns:p="http://schemas.openxmlformats.org/presentationml/2006/main" xmlns:r="http://schemas.openxmlformats.org/officeDocument/2006/relationships">
-  <p:cSld>
-    <p:bg>
-      <p:bgPr>
-        <a:solidFill>
-          <a:srgbClr val="FFF5EE"/>
-        </a:solidFill>
-        <a:effectLst/>
-      </p:bgPr>
-    </p:bg>
-    <p:spTree>
-      <p:nvGrpSpPr>
-        <p:cNvPr id="1" name=""/>
-        <p:cNvGrpSpPr/>
-        <p:nvPr/>
-      </p:nvGrpSpPr>
-      <p:grpSpPr/>
-      <p:sp>
-        <p:nvSpPr>
-          <p:cNvPr id="2" name="Title 1"/>
-          <p:cNvSpPr>
-            <a:spLocks noGrp="1"/>
-          </p:cNvSpPr>
-          <p:nvPr>
-            <p:ph type="title"/>
-          </p:nvPr>
-        </p:nvSpPr>
-        <p:spPr/>
-        <p:txBody>
-          <a:bodyPr/>
-          <a:lstStyle/>
-          <a:p>
-            <a:pPr algn="l">
-              <a:defRPr sz="4400" b="1">
-                <a:solidFill>
-                  <a:srgbClr val="8B4513"/>
-                </a:solidFill>
-                <a:latin typeface="Calibri"/>
-              </a:defRPr>
-            </a:pPr>
-            <a:r>
-              <a:t>Proving Non-Context-Freedom: L&lt;sub&gt;1&lt;/sub&gt; - Case 1</a:t>
-            </a:r>
-          </a:p>
-        </p:txBody>
-      </p:sp>
-      <p:sp>
-        <p:nvSpPr>
-          <p:cNvPr id="3" name="Content Placeholder 2"/>
-          <p:cNvSpPr>
-            <a:spLocks noGrp="1"/>
-          </p:cNvSpPr>
-          <p:nvPr>
-            <p:ph idx="1"/>
-          </p:nvPr>
-        </p:nvSpPr>
-        <p:spPr/>
-        <p:txBody>
-          <a:bodyPr/>
-          <a:lstStyle/>
-          <a:p>
-            <a:pPr algn="l">
-              <a:spcBef>
-                <a:spcPts val="1200"/>
-              </a:spcBef>
-              <a:spcAft>
-                <a:spcPts val="1200"/>
-              </a:spcAft>
-              <a:defRPr sz="2400" b="0">
-                <a:solidFill>
-                  <a:srgbClr val="3C3C3C"/>
-                </a:solidFill>
-                <a:latin typeface="Calibri"/>
-              </a:defRPr>
-            </a:pPr>
-            <a:r>
-              <a:t>Consider any division w = uvxyz where both v and y contain only one type of alphabet symbol (a, b, or c).  Regardless of which symbol(s) v and y contain, there will always be at least one symbol type missing from both v and y.  Therefore, uv&lt;sup&gt;2&lt;/sup&gt;xy&lt;sup&gt;2&lt;/sup&gt;z cannot have an equal number of a's, b's, and c's. This means uv&lt;sup&gt;2&lt;/sup&gt;xy&lt;sup&gt;2&lt;/sup&gt;z ∉ L&lt;sub&gt;1&lt;/sub&gt;, a contradiction.</a:t>
-            </a:r>
-          </a:p>
-        </p:txBody>
-      </p:sp>
-      <p:sp>
-        <p:nvSpPr>
-          <p:cNvPr id="4" name="Rectangle 3"/>
-          <p:cNvSpPr/>
-          <p:nvPr/>
-        </p:nvSpPr>
-        <p:spPr>
-          <a:xfrm>
-            <a:off x="182880" y="457200"/>
-            <a:ext cx="91440" cy="5943600"/>
-          </a:xfrm>
-          <a:prstGeom prst="rect">
-            <a:avLst/>
-          </a:prstGeom>
-          <a:solidFill>
-            <a:srgbClr val="D2691E"/>
-          </a:solidFill>
-          <a:ln>
-            <a:noFill/>
-          </a:ln>
-        </p:spPr>
-        <p:style>
-          <a:lnRef idx="1">
-            <a:schemeClr val="accent1"/>
-          </a:lnRef>
-          <a:fillRef idx="3">
-            <a:schemeClr val="accent1"/>
-          </a:fillRef>
-          <a:effectRef idx="2">
-            <a:schemeClr val="accent1"/>
-          </a:effectRef>
-          <a:fontRef idx="minor">
-            <a:schemeClr val="lt1"/>
-          </a:fontRef>
-        </p:style>
-        <p:txBody>
-          <a:bodyPr rtlCol="0" anchor="ctr"/>
-          <a:lstStyle/>
-          <a:p>
-            <a:pPr algn="ctr"/>
-          </a:p>
-        </p:txBody>
-      </p:sp>
-      <p:sp>
-        <p:nvSpPr>
-          <p:cNvPr id="5" name="Rectangle 4"/>
-          <p:cNvSpPr/>
-          <p:nvPr/>
-        </p:nvSpPr>
-        <p:spPr>
-          <a:xfrm>
-            <a:off x="182880" y="6400800"/>
-            <a:ext cx="11795760" cy="18288"/>
-          </a:xfrm>
-          <a:prstGeom prst="rect">
-            <a:avLst/>
-          </a:prstGeom>
-          <a:solidFill>
-            <a:srgbClr val="D2691E"/>
-          </a:solidFill>
-          <a:ln>
-            <a:noFill/>
-          </a:ln>
-        </p:spPr>
-        <p:style>
-          <a:lnRef idx="1">
-            <a:schemeClr val="accent1"/>
-          </a:lnRef>
-          <a:fillRef idx="3">
-            <a:schemeClr val="accent1"/>
-          </a:fillRef>
-          <a:effectRef idx="2">
-            <a:schemeClr val="accent1"/>
-          </a:effectRef>
-          <a:fontRef idx="minor">
-            <a:schemeClr val="lt1"/>
-          </a:fontRef>
-        </p:style>
-        <p:txBody>
-          <a:bodyPr rtlCol="0" anchor="ctr"/>
-          <a:lstStyle/>
-          <a:p>
-            <a:pPr algn="ctr"/>
-          </a:p>
-        </p:txBody>
-      </p:sp>
-      <p:sp>
-        <p:nvSpPr>
-          <p:cNvPr id="6" name="TextBox 5"/>
-          <p:cNvSpPr txBox="1"/>
-          <p:nvPr/>
-        </p:nvSpPr>
-        <p:spPr>
-          <a:xfrm>
-            <a:off x="11247120" y="6492240"/>
-            <a:ext cx="457200" cy="274320"/>
-          </a:xfrm>
-          <a:prstGeom prst="rect">
-            <a:avLst/>
-          </a:prstGeom>
-          <a:noFill/>
-        </p:spPr>
-        <p:txBody>
-          <a:bodyPr wrap="none">
-            <a:spAutoFit/>
-          </a:bodyPr>
-          <a:lstStyle/>
-          <a:p>
-            <a:pPr algn="r">
-              <a:defRPr sz="1200">
-                <a:solidFill>
-                  <a:srgbClr val="3C3C3C"/>
-                </a:solidFill>
-              </a:defRPr>
-            </a:pPr>
-            <a:r>
-              <a:t>5/15</a:t>
-            </a:r>
-          </a:p>
-        </p:txBody>
-      </p:sp>
-    </p:spTree>
-  </p:cSld>
-  <p:clrMapOvr>
-    <a:masterClrMapping/>
-  </p:clrMapOvr>
-</p:sld>
-</file>
-
-<file path=ppt/slides/slide6.xml><?xml version="1.0" encoding="utf-8"?>
-<p:sld xmlns:a="http://schemas.openxmlformats.org/drawingml/2006/main" xmlns:p="http://schemas.openxmlformats.org/presentationml/2006/main" xmlns:r="http://schemas.openxmlformats.org/officeDocument/2006/relationships">
-  <p:cSld>
-    <p:bg>
-      <p:bgPr>
-        <a:solidFill>
-          <a:srgbClr val="F0FFF0"/>
-        </a:solidFill>
-        <a:effectLst/>
-      </p:bgPr>
-    </p:bg>
-    <p:spTree>
-      <p:nvGrpSpPr>
-        <p:cNvPr id="1" name=""/>
-        <p:cNvGrpSpPr/>
-        <p:nvPr/>
-      </p:nvGrpSpPr>
-      <p:grpSpPr/>
-      <p:sp>
-        <p:nvSpPr>
-          <p:cNvPr id="2" name="Title 1"/>
-          <p:cNvSpPr>
-            <a:spLocks noGrp="1"/>
-          </p:cNvSpPr>
-          <p:nvPr>
-            <p:ph type="title"/>
-          </p:nvPr>
-        </p:nvSpPr>
-        <p:spPr/>
-        <p:txBody>
-          <a:bodyPr/>
-          <a:lstStyle/>
-          <a:p>
-            <a:pPr algn="l">
-              <a:defRPr sz="4400" b="1">
-                <a:solidFill>
-                  <a:srgbClr val="228B22"/>
-                </a:solidFill>
-                <a:latin typeface="Calibri"/>
-              </a:defRPr>
-            </a:pPr>
-            <a:r>
-              <a:t>Proving Non-Context-Freedom: L&lt;sub&gt;1&lt;/sub&gt; - Case 2</a:t>
-            </a:r>
-          </a:p>
-        </p:txBody>
-      </p:sp>
-      <p:sp>
-        <p:nvSpPr>
-          <p:cNvPr id="3" name="Content Placeholder 2"/>
-          <p:cNvSpPr>
-            <a:spLocks noGrp="1"/>
-          </p:cNvSpPr>
-          <p:nvPr>
-            <p:ph idx="1"/>
-          </p:nvPr>
-        </p:nvSpPr>
-        <p:spPr/>
-        <p:txBody>
-          <a:bodyPr/>
-          <a:lstStyle/>
-          <a:p>
-            <a:pPr algn="l">
-              <a:spcBef>
-                <a:spcPts val="1200"/>
-              </a:spcBef>
-              <a:spcAft>
-                <a:spcPts val="1200"/>
-              </a:spcAft>
-              <a:defRPr sz="2400" b="0">
-                <a:solidFill>
-                  <a:srgbClr val="3C3C3C"/>
-                </a:solidFill>
-                <a:latin typeface="Calibri"/>
-              </a:defRPr>
-            </a:pPr>
-            <a:r>
-              <a:t>Now, consider divisions w = uvxyz where v or y contains multiple types of alphabet symbols (e.g., v contains both a's and b's). Pumping v and y will disrupt the a&lt;sup&gt;n&lt;/sup&gt;b&lt;sup&gt;n&lt;/sup&gt;c&lt;sup&gt;n&lt;/sup&gt; pattern.  For example, pumping up might result in more a's than b's, or more b's than c's.  This again leads to uv&lt;sup&gt;i&lt;/sup&gt;xy&lt;sup&gt;i&lt;/sup&gt;z ∉ L&lt;sub&gt;1&lt;/sub&gt; for some i, creating a contradiction. Since both cases result in a contradiction, L&lt;sub&gt;1&lt;/sub&gt; must be non-context-free.</a:t>
-            </a:r>
-          </a:p>
-        </p:txBody>
-      </p:sp>
-      <p:sp>
-        <p:nvSpPr>
-          <p:cNvPr id="4" name="Rectangle 3"/>
-          <p:cNvSpPr/>
-          <p:nvPr/>
-        </p:nvSpPr>
-        <p:spPr>
-          <a:xfrm>
-            <a:off x="182880" y="457200"/>
-            <a:ext cx="91440" cy="5943600"/>
-          </a:xfrm>
-          <a:prstGeom prst="rect">
-            <a:avLst/>
-          </a:prstGeom>
-          <a:solidFill>
-            <a:srgbClr val="3CB371"/>
-          </a:solidFill>
-          <a:ln>
-            <a:noFill/>
-          </a:ln>
-        </p:spPr>
-        <p:style>
-          <a:lnRef idx="1">
-            <a:schemeClr val="accent1"/>
-          </a:lnRef>
-          <a:fillRef idx="3">
-            <a:schemeClr val="accent1"/>
-          </a:fillRef>
-          <a:effectRef idx="2">
-            <a:schemeClr val="accent1"/>
-          </a:effectRef>
-          <a:fontRef idx="minor">
-            <a:schemeClr val="lt1"/>
-          </a:fontRef>
-        </p:style>
-        <p:txBody>
-          <a:bodyPr rtlCol="0" anchor="ctr"/>
-          <a:lstStyle/>
-          <a:p>
-            <a:pPr algn="ctr"/>
-          </a:p>
-        </p:txBody>
-      </p:sp>
-      <p:sp>
-        <p:nvSpPr>
-          <p:cNvPr id="5" name="Rectangle 4"/>
-          <p:cNvSpPr/>
-          <p:nvPr/>
-        </p:nvSpPr>
-        <p:spPr>
-          <a:xfrm>
-            <a:off x="182880" y="6400800"/>
-            <a:ext cx="11795760" cy="18288"/>
-          </a:xfrm>
-          <a:prstGeom prst="rect">
-            <a:avLst/>
-          </a:prstGeom>
-          <a:solidFill>
-            <a:srgbClr val="3CB371"/>
-          </a:solidFill>
-          <a:ln>
-            <a:noFill/>
-          </a:ln>
-        </p:spPr>
-        <p:style>
-          <a:lnRef idx="1">
-            <a:schemeClr val="accent1"/>
-          </a:lnRef>
-          <a:fillRef idx="3">
-            <a:schemeClr val="accent1"/>
-          </a:fillRef>
-          <a:effectRef idx="2">
-            <a:schemeClr val="accent1"/>
-          </a:effectRef>
-          <a:fontRef idx="minor">
-            <a:schemeClr val="lt1"/>
-          </a:fontRef>
-        </p:style>
-        <p:txBody>
-          <a:bodyPr rtlCol="0" anchor="ctr"/>
-          <a:lstStyle/>
-          <a:p>
-            <a:pPr algn="ctr"/>
-          </a:p>
-        </p:txBody>
-      </p:sp>
-      <p:sp>
-        <p:nvSpPr>
-          <p:cNvPr id="6" name="TextBox 5"/>
-          <p:cNvSpPr txBox="1"/>
-          <p:nvPr/>
-        </p:nvSpPr>
-        <p:spPr>
-          <a:xfrm>
-            <a:off x="11247120" y="6492240"/>
-            <a:ext cx="457200" cy="274320"/>
-          </a:xfrm>
-          <a:prstGeom prst="rect">
-            <a:avLst/>
-          </a:prstGeom>
-          <a:noFill/>
-        </p:spPr>
-        <p:txBody>
-          <a:bodyPr wrap="none">
-            <a:spAutoFit/>
-          </a:bodyPr>
-          <a:lstStyle/>
-          <a:p>
-            <a:pPr algn="r">
-              <a:defRPr sz="1200">
-                <a:solidFill>
-                  <a:srgbClr val="3C3C3C"/>
-                </a:solidFill>
-              </a:defRPr>
-            </a:pPr>
-            <a:r>
-              <a:t>6/15</a:t>
-            </a:r>
-          </a:p>
-        </p:txBody>
-      </p:sp>
-    </p:spTree>
-  </p:cSld>
-  <p:clrMapOvr>
-    <a:masterClrMapping/>
-  </p:clrMapOvr>
-</p:sld>
-</file>
-
-<file path=ppt/slides/slide7.xml><?xml version="1.0" encoding="utf-8"?>
-<p:sld xmlns:a="http://schemas.openxmlformats.org/drawingml/2006/main" xmlns:p="http://schemas.openxmlformats.org/presentationml/2006/main" xmlns:r="http://schemas.openxmlformats.org/officeDocument/2006/relationships">
-  <p:cSld>
-    <p:bg>
-      <p:bgPr>
-        <a:solidFill>
-          <a:srgbClr val="F0F8FF"/>
-        </a:solidFill>
-        <a:effectLst/>
-      </p:bgPr>
-    </p:bg>
-    <p:spTree>
-      <p:nvGrpSpPr>
-        <p:cNvPr id="1" name=""/>
-        <p:cNvGrpSpPr/>
-        <p:nvPr/>
-      </p:nvGrpSpPr>
-      <p:grpSpPr/>
-      <p:sp>
-        <p:nvSpPr>
-          <p:cNvPr id="2" name="Title 1"/>
-          <p:cNvSpPr>
-            <a:spLocks noGrp="1"/>
-          </p:cNvSpPr>
-          <p:nvPr>
-            <p:ph type="title"/>
-          </p:nvPr>
-        </p:nvSpPr>
-        <p:spPr/>
-        <p:txBody>
-          <a:bodyPr/>
-          <a:lstStyle/>
-          <a:p>
-            <a:pPr algn="l">
-              <a:defRPr sz="4400" b="1">
-                <a:solidFill>
-                  <a:srgbClr val="2F5496"/>
-                </a:solidFill>
-                <a:latin typeface="Calibri"/>
-              </a:defRPr>
-            </a:pPr>
-            <a:r>
-              <a:t>Proving Non-Context-Freedom: L&lt;sub&gt;2&lt;/sub&gt; - Example</a:t>
-            </a:r>
-          </a:p>
-        </p:txBody>
-      </p:sp>
-      <p:sp>
-        <p:nvSpPr>
-          <p:cNvPr id="3" name="Content Placeholder 2"/>
-          <p:cNvSpPr>
-            <a:spLocks noGrp="1"/>
-          </p:cNvSpPr>
-          <p:nvPr>
-            <p:ph idx="1"/>
-          </p:nvPr>
-        </p:nvSpPr>
-        <p:spPr/>
-        <p:txBody>
-          <a:bodyPr/>
-          <a:lstStyle/>
-          <a:p>
-            <a:pPr algn="l">
-              <a:spcBef>
-                <a:spcPts val="1200"/>
-              </a:spcBef>
-              <a:spcAft>
-                <a:spcPts val="1200"/>
-              </a:spcAft>
-              <a:defRPr sz="2400" b="0">
-                <a:solidFill>
-                  <a:srgbClr val="3C3C3C"/>
-                </a:solidFill>
-                <a:latin typeface="Calibri"/>
-              </a:defRPr>
-            </a:pPr>
-            <a:r>
-              <a:t>Let's move on to L&lt;sub&gt;2&lt;/sub&gt; = {a&lt;sup&gt;i&lt;/sup&gt;b&lt;sup&gt;j&lt;/sup&gt;c&lt;sup&gt;k&lt;/sup&gt; | 0 ≤ i ≤ j ≤ k}. We follow the same approach: assume L&lt;sub&gt;2&lt;/sub&gt; is context-free, let p be the pumping length, and choose w = a&lt;sup&gt;p&lt;/sup&gt;b&lt;sup&gt;p&lt;/sup&gt;c&lt;sup&gt;p&lt;/sup&gt;. Again, we'll analyze different cases based on the content of the pumped substrings v and y.</a:t>
-            </a:r>
-          </a:p>
-        </p:txBody>
-      </p:sp>
-      <p:sp>
-        <p:nvSpPr>
-          <p:cNvPr id="4" name="Rectangle 3"/>
-          <p:cNvSpPr/>
-          <p:nvPr/>
-        </p:nvSpPr>
-        <p:spPr>
-          <a:xfrm>
-            <a:off x="182880" y="457200"/>
-            <a:ext cx="91440" cy="5943600"/>
-          </a:xfrm>
-          <a:prstGeom prst="rect">
-            <a:avLst/>
-          </a:prstGeom>
-          <a:solidFill>
-            <a:srgbClr val="4169E1"/>
-          </a:solidFill>
-          <a:ln>
-            <a:noFill/>
-          </a:ln>
-        </p:spPr>
-        <p:style>
-          <a:lnRef idx="1">
-            <a:schemeClr val="accent1"/>
-          </a:lnRef>
-          <a:fillRef idx="3">
-            <a:schemeClr val="accent1"/>
-          </a:fillRef>
-          <a:effectRef idx="2">
-            <a:schemeClr val="accent1"/>
-          </a:effectRef>
-          <a:fontRef idx="minor">
-            <a:schemeClr val="lt1"/>
-          </a:fontRef>
-        </p:style>
-        <p:txBody>
-          <a:bodyPr rtlCol="0" anchor="ctr"/>
-          <a:lstStyle/>
-          <a:p>
-            <a:pPr algn="ctr"/>
-          </a:p>
-        </p:txBody>
-      </p:sp>
-      <p:sp>
-        <p:nvSpPr>
-          <p:cNvPr id="5" name="Rectangle 4"/>
-          <p:cNvSpPr/>
-          <p:nvPr/>
-        </p:nvSpPr>
-        <p:spPr>
-          <a:xfrm>
-            <a:off x="182880" y="6400800"/>
-            <a:ext cx="11795760" cy="18288"/>
-          </a:xfrm>
-          <a:prstGeom prst="rect">
-            <a:avLst/>
-          </a:prstGeom>
-          <a:solidFill>
-            <a:srgbClr val="4169E1"/>
-          </a:solidFill>
-          <a:ln>
-            <a:noFill/>
-          </a:ln>
-        </p:spPr>
-        <p:style>
-          <a:lnRef idx="1">
-            <a:schemeClr val="accent1"/>
-          </a:lnRef>
-          <a:fillRef idx="3">
-            <a:schemeClr val="accent1"/>
-          </a:fillRef>
-          <a:effectRef idx="2">
-            <a:schemeClr val="accent1"/>
-          </a:effectRef>
-          <a:fontRef idx="minor">
-            <a:schemeClr val="lt1"/>
-          </a:fontRef>
-        </p:style>
-        <p:txBody>
-          <a:bodyPr rtlCol="0" anchor="ctr"/>
-          <a:lstStyle/>
-          <a:p>
-            <a:pPr algn="ctr"/>
-          </a:p>
-        </p:txBody>
-      </p:sp>
-      <p:sp>
-        <p:nvSpPr>
-          <p:cNvPr id="6" name="TextBox 5"/>
-          <p:cNvSpPr txBox="1"/>
-          <p:nvPr/>
-        </p:nvSpPr>
-        <p:spPr>
-          <a:xfrm>
-            <a:off x="11247120" y="6492240"/>
-            <a:ext cx="457200" cy="274320"/>
-          </a:xfrm>
-          <a:prstGeom prst="rect">
-            <a:avLst/>
-          </a:prstGeom>
-          <a:noFill/>
-        </p:spPr>
-        <p:txBody>
-          <a:bodyPr wrap="none">
-            <a:spAutoFit/>
-          </a:bodyPr>
-          <a:lstStyle/>
-          <a:p>
-            <a:pPr algn="r">
-              <a:defRPr sz="1200">
-                <a:solidFill>
-                  <a:srgbClr val="3C3C3C"/>
-                </a:solidFill>
-              </a:defRPr>
-            </a:pPr>
-            <a:r>
-              <a:t>7/15</a:t>
-            </a:r>
-          </a:p>
-        </p:txBody>
-      </p:sp>
-    </p:spTree>
-  </p:cSld>
-  <p:clrMapOvr>
-    <a:masterClrMapping/>
-  </p:clrMapOvr>
-</p:sld>
-</file>
-
-<file path=ppt/slides/slide8.xml><?xml version="1.0" encoding="utf-8"?>
-<p:sld xmlns:a="http://schemas.openxmlformats.org/drawingml/2006/main" xmlns:p="http://schemas.openxmlformats.org/presentationml/2006/main" xmlns:r="http://schemas.openxmlformats.org/officeDocument/2006/relationships">
-  <p:cSld>
-    <p:bg>
-      <p:bgPr>
-        <a:solidFill>
-          <a:srgbClr val="FFF5EE"/>
-        </a:solidFill>
-        <a:effectLst/>
-      </p:bgPr>
-    </p:bg>
-    <p:spTree>
-      <p:nvGrpSpPr>
-        <p:cNvPr id="1" name=""/>
-        <p:cNvGrpSpPr/>
-        <p:nvPr/>
-      </p:nvGrpSpPr>
-      <p:grpSpPr/>
-      <p:sp>
-        <p:nvSpPr>
-          <p:cNvPr id="2" name="Title 1"/>
-          <p:cNvSpPr>
-            <a:spLocks noGrp="1"/>
-          </p:cNvSpPr>
-          <p:nvPr>
-            <p:ph type="title"/>
-          </p:nvPr>
-        </p:nvSpPr>
-        <p:spPr/>
-        <p:txBody>
-          <a:bodyPr/>
-          <a:lstStyle/>
-          <a:p>
-            <a:pPr algn="l">
-              <a:defRPr sz="4400" b="1">
-                <a:solidFill>
-                  <a:srgbClr val="8B4513"/>
-                </a:solidFill>
-                <a:latin typeface="Calibri"/>
-              </a:defRPr>
-            </a:pPr>
-            <a:r>
-              <a:t>Proving Non-Context-Freedom: L&lt;sub&gt;2&lt;/sub&gt; - Case 1</a:t>
-            </a:r>
-          </a:p>
-        </p:txBody>
-      </p:sp>
-      <p:sp>
-        <p:nvSpPr>
-          <p:cNvPr id="3" name="Content Placeholder 2"/>
-          <p:cNvSpPr>
-            <a:spLocks noGrp="1"/>
-          </p:cNvSpPr>
-          <p:nvPr>
-            <p:ph idx="1"/>
-          </p:nvPr>
-        </p:nvSpPr>
-        <p:spPr/>
-        <p:txBody>
-          <a:bodyPr/>
-          <a:lstStyle/>
-          <a:p>
-            <a:pPr algn="l">
-              <a:spcBef>
-                <a:spcPts val="1200"/>
-              </a:spcBef>
-              <a:spcAft>
-                <a:spcPts val="1200"/>
-              </a:spcAft>
-              <a:defRPr sz="2400" b="0">
-                <a:solidFill>
-                  <a:srgbClr val="3C3C3C"/>
-                </a:solidFill>
-                <a:latin typeface="Calibri"/>
-              </a:defRPr>
-            </a:pPr>
-            <a:r>
-              <a:t>We consider divisions w = uvxyz where v and y each contain only one type of symbol.  Unlike L&lt;sub&gt;1&lt;/sub&gt;, simply having one symbol type missing isn't enough for a contradiction.  Here, we subdivide Case 1 into three subcases: (a) v and y contain no a's; (b) v and y contain no b's; (c) v and y contain no c's. We'll analyze each subcase to find a contradiction.</a:t>
-            </a:r>
-          </a:p>
-        </p:txBody>
-      </p:sp>
-      <p:sp>
-        <p:nvSpPr>
-          <p:cNvPr id="4" name="Rectangle 3"/>
-          <p:cNvSpPr/>
-          <p:nvPr/>
-        </p:nvSpPr>
-        <p:spPr>
-          <a:xfrm>
-            <a:off x="182880" y="457200"/>
-            <a:ext cx="91440" cy="5943600"/>
-          </a:xfrm>
-          <a:prstGeom prst="rect">
-            <a:avLst/>
-          </a:prstGeom>
-          <a:solidFill>
-            <a:srgbClr val="D2691E"/>
-          </a:solidFill>
-          <a:ln>
-            <a:noFill/>
-          </a:ln>
-        </p:spPr>
-        <p:style>
-          <a:lnRef idx="1">
-            <a:schemeClr val="accent1"/>
-          </a:lnRef>
-          <a:fillRef idx="3">
-            <a:schemeClr val="accent1"/>
-          </a:fillRef>
-          <a:effectRef idx="2">
-            <a:schemeClr val="accent1"/>
-          </a:effectRef>
-          <a:fontRef idx="minor">
-            <a:schemeClr val="lt1"/>
-          </a:fontRef>
-        </p:style>
-        <p:txBody>
-          <a:bodyPr rtlCol="0" anchor="ctr"/>
-          <a:lstStyle/>
-          <a:p>
-            <a:pPr algn="ctr"/>
-          </a:p>
-        </p:txBody>
-      </p:sp>
-      <p:sp>
-        <p:nvSpPr>
-          <p:cNvPr id="5" name="Rectangle 4"/>
-          <p:cNvSpPr/>
-          <p:nvPr/>
-        </p:nvSpPr>
-        <p:spPr>
-          <a:xfrm>
-            <a:off x="182880" y="6400800"/>
-            <a:ext cx="11795760" cy="18288"/>
-          </a:xfrm>
-          <a:prstGeom prst="rect">
-            <a:avLst/>
-          </a:prstGeom>
-          <a:solidFill>
-            <a:srgbClr val="D2691E"/>
-          </a:solidFill>
-          <a:ln>
-            <a:noFill/>
-          </a:ln>
-        </p:spPr>
-        <p:style>
-          <a:lnRef idx="1">
-            <a:schemeClr val="accent1"/>
-          </a:lnRef>
-          <a:fillRef idx="3">
-            <a:schemeClr val="accent1"/>
-          </a:fillRef>
-          <a:effectRef idx="2">
-            <a:schemeClr val="accent1"/>
-          </a:effectRef>
-          <a:fontRef idx="minor">
-            <a:schemeClr val="lt1"/>
-          </a:fontRef>
-        </p:style>
-        <p:txBody>
-          <a:bodyPr rtlCol="0" anchor="ctr"/>
-          <a:lstStyle/>
-          <a:p>
-            <a:pPr algn="ctr"/>
-          </a:p>
-        </p:txBody>
-      </p:sp>
-      <p:sp>
-        <p:nvSpPr>
-          <p:cNvPr id="6" name="TextBox 5"/>
-          <p:cNvSpPr txBox="1"/>
-          <p:nvPr/>
-        </p:nvSpPr>
-        <p:spPr>
-          <a:xfrm>
-            <a:off x="11247120" y="6492240"/>
-            <a:ext cx="457200" cy="274320"/>
-          </a:xfrm>
-          <a:prstGeom prst="rect">
-            <a:avLst/>
-          </a:prstGeom>
-          <a:noFill/>
-        </p:spPr>
-        <p:txBody>
-          <a:bodyPr wrap="none">
-            <a:spAutoFit/>
-          </a:bodyPr>
-          <a:lstStyle/>
-          <a:p>
-            <a:pPr algn="r">
-              <a:defRPr sz="1200">
-                <a:solidFill>
-                  <a:srgbClr val="3C3C3C"/>
-                </a:solidFill>
-              </a:defRPr>
-            </a:pPr>
-            <a:r>
-              <a:t>8/15</a:t>
-            </a:r>
-          </a:p>
-        </p:txBody>
-      </p:sp>
-    </p:spTree>
-  </p:cSld>
-  <p:clrMapOvr>
-    <a:masterClrMapping/>
-  </p:clrMapOvr>
-</p:sld>
-</file>
-
-<file path=ppt/slides/slide9.xml><?xml version="1.0" encoding="utf-8"?>
-<p:sld xmlns:a="http://schemas.openxmlformats.org/drawingml/2006/main" xmlns:p="http://schemas.openxmlformats.org/presentationml/2006/main" xmlns:r="http://schemas.openxmlformats.org/officeDocument/2006/relationships">
-  <p:cSld>
-    <p:bg>
-      <p:bgPr>
-        <a:solidFill>
-          <a:srgbClr val="F0FFF0"/>
-        </a:solidFill>
-        <a:effectLst/>
-      </p:bgPr>
-    </p:bg>
-    <p:spTree>
-      <p:nvGrpSpPr>
-        <p:cNvPr id="1" name=""/>
-        <p:cNvGrpSpPr/>
-        <p:nvPr/>
-      </p:nvGrpSpPr>
-      <p:grpSpPr/>
-      <p:sp>
-        <p:nvSpPr>
-          <p:cNvPr id="2" name="Title 1"/>
-          <p:cNvSpPr>
-            <a:spLocks noGrp="1"/>
-          </p:cNvSpPr>
-          <p:nvPr>
-            <p:ph type="title"/>
-          </p:nvPr>
-        </p:nvSpPr>
-        <p:spPr/>
-        <p:txBody>
-          <a:bodyPr/>
-          <a:lstStyle/>
-          <a:p>
-            <a:pPr algn="l">
-              <a:defRPr sz="4400" b="1">
-                <a:solidFill>
-                  <a:srgbClr val="228B22"/>
-                </a:solidFill>
-                <a:latin typeface="Calibri"/>
-              </a:defRPr>
-            </a:pPr>
-            <a:r>
-              <a:t>Proving Non-Context-Freedom: L&lt;sub&gt;2&lt;/sub&gt; - Case 1(a) &amp; (b)</a:t>
-            </a:r>
-          </a:p>
-        </p:txBody>
-      </p:sp>
-      <p:sp>
-        <p:nvSpPr>
-          <p:cNvPr id="3" name="Content Placeholder 2"/>
-          <p:cNvSpPr>
-            <a:spLocks noGrp="1"/>
-          </p:cNvSpPr>
-          <p:nvPr>
-            <p:ph idx="1"/>
-          </p:nvPr>
-        </p:nvSpPr>
-        <p:spPr/>
-        <p:txBody>
-          <a:bodyPr/>
-          <a:lstStyle/>
-          <a:p>
-            <a:pPr algn="l">
-              <a:spcBef>
-                <a:spcPts val="1200"/>
-              </a:spcBef>
-              <a:spcAft>
-                <a:spcPts val="1200"/>
-              </a:spcAft>
-              <a:defRPr sz="2400" b="0">
-                <a:solidFill>
-                  <a:srgbClr val="3C3C3C"/>
-                </a:solidFill>
-                <a:latin typeface="Calibri"/>
-              </a:defRPr>
-            </a:pPr>
-            <a:r>
-              <a:t>(a) If v and y don't contain a's, pumping down (i = 0) reduces the number of b's or c's, violating the i ≤ j ≤ k condition. (b) If v and y don't contain b's, at least one of v or y must contain a's or c's.  Pumping will either increase a's relative to b's or c's relative to b's.  Both scenarios cause a violation of i ≤ j ≤ k, resulting in a contradiction.</a:t>
-            </a:r>
-          </a:p>
-        </p:txBody>
-      </p:sp>
-      <p:sp>
-        <p:nvSpPr>
-          <p:cNvPr id="4" name="Rectangle 3"/>
-          <p:cNvSpPr/>
-          <p:nvPr/>
-        </p:nvSpPr>
-        <p:spPr>
-          <a:xfrm>
-            <a:off x="182880" y="457200"/>
-            <a:ext cx="91440" cy="5943600"/>
-          </a:xfrm>
-          <a:prstGeom prst="rect">
-            <a:avLst/>
-          </a:prstGeom>
-          <a:solidFill>
-            <a:srgbClr val="3CB371"/>
-          </a:solidFill>
-          <a:ln>
-            <a:noFill/>
-          </a:ln>
-        </p:spPr>
-        <p:style>
-          <a:lnRef idx="1">
-            <a:schemeClr val="accent1"/>
-          </a:lnRef>
-          <a:fillRef idx="3">
-            <a:schemeClr val="accent1"/>
-          </a:fillRef>
-          <a:effectRef idx="2">
-            <a:schemeClr val="accent1"/>
-          </a:effectRef>
-          <a:fontRef idx="minor">
-            <a:schemeClr val="lt1"/>
-          </a:fontRef>
-        </p:style>
-        <p:txBody>
-          <a:bodyPr rtlCol="0" anchor="ctr"/>
-          <a:lstStyle/>
-          <a:p>
-            <a:pPr algn="ctr"/>
-          </a:p>
-        </p:txBody>
-      </p:sp>
-      <p:sp>
-        <p:nvSpPr>
-          <p:cNvPr id="5" name="Rectangle 4"/>
-          <p:cNvSpPr/>
-          <p:nvPr/>
-        </p:nvSpPr>
-        <p:spPr>
-          <a:xfrm>
-            <a:off x="182880" y="6400800"/>
-            <a:ext cx="11795760" cy="18288"/>
-          </a:xfrm>
-          <a:prstGeom prst="rect">
-            <a:avLst/>
-          </a:prstGeom>
-          <a:solidFill>
-            <a:srgbClr val="3CB371"/>
-          </a:solidFill>
-          <a:ln>
-            <a:noFill/>
-          </a:ln>
-        </p:spPr>
-        <p:style>
-          <a:lnRef idx="1">
-            <a:schemeClr val="accent1"/>
-          </a:lnRef>
-          <a:fillRef idx="3">
-            <a:schemeClr val="accent1"/>
-          </a:fillRef>
-          <a:effectRef idx="2">
-            <a:schemeClr val="accent1"/>
-          </a:effectRef>
-          <a:fontRef idx="minor">
-            <a:schemeClr val="lt1"/>
-          </a:fontRef>
-        </p:style>
-        <p:txBody>
-          <a:bodyPr rtlCol="0" anchor="ctr"/>
-          <a:lstStyle/>
-          <a:p>
-            <a:pPr algn="ctr"/>
-          </a:p>
-        </p:txBody>
-      </p:sp>
-      <p:sp>
-        <p:nvSpPr>
-          <p:cNvPr id="6" name="TextBox 5"/>
-          <p:cNvSpPr txBox="1"/>
-          <p:nvPr/>
-        </p:nvSpPr>
-        <p:spPr>
-          <a:xfrm>
-            <a:off x="11247120" y="6492240"/>
-            <a:ext cx="457200" cy="274320"/>
-          </a:xfrm>
-          <a:prstGeom prst="rect">
-            <a:avLst/>
-          </a:prstGeom>
-          <a:noFill/>
-        </p:spPr>
-        <p:txBody>
-          <a:bodyPr wrap="none">
-            <a:spAutoFit/>
-          </a:bodyPr>
-          <a:lstStyle/>
-          <a:p>
-            <a:pPr algn="r">
-              <a:defRPr sz="1200">
-                <a:solidFill>
-                  <a:srgbClr val="3C3C3C"/>
-                </a:solidFill>
-              </a:defRPr>
-            </a:pPr>
-            <a:r>
-              <a:t>9/15</a:t>
+              <a:t>9/9</a:t>
             </a:r>
           </a:p>
         </p:txBody>

--- a/Styled_Slides.pptx
+++ b/Styled_Slides.pptx
@@ -3128,7 +3128,7 @@
               </a:defRPr>
             </a:pPr>
             <a:r>
-              <a:t>Introduction: Nondeterminism by Analogy</a:t>
+              <a:t>Nondeterminism by Analogy</a:t>
             </a:r>
           </a:p>
         </p:txBody>
@@ -3163,7 +3163,7 @@
               </a:defRPr>
             </a:pPr>
             <a:r>
-              <a:t>This lecture explores the concept of nondeterminism, a crucial idea in computer science and other fields.  We'll understand it not through abstract definitions, but by examining relatable analogies.  These analogies will show how nondeterminism deals with multiple possibilities simultaneously, rather than following a single predetermined path.  We will examine navigating a maze, internet packet routing, and chess as examples to illustrate different facets of this concept.  The lecture concludes by discussing the implications of nondeterminism in the real world and theoretical computer science.</a:t>
+              <a:t>This lecture introduces the concept of nondeterminism, a crucial concept in computer science and other fields.  Unlike determinism, where a single outcome follows a given input, nondeterminism allows for multiple possible outcomes. We'll explore this counter-intuitive idea through tangible analogies, making it easier to grasp its implications. These analogies will illustrate how nondeterminism helps us model systems with inherent uncertainty or multiple possibilities.  The use of analogies is particularly important because the concept of non-determinism can be difficult to grasp intuitively.</a:t>
             </a:r>
           </a:p>
         </p:txBody>
@@ -3339,7 +3339,7 @@
               </a:defRPr>
             </a:pPr>
             <a:r>
-              <a:t>Navigating a Maze: Determinism</a:t>
+              <a:t>Outline</a:t>
             </a:r>
           </a:p>
         </p:txBody>
@@ -3374,7 +3374,7 @@
               </a:defRPr>
             </a:pPr>
             <a:r>
-              <a:t>Let's consider a deterministic approach to navigating a maze.  Determinism means following a single, pre-defined rule to achieve a goal.  A simple example is a "left-most" strategy: always choose the leftmost path at every junction.  This strategy guarantees success in some mazes (like Maze 2 in the slides), and complete failure in others (like Maze 1).  The key is that a deterministic strategy provides a guaranteed outcome (success or failure) for every instance given the strategy, making the outcome certain.</a:t>
+              <a:t>Today's lecture will use three real-world analogies to explain nondeterminism:  1) Navigating a maze:  We'll contrast deterministic (always choosing the leftmost path) and nondeterministic (exploring all paths) approaches. 2) Routing packets on the internet: Data packets can take numerous routes; nondeterminism helps model this variability. 3) Planning moves in chess:  We must consider our opponent's possible moves, a fundamentally nondeterministic aspect of the game.  Finally, we’ll briefly discuss nondeterminism's broader significance in theoretical computer science and its relevance to real-world problems.</a:t>
             </a:r>
           </a:p>
         </p:txBody>
@@ -3550,7 +3550,7 @@
               </a:defRPr>
             </a:pPr>
             <a:r>
-              <a:t>Navigating a Maze: Nondeterminism</a:t>
+              <a:t>Navigating a Maze: Determinism</a:t>
             </a:r>
           </a:p>
         </p:txBody>
@@ -3585,7 +3585,7 @@
               </a:defRPr>
             </a:pPr>
             <a:r>
-              <a:t>In contrast to determinism, nondeterminism considers all possible paths simultaneously. When solving a maze nondeterministically, we imagine exploring every path concurrently to determine if a solution exists. In Maze 1 (unsolvable), all paths would be explored, and the nondeterministic approach would correctly identify the lack of a solution.  In Maze 2, at least one solution would be found. Nondeterminism describes the maze's inherent solvability rather than the method used to solve it. It's about the potential for solutions, not a guaranteed path.</a:t>
+              <a:t>Let's consider a deterministic strategy for solving a maze: always choose the leftmost path.  This is a deterministic algorithm because given any junction, the next step is always predetermined. In Maze 2 (the example provided), this strategy guarantees success. However, a deterministic strategy, by definition, provides only one possible path. In Maze 1 (the example), this "leftmost" strategy fails to find the solution, illustrating a limitation of deterministic approaches. Determinism focuses on guaranteed outcomes, but these guarantees may not always exist for all problems.</a:t>
             </a:r>
           </a:p>
         </p:txBody>
@@ -3761,7 +3761,7 @@
               </a:defRPr>
             </a:pPr>
             <a:r>
-              <a:t>Routing Packets on the Internet: A Nondeterministic System</a:t>
+              <a:t>Navigating a Maze: Nondeterminism</a:t>
             </a:r>
           </a:p>
         </p:txBody>
@@ -3796,7 +3796,7 @@
               </a:defRPr>
             </a:pPr>
             <a:r>
-              <a:t>Consider sending a data packet from your computer to a website's server. The packet's journey isn't a single, predetermined path.  The internet's routing protocols explore multiple routes concurrently, choosing the fastest or most reliable available at each step. This is a naturally nondeterministic system because we can't predict which specific route a packet will take in advance.  The system must be prepared for many possibilities and chooses the best amongst them dynamically.</a:t>
+              <a:t>Nondeterminism, in contrast, explores all possible paths concurrently.  In a nondeterministic approach to maze solving, we envision simultaneously trying every path from every junction. This allows us to determine whether a solution exists, regardless of the specific path taken.  In Maze 1, nondeterminism reveals that no solution exists.  In Maze 2, it confirms the existence of a solution (even though it doesn't pinpoint a specific solution path).  Nondeterminism focuses on the existence of solutions, not the method of finding them.</a:t>
             </a:r>
           </a:p>
         </p:txBody>
@@ -3972,7 +3972,7 @@
               </a:defRPr>
             </a:pPr>
             <a:r>
-              <a:t>Planning Moves in Chess: Nondeterministic Strategy</a:t>
+              <a:t>Routing Packets on the Internet</a:t>
             </a:r>
           </a:p>
         </p:txBody>
@@ -4007,7 +4007,7 @@
               </a:defRPr>
             </a:pPr>
             <a:r>
-              <a:t>In chess, planning your moves requires considering your opponent's potential responses.  A nondeterministic approach would involve creating a game tree – a tree-like structure exploring all possible moves and counter-moves. Although we can't know with certainty what the opponent will do, nondeterminism helps model this uncertainty, allowing you to plan for many future scenarios and choose the best possible move based on a range of potential outcomes.   This doesn't necessarily mean that we consider every possible game; rather, we consider possible responses that are deemed likely or relevant.</a:t>
+              <a:t>Consider sending a data packet from your laptop to a web server.  The packet's route isn't predetermined; it traverses the network via various routers, taking different paths depending on network congestion, available bandwidth, and other dynamic factors.  This inherent uncertainty is a real-world example of nondeterminism.  We can't predict the exact path, but network protocols are designed to handle this nondeterministic behavior, ensuring delivery despite the unpredictable routing.  This illustrates nondeterminism in a dynamic system.</a:t>
             </a:r>
           </a:p>
         </p:txBody>
@@ -4183,7 +4183,7 @@
               </a:defRPr>
             </a:pPr>
             <a:r>
-              <a:t>Why Nondeterminism Matters</a:t>
+              <a:t>Planning Moves in Chess</a:t>
             </a:r>
           </a:p>
         </p:txBody>
@@ -4218,7 +4218,7 @@
               </a:defRPr>
             </a:pPr>
             <a:r>
-              <a:t>Nondeterminism is powerful in theoretical computer science for two main reasons: (1) Power:  Allowing multiple parallel choices can overcome limitations of deterministic algorithms, potentially solving problems more efficiently. (2) Uncertainty: Modeling the unknown by considering all possibilities allows for strong guarantees about system correctness, security, and performance – even in uncertain environments.  The question of whether true nondeterminism exists in the real world is philosophically complex and beyond the scope of this lecture, but it is extremely valuable as a modeling tool.</a:t>
+              <a:t>In chess, a player must plan moves considering their opponent's potential responses.  The opponent's choices are nondeterministic from the player's perspective.  A strong chess player explores a "game tree" – a branching structure representing all possible sequences of moves.  This tree model is inherently nondeterministic, accounting for the opponent's unpredictable actions. Nondeterminism helps players evaluate the potential consequences of their moves, considering all possible future scenarios. This helps to strategize optimal play.</a:t>
             </a:r>
           </a:p>
         </p:txBody>
@@ -4394,7 +4394,7 @@
               </a:defRPr>
             </a:pPr>
             <a:r>
-              <a:t>Summary</a:t>
+              <a:t>Why Nondeterminism?</a:t>
             </a:r>
           </a:p>
         </p:txBody>
@@ -4429,7 +4429,7 @@
               </a:defRPr>
             </a:pPr>
             <a:r>
-              <a:t>This lecture introduced the concept of nondeterminism using three tangible analogies: navigating a maze, internet packet routing, and chess move planning.  We explored how nondeterminism handles multiple possibilities simultaneously, providing insights into both potential solutions and inherent system properties.  We then discussed the significance of nondeterminism in theoretical computer science for both its power and its ability to handle uncertainty.</a:t>
+              <a:t>Nondeterminism is significant in theoretical computer science for two main reasons: 1) Power:  Allowing for multiple parallel choices can lead to more efficient algorithms for certain problems.  It's a theoretical tool that can overcome limitations of deterministic approaches. 2) Uncertainty: Modeling uncertainty by considering all possibilities allows us to establish strong guarantees about system correctness, security, and performance, even in the presence of unknown or unpredictable inputs.  The question of whether true nondeterminism exists in the physical world is a complex philosophical one.  However, using a nondeterministic model is often useful for conceptualizing situations involving limited perspective or unpredictable factors.</a:t>
             </a:r>
           </a:p>
         </p:txBody>
@@ -4605,7 +4605,7 @@
               </a:defRPr>
             </a:pPr>
             <a:r>
-              <a:t>References</a:t>
+              <a:t>Summary</a:t>
             </a:r>
           </a:p>
         </p:txBody>
@@ -4640,7 +4640,7 @@
               </a:defRPr>
             </a:pPr>
             <a:r>
-              <a:t>This slide provides references for further reading on the concepts discussed in the lecture, focusing on the chess example.</a:t>
+              <a:t>This lecture has used three analogies—maze navigation, internet packet routing, and chess—to illustrate the concept of nondeterminism. We contrasted it with determinism, highlighting its importance in dealing with uncertainty and exploring multiple possibilities.  We also briefly considered the role and significance of nondeterminism within theoretical computer science and its application to real-world scenarios.</a:t>
             </a:r>
           </a:p>
         </p:txBody>
@@ -4816,7 +4816,7 @@
               </a:defRPr>
             </a:pPr>
             <a:r>
-              <a:t>Thank You!</a:t>
+              <a:t>References &amp; Thank You</a:t>
             </a:r>
           </a:p>
         </p:txBody>
@@ -4851,7 +4851,7 @@
               </a:defRPr>
             </a:pPr>
             <a:r>
-              <a:t>This is the concluding slide expressing gratitude to the audience and acknowledging those who contributed to the lecture content.</a:t>
+              <a:t>This slide acknowledges contributions and lists references used, showing academic rigor and transparency.  It provides concluding remarks.</a:t>
             </a:r>
           </a:p>
         </p:txBody>

--- a/Styled_Slides.pptx
+++ b/Styled_Slides.pptx
@@ -3128,7 +3128,7 @@
               </a:defRPr>
             </a:pPr>
             <a:r>
-              <a:t>Nondeterminism by Analogy</a:t>
+              <a:t>Introduction: Nondeterminism by Analogy</a:t>
             </a:r>
           </a:p>
         </p:txBody>
@@ -3163,7 +3163,7 @@
               </a:defRPr>
             </a:pPr>
             <a:r>
-              <a:t>This lecture introduces the concept of nondeterminism, a crucial concept in computer science and other fields.  Unlike determinism, where a single outcome follows a given input, nondeterminism allows for multiple possible outcomes. We'll explore this counter-intuitive idea through tangible analogies, making it easier to grasp its implications. These analogies will illustrate how nondeterminism helps us model systems with inherent uncertainty or multiple possibilities.  The use of analogies is particularly important because the concept of non-determinism can be difficult to grasp intuitively.</a:t>
+              <a:t>This lecture explores the concept of nondeterminism using relatable analogies.  Nondeterminism, in essence, refers to systems where the next state isn't uniquely determined by the current state; multiple possibilities exist.  We'll examine this through navigating a maze, internet packet routing, and chess strategy.  Understanding nondeterminism is crucial in fields like computer science, where algorithms and system behavior might involve unpredictable elements. The goal is to illustrate how nondeterministic thinking helps us deal with uncertainty and multiple possibilities.</a:t>
             </a:r>
           </a:p>
         </p:txBody>
@@ -3339,7 +3339,7 @@
               </a:defRPr>
             </a:pPr>
             <a:r>
-              <a:t>Outline</a:t>
+              <a:t>Navigating a Maze: Determinism</a:t>
             </a:r>
           </a:p>
         </p:txBody>
@@ -3374,7 +3374,7 @@
               </a:defRPr>
             </a:pPr>
             <a:r>
-              <a:t>Today's lecture will use three real-world analogies to explain nondeterminism:  1) Navigating a maze:  We'll contrast deterministic (always choosing the leftmost path) and nondeterministic (exploring all paths) approaches. 2) Routing packets on the internet: Data packets can take numerous routes; nondeterminism helps model this variability. 3) Planning moves in chess:  We must consider our opponent's possible moves, a fundamentally nondeterministic aspect of the game.  Finally, we’ll briefly discuss nondeterminism's broader significance in theoretical computer science and its relevance to real-world problems.</a:t>
+              <a:t>Let's first consider a deterministic approach to solving a maze. Determinism means following a set rule that guarantees a specific outcome, regardless of the maze's structure.  For instance,  a deterministic strategy might be "always take the left-most path." This strategy is guaranteed to solve some mazes but will fail for others. The key takeaway is that deterministic systems produce predictable outcomes based on predefined rules.  A pre-programmed robot following a "left-most" rule is a good example of a deterministic system.</a:t>
             </a:r>
           </a:p>
         </p:txBody>
@@ -3550,7 +3550,7 @@
               </a:defRPr>
             </a:pPr>
             <a:r>
-              <a:t>Navigating a Maze: Determinism</a:t>
+              <a:t>Navigating a Maze: Nondeterminism</a:t>
             </a:r>
           </a:p>
         </p:txBody>
@@ -3585,7 +3585,7 @@
               </a:defRPr>
             </a:pPr>
             <a:r>
-              <a:t>Let's consider a deterministic strategy for solving a maze: always choose the leftmost path.  This is a deterministic algorithm because given any junction, the next step is always predetermined. In Maze 2 (the example provided), this strategy guarantees success. However, a deterministic strategy, by definition, provides only one possible path. In Maze 1 (the example), this "leftmost" strategy fails to find the solution, illustrating a limitation of deterministic approaches. Determinism focuses on guaranteed outcomes, but these guarantees may not always exist for all problems.</a:t>
+              <a:t>Now, let's contrast this with a nondeterministic approach. Nondeterminism involves exploring all possible paths simultaneously to find a solution.  Imagine a system capable of branching out at each junction, testing every possible route concurrently. This is not a sequential process but rather a parallel exploration of all possibilities.  In the context of the maze, a nondeterministic approach would efficiently determine whether a solution exists rather than finding a specific solution by following one path. This emphasizes that nondeterminism focuses on the potential outcomes, not a single prescribed path.</a:t>
             </a:r>
           </a:p>
         </p:txBody>
@@ -3761,7 +3761,7 @@
               </a:defRPr>
             </a:pPr>
             <a:r>
-              <a:t>Navigating a Maze: Nondeterminism</a:t>
+              <a:t>Routing Packets on the Internet</a:t>
             </a:r>
           </a:p>
         </p:txBody>
@@ -3796,7 +3796,7 @@
               </a:defRPr>
             </a:pPr>
             <a:r>
-              <a:t>Nondeterminism, in contrast, explores all possible paths concurrently.  In a nondeterministic approach to maze solving, we envision simultaneously trying every path from every junction. This allows us to determine whether a solution exists, regardless of the specific path taken.  In Maze 1, nondeterminism reveals that no solution exists.  In Maze 2, it confirms the existence of a solution (even though it doesn't pinpoint a specific solution path).  Nondeterminism focuses on the existence of solutions, not the method of finding them.</a:t>
+              <a:t>Consider sending a data packet from your computer to a web server. The path it takes is nondeterministic.  The internet's routing protocols dynamically choose paths based on network conditions (congestion, link failures, etc.). There's no single predetermined route; the packet might travel along various routes depending on the current network state.  Nondeterminism helps model this inherent uncertainty and allows for the design of robust routing protocols that adapt to changing conditions.  The diagram depicts this as multiple possible paths from the source ('src') to the destination ('dst').</a:t>
             </a:r>
           </a:p>
         </p:txBody>
@@ -3972,7 +3972,7 @@
               </a:defRPr>
             </a:pPr>
             <a:r>
-              <a:t>Routing Packets on the Internet</a:t>
+              <a:t>Planning Moves in Chess</a:t>
             </a:r>
           </a:p>
         </p:txBody>
@@ -4007,7 +4007,7 @@
               </a:defRPr>
             </a:pPr>
             <a:r>
-              <a:t>Consider sending a data packet from your laptop to a web server.  The packet's route isn't predetermined; it traverses the network via various routers, taking different paths depending on network congestion, available bandwidth, and other dynamic factors.  This inherent uncertainty is a real-world example of nondeterminism.  We can't predict the exact path, but network protocols are designed to handle this nondeterministic behavior, ensuring delivery despite the unpredictable routing.  This illustrates nondeterminism in a dynamic system.</a:t>
+              <a:t>Chess presents another excellent example.  When planning a move, you don't know your opponent's response.  A nondeterministic approach would involve considering all possible opponent moves after each of your potential moves.  This creates a "game tree" where each branch represents a sequence of moves and counter-moves. This doesn't mean playing randomly; it means considering all possibilities to develop a sound strategy based on anticipating potential responses, not just the most likely ones.  The slide's diagram shows a small section of the chess game tree.</a:t>
             </a:r>
           </a:p>
         </p:txBody>
@@ -4183,7 +4183,7 @@
               </a:defRPr>
             </a:pPr>
             <a:r>
-              <a:t>Planning Moves in Chess</a:t>
+              <a:t>Why Nondeterminism?</a:t>
             </a:r>
           </a:p>
         </p:txBody>
@@ -4218,7 +4218,7 @@
               </a:defRPr>
             </a:pPr>
             <a:r>
-              <a:t>In chess, a player must plan moves considering their opponent's potential responses.  The opponent's choices are nondeterministic from the player's perspective.  A strong chess player explores a "game tree" – a branching structure representing all possible sequences of moves.  This tree model is inherently nondeterministic, accounting for the opponent's unpredictable actions. Nondeterminism helps players evaluate the potential consequences of their moves, considering all possible future scenarios. This helps to strategize optimal play.</a:t>
+              <a:t>Nondeterminism's importance in theoretical computer science stems from two key aspects: power and uncertainty.  The power of nondeterminism lies in its ability to explore multiple possibilities concurrently, often leading to more efficient algorithms than their deterministic counterparts. Uncertainty handling is its second crucial aspect; by considering all possibilities, we can make strong statements about system correctness, security, and performance, even in the presence of unpredictable factors. Whether nondeterminism truly exists in the real world is a philosophical question; it’s a valuable concept for modeling systems where our perspective is limited.</a:t>
             </a:r>
           </a:p>
         </p:txBody>
@@ -4394,7 +4394,7 @@
               </a:defRPr>
             </a:pPr>
             <a:r>
-              <a:t>Why Nondeterminism?</a:t>
+              <a:t>Summary</a:t>
             </a:r>
           </a:p>
         </p:txBody>
@@ -4429,7 +4429,7 @@
               </a:defRPr>
             </a:pPr>
             <a:r>
-              <a:t>Nondeterminism is significant in theoretical computer science for two main reasons: 1) Power:  Allowing for multiple parallel choices can lead to more efficient algorithms for certain problems.  It's a theoretical tool that can overcome limitations of deterministic approaches. 2) Uncertainty: Modeling uncertainty by considering all possibilities allows us to establish strong guarantees about system correctness, security, and performance, even in the presence of unknown or unpredictable inputs.  The question of whether true nondeterminism exists in the physical world is a complex philosophical one.  However, using a nondeterministic model is often useful for conceptualizing situations involving limited perspective or unpredictable factors.</a:t>
+              <a:t>This lecture introduced nondeterminism using three analogies: maze navigation, internet packet routing, and chess strategy.  Each example illustrated how nondeterminism deals with multiple possibilities and uncertainty, contrasting it with the predictable nature of deterministic systems. We briefly discussed the significance of nondeterminism in computer science and its role in modeling real-world systems, acknowledging the complexities of its philosophical implications.</a:t>
             </a:r>
           </a:p>
         </p:txBody>
@@ -4605,7 +4605,7 @@
               </a:defRPr>
             </a:pPr>
             <a:r>
-              <a:t>Summary</a:t>
+              <a:t>References</a:t>
             </a:r>
           </a:p>
         </p:txBody>
@@ -4640,7 +4640,7 @@
               </a:defRPr>
             </a:pPr>
             <a:r>
-              <a:t>This lecture has used three analogies—maze navigation, internet packet routing, and chess—to illustrate the concept of nondeterminism. We contrasted it with determinism, highlighting its importance in dealing with uncertainty and exploring multiple possibilities.  We also briefly considered the role and significance of nondeterminism within theoretical computer science and its application to real-world scenarios.</a:t>
+              <a:t>This slide lists the sources used for the lecture.  Specifically, it cites Chris Butner's work on ChessCoach for the chess game tree example.  Note that proper citation is crucial for academic integrity.</a:t>
             </a:r>
           </a:p>
         </p:txBody>
@@ -4816,7 +4816,7 @@
               </a:defRPr>
             </a:pPr>
             <a:r>
-              <a:t>References &amp; Thank You</a:t>
+              <a:t>Thank You!</a:t>
             </a:r>
           </a:p>
         </p:txBody>
@@ -4851,7 +4851,7 @@
               </a:defRPr>
             </a:pPr>
             <a:r>
-              <a:t>This slide acknowledges contributions and lists references used, showing academic rigor and transparency.  It provides concluding remarks.</a:t>
+              <a:t>This is the concluding slide, expressing gratitude to the audience and acknowledging individuals who contributed to the lecture's content.</a:t>
             </a:r>
           </a:p>
         </p:txBody>

--- a/Styled_Slides.pptx
+++ b/Styled_Slides.pptx
@@ -3128,7 +3128,7 @@
               </a:defRPr>
             </a:pPr>
             <a:r>
-              <a:t>Introduction: Nondeterminism by Analogy</a:t>
+              <a:t>Nondeterminism by Analogy</a:t>
             </a:r>
           </a:p>
         </p:txBody>
@@ -3163,7 +3163,26 @@
               </a:defRPr>
             </a:pPr>
             <a:r>
-              <a:t>This lecture explores the concept of nondeterminism using relatable analogies.  Nondeterminism, in essence, refers to systems where the next state isn't uniquely determined by the current state; multiple possibilities exist.  We'll examine this through navigating a maze, internet packet routing, and chess strategy.  Understanding nondeterminism is crucial in fields like computer science, where algorithms and system behavior might involve unpredictable elements. The goal is to illustrate how nondeterministic thinking helps us deal with uncertainty and multiple possibilities.</a:t>
+              <a:t>Slide </a:t>
+            </a:r>
+          </a:p>
+          <a:p>
+            <a:pPr algn="l">
+              <a:spcBef>
+                <a:spcPts val="1200"/>
+              </a:spcBef>
+              <a:spcAft>
+                <a:spcPts val="1200"/>
+              </a:spcAft>
+              <a:defRPr sz="2400" b="0">
+                <a:solidFill>
+                  <a:srgbClr val="3C3C3C"/>
+                </a:solidFill>
+                <a:latin typeface="Calibri"/>
+              </a:defRPr>
+            </a:pPr>
+            <a:r>
+              <a:t>This lecture explores the concept of nondeterminism – a scenario where multiple outcomes are possible from a single action, unlike determinism where a single action always yields a single, predictable outcome. We'll use relatable analogies to grasp this seemingly abstract idea.  Think of it as the difference between a perfectly predictable machine and a system where chance or choice plays a role.  We'll look at mazes, internet routing, and chess to illustrate different facets of nondeterminism.</a:t>
             </a:r>
           </a:p>
         </p:txBody>
@@ -3339,7 +3358,7 @@
               </a:defRPr>
             </a:pPr>
             <a:r>
-              <a:t>Navigating a Maze: Determinism</a:t>
+              <a:t>Outline</a:t>
             </a:r>
           </a:p>
         </p:txBody>
@@ -3374,7 +3393,26 @@
               </a:defRPr>
             </a:pPr>
             <a:r>
-              <a:t>Let's first consider a deterministic approach to solving a maze. Determinism means following a set rule that guarantees a specific outcome, regardless of the maze's structure.  For instance,  a deterministic strategy might be "always take the left-most path." This strategy is guaranteed to solve some mazes but will fail for others. The key takeaway is that deterministic systems produce predictable outcomes based on predefined rules.  A pre-programmed robot following a "left-most" rule is a good example of a deterministic system.</a:t>
+              <a:t>Slide </a:t>
+            </a:r>
+          </a:p>
+          <a:p>
+            <a:pPr algn="l">
+              <a:spcBef>
+                <a:spcPts val="1200"/>
+              </a:spcBef>
+              <a:spcAft>
+                <a:spcPts val="1200"/>
+              </a:spcAft>
+              <a:defRPr sz="2400" b="0">
+                <a:solidFill>
+                  <a:srgbClr val="3C3C3C"/>
+                </a:solidFill>
+                <a:latin typeface="Calibri"/>
+              </a:defRPr>
+            </a:pPr>
+            <a:r>
+              <a:t>Today's lecture will unravel the concept of nondeterminism using three concrete examples: navigating a maze (highlighting the exploration of multiple paths), analyzing internet packet routing (where the path is not predetermined), and strategizing in chess (where the opponent's moves are unpredictable).  Finally, we will briefly discuss the relevance of nondeterminism in the real world and its significance in theoretical computer science. This structured approach will ensure a clear understanding of this complex concept.</a:t>
             </a:r>
           </a:p>
         </p:txBody>
@@ -3550,7 +3588,7 @@
               </a:defRPr>
             </a:pPr>
             <a:r>
-              <a:t>Navigating a Maze: Nondeterminism</a:t>
+              <a:t>Navigating a Maze: Determinism</a:t>
             </a:r>
           </a:p>
         </p:txBody>
@@ -3585,7 +3623,26 @@
               </a:defRPr>
             </a:pPr>
             <a:r>
-              <a:t>Now, let's contrast this with a nondeterministic approach. Nondeterminism involves exploring all possible paths simultaneously to find a solution.  Imagine a system capable of branching out at each junction, testing every possible route concurrently. This is not a sequential process but rather a parallel exploration of all possibilities.  In the context of the maze, a nondeterministic approach would efficiently determine whether a solution exists rather than finding a specific solution by following one path. This emphasizes that nondeterminism focuses on the potential outcomes, not a single prescribed path.</a:t>
+              <a:t>Slide </a:t>
+            </a:r>
+          </a:p>
+          <a:p>
+            <a:pPr algn="l">
+              <a:spcBef>
+                <a:spcPts val="1200"/>
+              </a:spcBef>
+              <a:spcAft>
+                <a:spcPts val="1200"/>
+              </a:spcAft>
+              <a:defRPr sz="2400" b="0">
+                <a:solidFill>
+                  <a:srgbClr val="3C3C3C"/>
+                </a:solidFill>
+                <a:latin typeface="Calibri"/>
+              </a:defRPr>
+            </a:pPr>
+            <a:r>
+              <a:t>Let's start with a deterministic approach to maze navigation.  Determinism means following a set rule that guarantees a specific outcome.  For example, a deterministic strategy could be: "always take the leftmost path."  This strategy always works for some mazes (Maze 2 in the image), and never works for others (Maze 1).  Deterministic systems are predictable; the output is entirely determined by the input and the rules.</a:t>
             </a:r>
           </a:p>
         </p:txBody>
@@ -3761,7 +3818,7 @@
               </a:defRPr>
             </a:pPr>
             <a:r>
-              <a:t>Routing Packets on the Internet</a:t>
+              <a:t>Navigating a Maze: Nondeterminism</a:t>
             </a:r>
           </a:p>
         </p:txBody>
@@ -3796,7 +3853,26 @@
               </a:defRPr>
             </a:pPr>
             <a:r>
-              <a:t>Consider sending a data packet from your computer to a web server. The path it takes is nondeterministic.  The internet's routing protocols dynamically choose paths based on network conditions (congestion, link failures, etc.). There's no single predetermined route; the packet might travel along various routes depending on the current network state.  Nondeterminism helps model this inherent uncertainty and allows for the design of robust routing protocols that adapt to changing conditions.  The diagram depicts this as multiple possible paths from the source ('src') to the destination ('dst').</a:t>
+              <a:t>Slide </a:t>
+            </a:r>
+          </a:p>
+          <a:p>
+            <a:pPr algn="l">
+              <a:spcBef>
+                <a:spcPts val="1200"/>
+              </a:spcBef>
+              <a:spcAft>
+                <a:spcPts val="1200"/>
+              </a:spcAft>
+              <a:defRPr sz="2400" b="0">
+                <a:solidFill>
+                  <a:srgbClr val="3C3C3C"/>
+                </a:solidFill>
+                <a:latin typeface="Calibri"/>
+              </a:defRPr>
+            </a:pPr>
+            <a:r>
+              <a:t>Now, let's consider a nondeterministic approach. Nondeterminism involves exploring all possible paths simultaneously to find a solution.  This means considering every possible turn at every junction.  In the context of our mazes, this approach determines whether a maze is solvable regardless of the strategy used.  For example, it reveals that Maze 1 has no solution, whereas Maze 2 does. Nondeterminism focuses on the possibilities, not on a single path.</a:t>
             </a:r>
           </a:p>
         </p:txBody>
@@ -3972,7 +4048,7 @@
               </a:defRPr>
             </a:pPr>
             <a:r>
-              <a:t>Planning Moves in Chess</a:t>
+              <a:t>Routing Packets on the Internet</a:t>
             </a:r>
           </a:p>
         </p:txBody>
@@ -4007,7 +4083,26 @@
               </a:defRPr>
             </a:pPr>
             <a:r>
-              <a:t>Chess presents another excellent example.  When planning a move, you don't know your opponent's response.  A nondeterministic approach would involve considering all possible opponent moves after each of your potential moves.  This creates a "game tree" where each branch represents a sequence of moves and counter-moves. This doesn't mean playing randomly; it means considering all possibilities to develop a sound strategy based on anticipating potential responses, not just the most likely ones.  The slide's diagram shows a small section of the chess game tree.</a:t>
+              <a:t>Slide </a:t>
+            </a:r>
+          </a:p>
+          <a:p>
+            <a:pPr algn="l">
+              <a:spcBef>
+                <a:spcPts val="1200"/>
+              </a:spcBef>
+              <a:spcAft>
+                <a:spcPts val="1200"/>
+              </a:spcAft>
+              <a:defRPr sz="2400" b="0">
+                <a:solidFill>
+                  <a:srgbClr val="3C3C3C"/>
+                </a:solidFill>
+                <a:latin typeface="Calibri"/>
+              </a:defRPr>
+            </a:pPr>
+            <a:r>
+              <a:t>Consider sending a data packet from your laptop to a web server.  The internet's structure is a vast network; the packet's route isn't predetermined.  Numerous paths exist, and the actual route depends on network congestion, server availability, and various other factors.  This is a real-world example of nondeterminism: the final path is not known in advance; we can only consider the possibilities.</a:t>
             </a:r>
           </a:p>
         </p:txBody>
@@ -4183,7 +4278,7 @@
               </a:defRPr>
             </a:pPr>
             <a:r>
-              <a:t>Why Nondeterminism?</a:t>
+              <a:t>Planning Moves in Chess</a:t>
             </a:r>
           </a:p>
         </p:txBody>
@@ -4218,7 +4313,26 @@
               </a:defRPr>
             </a:pPr>
             <a:r>
-              <a:t>Nondeterminism's importance in theoretical computer science stems from two key aspects: power and uncertainty.  The power of nondeterminism lies in its ability to explore multiple possibilities concurrently, often leading to more efficient algorithms than their deterministic counterparts. Uncertainty handling is its second crucial aspect; by considering all possibilities, we can make strong statements about system correctness, security, and performance, even in the presence of unpredictable factors. Whether nondeterminism truly exists in the real world is a philosophical question; it’s a valuable concept for modeling systems where our perspective is limited.</a:t>
+              <a:t>Slide </a:t>
+            </a:r>
+          </a:p>
+          <a:p>
+            <a:pPr algn="l">
+              <a:spcBef>
+                <a:spcPts val="1200"/>
+              </a:spcBef>
+              <a:spcAft>
+                <a:spcPts val="1200"/>
+              </a:spcAft>
+              <a:defRPr sz="2400" b="0">
+                <a:solidFill>
+                  <a:srgbClr val="3C3C3C"/>
+                </a:solidFill>
+                <a:latin typeface="Calibri"/>
+              </a:defRPr>
+            </a:pPr>
+            <a:r>
+              <a:t>In chess, predicting the opponent's moves is impossible. We must consider all possible responses to our moves.  A nondeterministic approach in chess game planning involves creating a game tree: exploring all possible sequences of moves by both players.  This allows us to evaluate the potential outcomes of our moves and choose the best strategy despite the uncertainty introduced by the opponent's unpredictable choices.</a:t>
             </a:r>
           </a:p>
         </p:txBody>
@@ -4394,7 +4508,7 @@
               </a:defRPr>
             </a:pPr>
             <a:r>
-              <a:t>Summary</a:t>
+              <a:t>Why Nondeterminism?</a:t>
             </a:r>
           </a:p>
         </p:txBody>
@@ -4429,7 +4543,26 @@
               </a:defRPr>
             </a:pPr>
             <a:r>
-              <a:t>This lecture introduced nondeterminism using three analogies: maze navigation, internet packet routing, and chess strategy.  Each example illustrated how nondeterminism deals with multiple possibilities and uncertainty, contrasting it with the predictable nature of deterministic systems. We briefly discussed the significance of nondeterminism in computer science and its role in modeling real-world systems, acknowledging the complexities of its philosophical implications.</a:t>
+              <a:t>Slide </a:t>
+            </a:r>
+          </a:p>
+          <a:p>
+            <a:pPr algn="l">
+              <a:spcBef>
+                <a:spcPts val="1200"/>
+              </a:spcBef>
+              <a:spcAft>
+                <a:spcPts val="1200"/>
+              </a:spcAft>
+              <a:defRPr sz="2400" b="0">
+                <a:solidFill>
+                  <a:srgbClr val="3C3C3C"/>
+                </a:solidFill>
+                <a:latin typeface="Calibri"/>
+              </a:defRPr>
+            </a:pPr>
+            <a:r>
+              <a:t>Nondeterminism is crucial in theoretical computer science for two primary reasons: 1) Power:  Considering multiple possibilities simultaneously can lead to more efficient algorithms and problem-solving capabilities. 2) Uncertainty:  Modeling uncertainty by considering all possibilities allows us to build robust systems with strong guarantees of correctness, security, and performance.  Whether nondeterminism exists in the real world is a philosophical question, but it's a useful framework for analyzing systems with inherent uncertainties.</a:t>
             </a:r>
           </a:p>
         </p:txBody>
@@ -4605,7 +4738,7 @@
               </a:defRPr>
             </a:pPr>
             <a:r>
-              <a:t>References</a:t>
+              <a:t>Summary</a:t>
             </a:r>
           </a:p>
         </p:txBody>
@@ -4640,7 +4773,26 @@
               </a:defRPr>
             </a:pPr>
             <a:r>
-              <a:t>This slide lists the sources used for the lecture.  Specifically, it cites Chris Butner's work on ChessCoach for the chess game tree example.  Note that proper citation is crucial for academic integrity.</a:t>
+              <a:t>Slide </a:t>
+            </a:r>
+          </a:p>
+          <a:p>
+            <a:pPr algn="l">
+              <a:spcBef>
+                <a:spcPts val="1200"/>
+              </a:spcBef>
+              <a:spcAft>
+                <a:spcPts val="1200"/>
+              </a:spcAft>
+              <a:defRPr sz="2400" b="0">
+                <a:solidFill>
+                  <a:srgbClr val="3C3C3C"/>
+                </a:solidFill>
+                <a:latin typeface="Calibri"/>
+              </a:defRPr>
+            </a:pPr>
+            <a:r>
+              <a:t>To recap, we've explored nondeterminism using three analogies: maze navigation, internet packet routing, and chess strategy.  These examples helped illustrate the core concept: nondeterminism deals with multiple potential outcomes, unlike deterministic systems with predictable results. This framework is powerfully applicable in theoretical computer science for understanding the limits and capabilities of algorithms and systems.</a:t>
             </a:r>
           </a:p>
         </p:txBody>
@@ -4816,7 +4968,7 @@
               </a:defRPr>
             </a:pPr>
             <a:r>
-              <a:t>Thank You!</a:t>
+              <a:t>References &amp; Thank You</a:t>
             </a:r>
           </a:p>
         </p:txBody>
@@ -4851,7 +5003,26 @@
               </a:defRPr>
             </a:pPr>
             <a:r>
-              <a:t>This is the concluding slide, expressing gratitude to the audience and acknowledging individuals who contributed to the lecture's content.</a:t>
+              <a:t>Slide </a:t>
+            </a:r>
+          </a:p>
+          <a:p>
+            <a:pPr algn="l">
+              <a:spcBef>
+                <a:spcPts val="1200"/>
+              </a:spcBef>
+              <a:spcAft>
+                <a:spcPts val="1200"/>
+              </a:spcAft>
+              <a:defRPr sz="2400" b="0">
+                <a:solidFill>
+                  <a:srgbClr val="3C3C3C"/>
+                </a:solidFill>
+                <a:latin typeface="Calibri"/>
+              </a:defRPr>
+            </a:pPr>
+            <a:r>
+              <a:t>This slide contains the reference for the chess example and expresses gratitude towards the individuals who contributed to the lecture's content and examples.</a:t>
             </a:r>
           </a:p>
         </p:txBody>

--- a/Styled_Slides.pptx
+++ b/Styled_Slides.pptx
@@ -3128,7 +3128,7 @@
               </a:defRPr>
             </a:pPr>
             <a:r>
-              <a:t>Nondeterminism by Analogy</a:t>
+              <a:t>Introduction: Nondeterminism by Analogy</a:t>
             </a:r>
           </a:p>
         </p:txBody>
@@ -3163,26 +3163,7 @@
               </a:defRPr>
             </a:pPr>
             <a:r>
-              <a:t>Slide </a:t>
-            </a:r>
-          </a:p>
-          <a:p>
-            <a:pPr algn="l">
-              <a:spcBef>
-                <a:spcPts val="1200"/>
-              </a:spcBef>
-              <a:spcAft>
-                <a:spcPts val="1200"/>
-              </a:spcAft>
-              <a:defRPr sz="2400" b="0">
-                <a:solidFill>
-                  <a:srgbClr val="3C3C3C"/>
-                </a:solidFill>
-                <a:latin typeface="Calibri"/>
-              </a:defRPr>
-            </a:pPr>
-            <a:r>
-              <a:t>This lecture explores the concept of nondeterminism – a scenario where multiple outcomes are possible from a single action, unlike determinism where a single action always yields a single, predictable outcome. We'll use relatable analogies to grasp this seemingly abstract idea.  Think of it as the difference between a perfectly predictable machine and a system where chance or choice plays a role.  We'll look at mazes, internet routing, and chess to illustrate different facets of nondeterminism.</a:t>
+              <a:t>This lecture explores the concept of nondeterminism through relatable analogies.  Nondeterminism, in contrast to determinism, represents a system where multiple outcomes are possible from a single starting point, and the next state isn't solely predictable from the current one. We'll examine this concept using three real-world scenarios: navigating a maze, internet packet routing, and planning chess moves. This approach aims to provide an intuitive understanding before delving into its deeper implications in theoretical computer science.  Understanding nondeterminism is crucial for tackling problems involving uncertainty and exploring multiple potential solutions simultaneously.</a:t>
             </a:r>
           </a:p>
         </p:txBody>
@@ -3358,7 +3339,7 @@
               </a:defRPr>
             </a:pPr>
             <a:r>
-              <a:t>Outline</a:t>
+              <a:t>Navigating a Maze: Determinism</a:t>
             </a:r>
           </a:p>
         </p:txBody>
@@ -3393,26 +3374,7 @@
               </a:defRPr>
             </a:pPr>
             <a:r>
-              <a:t>Slide </a:t>
-            </a:r>
-          </a:p>
-          <a:p>
-            <a:pPr algn="l">
-              <a:spcBef>
-                <a:spcPts val="1200"/>
-              </a:spcBef>
-              <a:spcAft>
-                <a:spcPts val="1200"/>
-              </a:spcAft>
-              <a:defRPr sz="2400" b="0">
-                <a:solidFill>
-                  <a:srgbClr val="3C3C3C"/>
-                </a:solidFill>
-                <a:latin typeface="Calibri"/>
-              </a:defRPr>
-            </a:pPr>
-            <a:r>
-              <a:t>Today's lecture will unravel the concept of nondeterminism using three concrete examples: navigating a maze (highlighting the exploration of multiple paths), analyzing internet packet routing (where the path is not predetermined), and strategizing in chess (where the opponent's moves are unpredictable).  Finally, we will briefly discuss the relevance of nondeterminism in the real world and its significance in theoretical computer science. This structured approach will ensure a clear understanding of this complex concept.</a:t>
+              <a:t>Let's consider a deterministic approach to maze navigation.  Determinism implies a guaranteed outcome given a specific set of rules. In this example, our deterministic strategy is "always take the left-most path."  This strategy is guaranteed to solve some mazes (Maze 2 in the example) but will fail completely for others (Maze 1). This highlights a key aspect of determinism:  the outcome is predictable and predetermined by the chosen algorithm or strategy. The success or failure is entirely dependent on the strategy and the structure of the specific maze.</a:t>
             </a:r>
           </a:p>
         </p:txBody>
@@ -3588,7 +3550,7 @@
               </a:defRPr>
             </a:pPr>
             <a:r>
-              <a:t>Navigating a Maze: Determinism</a:t>
+              <a:t>Navigating a Maze: Nondeterminism</a:t>
             </a:r>
           </a:p>
         </p:txBody>
@@ -3623,26 +3585,7 @@
               </a:defRPr>
             </a:pPr>
             <a:r>
-              <a:t>Slide </a:t>
-            </a:r>
-          </a:p>
-          <a:p>
-            <a:pPr algn="l">
-              <a:spcBef>
-                <a:spcPts val="1200"/>
-              </a:spcBef>
-              <a:spcAft>
-                <a:spcPts val="1200"/>
-              </a:spcAft>
-              <a:defRPr sz="2400" b="0">
-                <a:solidFill>
-                  <a:srgbClr val="3C3C3C"/>
-                </a:solidFill>
-                <a:latin typeface="Calibri"/>
-              </a:defRPr>
-            </a:pPr>
-            <a:r>
-              <a:t>Let's start with a deterministic approach to maze navigation.  Determinism means following a set rule that guarantees a specific outcome.  For example, a deterministic strategy could be: "always take the leftmost path."  This strategy always works for some mazes (Maze 2 in the image), and never works for others (Maze 1).  Deterministic systems are predictable; the output is entirely determined by the input and the rules.</a:t>
+              <a:t>Nondeterminism considers all possible paths simultaneously. Instead of following a single predefined rule, a nondeterministic approach explores every branching path in the maze.  For Maze 1 (unsolvable), this reveals that no path leads to the exit. For Maze 2 (solvable), it finds at least one path to the exit.  Therefore, nondeterminism allows us to determine a property of the maze itself (solvable or unsolvable) rather than focusing on the efficacy of a specific navigation strategy. It focuses on the possibilities rather than a predetermined path.</a:t>
             </a:r>
           </a:p>
         </p:txBody>
@@ -3818,7 +3761,7 @@
               </a:defRPr>
             </a:pPr>
             <a:r>
-              <a:t>Navigating a Maze: Nondeterminism</a:t>
+              <a:t>Routing Packets on the Internet: Nondeterminism</a:t>
             </a:r>
           </a:p>
         </p:txBody>
@@ -3853,26 +3796,7 @@
               </a:defRPr>
             </a:pPr>
             <a:r>
-              <a:t>Slide </a:t>
-            </a:r>
-          </a:p>
-          <a:p>
-            <a:pPr algn="l">
-              <a:spcBef>
-                <a:spcPts val="1200"/>
-              </a:spcBef>
-              <a:spcAft>
-                <a:spcPts val="1200"/>
-              </a:spcAft>
-              <a:defRPr sz="2400" b="0">
-                <a:solidFill>
-                  <a:srgbClr val="3C3C3C"/>
-                </a:solidFill>
-                <a:latin typeface="Calibri"/>
-              </a:defRPr>
-            </a:pPr>
-            <a:r>
-              <a:t>Now, let's consider a nondeterministic approach. Nondeterminism involves exploring all possible paths simultaneously to find a solution.  This means considering every possible turn at every junction.  In the context of our mazes, this approach determines whether a maze is solvable regardless of the strategy used.  For example, it reveals that Maze 1 has no solution, whereas Maze 2 does. Nondeterminism focuses on the possibilities, not on a single path.</a:t>
+              <a:t>Consider sending a data packet from your laptop to a web server. The exact route the packet takes is not predetermined. The internet uses a system of routers that dynamically choose the "best" path based on factors like network congestion and link availability. This routing is nondeterministic; many paths exist, and the chosen path might vary each time.  Modeling this with nondeterminism allows us to account for all potential routes and to design robust systems that tolerate unpredictable network conditions. We account for the uncertainty inherent in the network.</a:t>
             </a:r>
           </a:p>
         </p:txBody>
@@ -4048,7 +3972,7 @@
               </a:defRPr>
             </a:pPr>
             <a:r>
-              <a:t>Routing Packets on the Internet</a:t>
+              <a:t>Planning Moves in Chess: Nondeterminism</a:t>
             </a:r>
           </a:p>
         </p:txBody>
@@ -4083,26 +4007,7 @@
               </a:defRPr>
             </a:pPr>
             <a:r>
-              <a:t>Slide </a:t>
-            </a:r>
-          </a:p>
-          <a:p>
-            <a:pPr algn="l">
-              <a:spcBef>
-                <a:spcPts val="1200"/>
-              </a:spcBef>
-              <a:spcAft>
-                <a:spcPts val="1200"/>
-              </a:spcAft>
-              <a:defRPr sz="2400" b="0">
-                <a:solidFill>
-                  <a:srgbClr val="3C3C3C"/>
-                </a:solidFill>
-                <a:latin typeface="Calibri"/>
-              </a:defRPr>
-            </a:pPr>
-            <a:r>
-              <a:t>Consider sending a data packet from your laptop to a web server.  The internet's structure is a vast network; the packet's route isn't predetermined.  Numerous paths exist, and the actual route depends on network congestion, server availability, and various other factors.  This is a real-world example of nondeterminism: the final path is not known in advance; we can only consider the possibilities.</a:t>
+              <a:t>In chess, we need to plan our moves while anticipating our opponent's responses.  A deterministic approach would assume a predictable opponent. In reality, chess is nondeterministic because the opponent's moves are unknown.  A nondeterministic approach would consider all possible opponent moves at each step, creating a vast decision tree. This allows us to plan for various scenarios and choose the move that maximizes our chances of winning, even under uncertainty about our opponent's strategy. We are planning for potential outcomes, rather than a single, predictable one.</a:t>
             </a:r>
           </a:p>
         </p:txBody>
@@ -4278,7 +4183,7 @@
               </a:defRPr>
             </a:pPr>
             <a:r>
-              <a:t>Planning Moves in Chess</a:t>
+              <a:t>Why Nondeterminism Matters</a:t>
             </a:r>
           </a:p>
         </p:txBody>
@@ -4313,26 +4218,7 @@
               </a:defRPr>
             </a:pPr>
             <a:r>
-              <a:t>Slide </a:t>
-            </a:r>
-          </a:p>
-          <a:p>
-            <a:pPr algn="l">
-              <a:spcBef>
-                <a:spcPts val="1200"/>
-              </a:spcBef>
-              <a:spcAft>
-                <a:spcPts val="1200"/>
-              </a:spcAft>
-              <a:defRPr sz="2400" b="0">
-                <a:solidFill>
-                  <a:srgbClr val="3C3C3C"/>
-                </a:solidFill>
-                <a:latin typeface="Calibri"/>
-              </a:defRPr>
-            </a:pPr>
-            <a:r>
-              <a:t>In chess, predicting the opponent's moves is impossible. We must consider all possible responses to our moves.  A nondeterministic approach in chess game planning involves creating a game tree: exploring all possible sequences of moves by both players.  This allows us to evaluate the potential outcomes of our moves and choose the best strategy despite the uncertainty introduced by the opponent's unpredictable choices.</a:t>
+              <a:t>Nondeterminism is crucial in theoretical computer science for two primary reasons:  First, it offers increased power. Exploring multiple paths in parallel can efficiently solve problems that are computationally difficult with deterministic algorithms. Second, it allows us to model uncertainty. By considering all possibilities, we can make strong statements about the robustness, security, and performance of a system in unpredictable environments.  The existence of nondeterminism in the real world is a philosophical question, but its conceptual value in understanding systems with limited perspectives is significant.</a:t>
             </a:r>
           </a:p>
         </p:txBody>
@@ -4508,7 +4394,7 @@
               </a:defRPr>
             </a:pPr>
             <a:r>
-              <a:t>Why Nondeterminism?</a:t>
+              <a:t>Summary</a:t>
             </a:r>
           </a:p>
         </p:txBody>
@@ -4543,26 +4429,7 @@
               </a:defRPr>
             </a:pPr>
             <a:r>
-              <a:t>Slide </a:t>
-            </a:r>
-          </a:p>
-          <a:p>
-            <a:pPr algn="l">
-              <a:spcBef>
-                <a:spcPts val="1200"/>
-              </a:spcBef>
-              <a:spcAft>
-                <a:spcPts val="1200"/>
-              </a:spcAft>
-              <a:defRPr sz="2400" b="0">
-                <a:solidFill>
-                  <a:srgbClr val="3C3C3C"/>
-                </a:solidFill>
-                <a:latin typeface="Calibri"/>
-              </a:defRPr>
-            </a:pPr>
-            <a:r>
-              <a:t>Nondeterminism is crucial in theoretical computer science for two primary reasons: 1) Power:  Considering multiple possibilities simultaneously can lead to more efficient algorithms and problem-solving capabilities. 2) Uncertainty:  Modeling uncertainty by considering all possibilities allows us to build robust systems with strong guarantees of correctness, security, and performance.  Whether nondeterminism exists in the real world is a philosophical question, but it's a useful framework for analyzing systems with inherent uncertainties.</a:t>
+              <a:t>This lecture illustrated nondeterminism through three analogies: maze navigation, internet packet routing, and chess.  We saw how nondeterminism moves beyond a single outcome to explore all possibilities, leading to a deeper understanding of the system's properties and behavior in uncertain situations.  This approach allows us to make stronger statements about the system's robustness and capabilities.  Understanding nondeterminism is critical in designing robust and efficient systems.</a:t>
             </a:r>
           </a:p>
         </p:txBody>
@@ -4738,7 +4605,7 @@
               </a:defRPr>
             </a:pPr>
             <a:r>
-              <a:t>Summary</a:t>
+              <a:t>References</a:t>
             </a:r>
           </a:p>
         </p:txBody>
@@ -4773,26 +4640,7 @@
               </a:defRPr>
             </a:pPr>
             <a:r>
-              <a:t>Slide </a:t>
-            </a:r>
-          </a:p>
-          <a:p>
-            <a:pPr algn="l">
-              <a:spcBef>
-                <a:spcPts val="1200"/>
-              </a:spcBef>
-              <a:spcAft>
-                <a:spcPts val="1200"/>
-              </a:spcAft>
-              <a:defRPr sz="2400" b="0">
-                <a:solidFill>
-                  <a:srgbClr val="3C3C3C"/>
-                </a:solidFill>
-                <a:latin typeface="Calibri"/>
-              </a:defRPr>
-            </a:pPr>
-            <a:r>
-              <a:t>To recap, we've explored nondeterminism using three analogies: maze navigation, internet packet routing, and chess strategy.  These examples helped illustrate the core concept: nondeterminism deals with multiple potential outcomes, unlike deterministic systems with predictable results. This framework is powerfully applicable in theoretical computer science for understanding the limits and capabilities of algorithms and systems.</a:t>
+              <a:t>This slide lists the references used in preparing this lecture, specifically referencing the source for the chess example.  This allows for verification of the information presented and enables further research by interested students.</a:t>
             </a:r>
           </a:p>
         </p:txBody>
@@ -4968,7 +4816,7 @@
               </a:defRPr>
             </a:pPr>
             <a:r>
-              <a:t>References &amp; Thank You</a:t>
+              <a:t>Thank You!</a:t>
             </a:r>
           </a:p>
         </p:txBody>
@@ -5003,26 +4851,7 @@
               </a:defRPr>
             </a:pPr>
             <a:r>
-              <a:t>Slide </a:t>
-            </a:r>
-          </a:p>
-          <a:p>
-            <a:pPr algn="l">
-              <a:spcBef>
-                <a:spcPts val="1200"/>
-              </a:spcBef>
-              <a:spcAft>
-                <a:spcPts val="1200"/>
-              </a:spcAft>
-              <a:defRPr sz="2400" b="0">
-                <a:solidFill>
-                  <a:srgbClr val="3C3C3C"/>
-                </a:solidFill>
-                <a:latin typeface="Calibri"/>
-              </a:defRPr>
-            </a:pPr>
-            <a:r>
-              <a:t>This slide contains the reference for the chess example and expresses gratitude towards the individuals who contributed to the lecture's content and examples.</a:t>
+              <a:t>This is the concluding slide, thanking the audience for their attention and acknowledging contributors to the lecture materials.</a:t>
             </a:r>
           </a:p>
         </p:txBody>
